--- a/進出水平衡計算對照系統_專案進度報告.pptx
+++ b/進出水平衡計算對照系統_專案進度報告.pptx
@@ -6,6 +6,8 @@
   </p:sldMasterIdLst>
   <p:sldIdLst>
     <p:sldId id="256" r:id="rId7"/>
+    <p:sldId id="257" r:id="rId8"/>
+    <p:sldId id="258" r:id="rId9"/>
   </p:sldIdLst>
   <p:sldSz cx="12191695" cy="6858000" type="screen4x3"/>
   <p:notesSz cx="6858000" cy="9144000"/>
@@ -3097,13 +3099,13 @@
         <p:spPr>
           <a:xfrm>
             <a:off x="0" y="0"/>
-            <a:ext cx="12191695" cy="914400"/>
+            <a:ext cx="12191695" cy="6858000"/>
           </a:xfrm>
           <a:prstGeom prst="rect">
             <a:avLst/>
           </a:prstGeom>
           <a:solidFill>
-            <a:srgbClr val="0F2A4A"/>
+            <a:srgbClr val="101216"/>
           </a:solidFill>
           <a:ln>
             <a:noFill/>
@@ -3140,14 +3142,14 @@
         </p:nvSpPr>
         <p:spPr>
           <a:xfrm>
-            <a:off x="0" y="914400"/>
-            <a:ext cx="12191695" cy="50800"/>
+            <a:off x="0" y="0"/>
+            <a:ext cx="164592" cy="960120"/>
           </a:xfrm>
           <a:prstGeom prst="rect">
             <a:avLst/>
           </a:prstGeom>
           <a:solidFill>
-            <a:srgbClr val="129A9A"/>
+            <a:srgbClr val="35D0E6"/>
           </a:solidFill>
           <a:ln>
             <a:noFill/>
@@ -3178,20 +3180,146 @@
       </p:sp>
       <p:sp>
         <p:nvSpPr>
-          <p:cNvPr id="4" name="Rectangle 3"/>
+          <p:cNvPr id="4" name="TextBox 3"/>
+          <p:cNvSpPr txBox="1"/>
+          <p:nvPr/>
+        </p:nvSpPr>
+        <p:spPr>
+          <a:xfrm>
+            <a:off x="457200" y="128016"/>
+            <a:ext cx="9144000" cy="292608"/>
+          </a:xfrm>
+          <a:prstGeom prst="rect">
+            <a:avLst/>
+          </a:prstGeom>
+          <a:noFill/>
+        </p:spPr>
+        <p:txBody>
+          <a:bodyPr wrap="square" anchor="t" tIns="0" bIns="0" lIns="25400" rIns="25400">
+            <a:spAutoFit/>
+          </a:bodyPr>
+          <a:lstStyle/>
+          <a:p>
+            <a:pPr algn="l">
+              <a:spcBef>
+                <a:spcPts val="0"/>
+              </a:spcBef>
+              <a:spcAft>
+                <a:spcPts val="300"/>
+              </a:spcAft>
+            </a:pPr>
+            <a:r>
+              <a:rPr sz="1200" b="1">
+                <a:solidFill>
+                  <a:srgbClr val="35D0E6"/>
+                </a:solidFill>
+                <a:latin typeface="Microsoft JhengHei"/>
+              </a:rPr>
+              <a:t>PROJECT PROGRESS REPORT ‧ 2026/06</a:t>
+            </a:r>
+          </a:p>
+        </p:txBody>
+      </p:sp>
+      <p:sp>
+        <p:nvSpPr>
+          <p:cNvPr id="5" name="TextBox 4"/>
+          <p:cNvSpPr txBox="1"/>
+          <p:nvPr/>
+        </p:nvSpPr>
+        <p:spPr>
+          <a:xfrm>
+            <a:off x="457200" y="384048"/>
+            <a:ext cx="10058400" cy="548640"/>
+          </a:xfrm>
+          <a:prstGeom prst="rect">
+            <a:avLst/>
+          </a:prstGeom>
+          <a:noFill/>
+        </p:spPr>
+        <p:txBody>
+          <a:bodyPr wrap="square" anchor="t" tIns="0" bIns="0" lIns="25400" rIns="25400">
+            <a:spAutoFit/>
+          </a:bodyPr>
+          <a:lstStyle/>
+          <a:p>
+            <a:pPr algn="l">
+              <a:spcBef>
+                <a:spcPts val="0"/>
+              </a:spcBef>
+              <a:spcAft>
+                <a:spcPts val="300"/>
+              </a:spcAft>
+            </a:pPr>
+            <a:r>
+              <a:rPr sz="2600" b="1">
+                <a:solidFill>
+                  <a:srgbClr val="FFFFFF"/>
+                </a:solidFill>
+                <a:latin typeface="Microsoft JhengHei"/>
+              </a:rPr>
+              <a:t>進出水平衡計算對照系統</a:t>
+            </a:r>
+          </a:p>
+        </p:txBody>
+      </p:sp>
+      <p:sp>
+        <p:nvSpPr>
+          <p:cNvPr id="6" name="TextBox 5"/>
+          <p:cNvSpPr txBox="1"/>
+          <p:nvPr/>
+        </p:nvSpPr>
+        <p:spPr>
+          <a:xfrm>
+            <a:off x="10789920" y="274320"/>
+            <a:ext cx="1097280" cy="457200"/>
+          </a:xfrm>
+          <a:prstGeom prst="rect">
+            <a:avLst/>
+          </a:prstGeom>
+          <a:noFill/>
+        </p:spPr>
+        <p:txBody>
+          <a:bodyPr wrap="square" anchor="t" tIns="0" bIns="0" lIns="25400" rIns="25400">
+            <a:spAutoFit/>
+          </a:bodyPr>
+          <a:lstStyle/>
+          <a:p>
+            <a:pPr algn="r">
+              <a:spcBef>
+                <a:spcPts val="0"/>
+              </a:spcBef>
+              <a:spcAft>
+                <a:spcPts val="300"/>
+              </a:spcAft>
+            </a:pPr>
+            <a:r>
+              <a:rPr sz="1200" b="1">
+                <a:solidFill>
+                  <a:srgbClr val="8A93A1"/>
+                </a:solidFill>
+                <a:latin typeface="Microsoft JhengHei"/>
+              </a:rPr>
+              <a:t>PAGE 01</a:t>
+            </a:r>
+          </a:p>
+        </p:txBody>
+      </p:sp>
+      <p:sp>
+        <p:nvSpPr>
+          <p:cNvPr id="7" name="Rectangle 6"/>
           <p:cNvSpPr/>
           <p:nvPr/>
         </p:nvSpPr>
         <p:spPr>
           <a:xfrm>
-            <a:off x="0" y="0"/>
-            <a:ext cx="201168" cy="914400"/>
+            <a:off x="457200" y="987552"/>
+            <a:ext cx="11274552" cy="25400"/>
           </a:xfrm>
           <a:prstGeom prst="rect">
             <a:avLst/>
           </a:prstGeom>
           <a:solidFill>
-            <a:srgbClr val="129A9A"/>
+            <a:srgbClr val="2A2F39"/>
           </a:solidFill>
           <a:ln>
             <a:noFill/>
@@ -3222,14 +3350,2755 @@
       </p:sp>
       <p:sp>
         <p:nvSpPr>
+          <p:cNvPr id="8" name="TextBox 7"/>
+          <p:cNvSpPr txBox="1"/>
+          <p:nvPr/>
+        </p:nvSpPr>
+        <p:spPr>
+          <a:xfrm>
+            <a:off x="457200" y="1143000"/>
+            <a:ext cx="11247120" cy="365760"/>
+          </a:xfrm>
+          <a:prstGeom prst="rect">
+            <a:avLst/>
+          </a:prstGeom>
+          <a:noFill/>
+        </p:spPr>
+        <p:txBody>
+          <a:bodyPr wrap="square" anchor="t" tIns="0" bIns="0" lIns="25400" rIns="25400">
+            <a:spAutoFit/>
+          </a:bodyPr>
+          <a:lstStyle/>
+          <a:p>
+            <a:pPr algn="l">
+              <a:spcBef>
+                <a:spcPts val="0"/>
+              </a:spcBef>
+              <a:spcAft>
+                <a:spcPts val="300"/>
+              </a:spcAft>
+            </a:pPr>
+            <a:r>
+              <a:rPr sz="1300" b="0">
+                <a:solidFill>
+                  <a:srgbClr val="35D0E6"/>
+                </a:solidFill>
+                <a:latin typeface="Microsoft JhengHei"/>
+              </a:rPr>
+              <a:t>精確計算蒸發量 ‧ Agent 自動化平衡計算與申報整理　|　預計上線 2026/10　|　目前進度約 25%</a:t>
+            </a:r>
+          </a:p>
+        </p:txBody>
+      </p:sp>
+      <p:sp>
+        <p:nvSpPr>
+          <p:cNvPr id="9" name="Rectangle 8"/>
+          <p:cNvSpPr/>
+          <p:nvPr/>
+        </p:nvSpPr>
+        <p:spPr>
+          <a:xfrm>
+            <a:off x="457200" y="1691640"/>
+            <a:ext cx="5486400" cy="1828800"/>
+          </a:xfrm>
+          <a:prstGeom prst="rect">
+            <a:avLst/>
+          </a:prstGeom>
+          <a:solidFill>
+            <a:srgbClr val="1B1F27"/>
+          </a:solidFill>
+          <a:ln>
+            <a:noFill/>
+          </a:ln>
+          <a:effectLst/>
+        </p:spPr>
+        <p:style>
+          <a:lnRef idx="1">
+            <a:schemeClr val="accent1"/>
+          </a:lnRef>
+          <a:fillRef idx="3">
+            <a:schemeClr val="accent1"/>
+          </a:fillRef>
+          <a:effectRef idx="2">
+            <a:schemeClr val="accent1"/>
+          </a:effectRef>
+          <a:fontRef idx="minor">
+            <a:schemeClr val="lt1"/>
+          </a:fontRef>
+        </p:style>
+        <p:txBody>
+          <a:bodyPr rtlCol="0" anchor="ctr"/>
+          <a:lstStyle/>
+          <a:p>
+            <a:pPr algn="ctr"/>
+          </a:p>
+        </p:txBody>
+      </p:sp>
+      <p:sp>
+        <p:nvSpPr>
+          <p:cNvPr id="10" name="Rectangle 9"/>
+          <p:cNvSpPr/>
+          <p:nvPr/>
+        </p:nvSpPr>
+        <p:spPr>
+          <a:xfrm>
+            <a:off x="457200" y="1691640"/>
+            <a:ext cx="5486400" cy="384048"/>
+          </a:xfrm>
+          <a:prstGeom prst="rect">
+            <a:avLst/>
+          </a:prstGeom>
+          <a:solidFill>
+            <a:srgbClr val="2A2F39"/>
+          </a:solidFill>
+          <a:ln>
+            <a:noFill/>
+          </a:ln>
+          <a:effectLst/>
+        </p:spPr>
+        <p:style>
+          <a:lnRef idx="1">
+            <a:schemeClr val="accent1"/>
+          </a:lnRef>
+          <a:fillRef idx="3">
+            <a:schemeClr val="accent1"/>
+          </a:fillRef>
+          <a:effectRef idx="2">
+            <a:schemeClr val="accent1"/>
+          </a:effectRef>
+          <a:fontRef idx="minor">
+            <a:schemeClr val="lt1"/>
+          </a:fontRef>
+        </p:style>
+        <p:txBody>
+          <a:bodyPr rtlCol="0" anchor="ctr"/>
+          <a:lstStyle/>
+          <a:p>
+            <a:pPr algn="ctr"/>
+          </a:p>
+        </p:txBody>
+      </p:sp>
+      <p:sp>
+        <p:nvSpPr>
+          <p:cNvPr id="11" name="TextBox 10"/>
+          <p:cNvSpPr txBox="1"/>
+          <p:nvPr/>
+        </p:nvSpPr>
+        <p:spPr>
+          <a:xfrm>
+            <a:off x="640080" y="1691640"/>
+            <a:ext cx="5120640" cy="384048"/>
+          </a:xfrm>
+          <a:prstGeom prst="rect">
+            <a:avLst/>
+          </a:prstGeom>
+          <a:noFill/>
+        </p:spPr>
+        <p:txBody>
+          <a:bodyPr wrap="square" anchor="ctr" tIns="0" bIns="0" lIns="25400" rIns="25400">
+            <a:spAutoFit/>
+          </a:bodyPr>
+          <a:lstStyle/>
+          <a:p>
+            <a:pPr algn="l">
+              <a:spcBef>
+                <a:spcPts val="0"/>
+              </a:spcBef>
+              <a:spcAft>
+                <a:spcPts val="300"/>
+              </a:spcAft>
+            </a:pPr>
+            <a:r>
+              <a:rPr sz="1500" b="1">
+                <a:solidFill>
+                  <a:srgbClr val="35D0E6"/>
+                </a:solidFill>
+                <a:latin typeface="Microsoft JhengHei"/>
+              </a:rPr>
+              <a:t>專案目的</a:t>
+            </a:r>
+          </a:p>
+        </p:txBody>
+      </p:sp>
+      <p:sp>
+        <p:nvSpPr>
+          <p:cNvPr id="12" name="TextBox 11"/>
+          <p:cNvSpPr txBox="1"/>
+          <p:nvPr/>
+        </p:nvSpPr>
+        <p:spPr>
+          <a:xfrm>
+            <a:off x="640080" y="2212848"/>
+            <a:ext cx="5120640" cy="1234440"/>
+          </a:xfrm>
+          <a:prstGeom prst="rect">
+            <a:avLst/>
+          </a:prstGeom>
+          <a:noFill/>
+        </p:spPr>
+        <p:txBody>
+          <a:bodyPr wrap="square" anchor="t" tIns="0" bIns="0" lIns="25400" rIns="25400">
+            <a:spAutoFit/>
+          </a:bodyPr>
+          <a:lstStyle/>
+          <a:p>
+            <a:pPr algn="l">
+              <a:spcBef>
+                <a:spcPts val="0"/>
+              </a:spcBef>
+              <a:spcAft>
+                <a:spcPts val="700"/>
+              </a:spcAft>
+            </a:pPr>
+            <a:r>
+              <a:rPr sz="1250" b="0">
+                <a:solidFill>
+                  <a:srgbClr val="C9CFD8"/>
+                </a:solidFill>
+                <a:latin typeface="Microsoft JhengHei"/>
+              </a:rPr>
+              <a:t>‧ 水平衡計算：彙整進／出水資料，建立可稽核對照基準。</a:t>
+            </a:r>
+          </a:p>
+          <a:p>
+            <a:pPr algn="l">
+              <a:spcBef>
+                <a:spcPts val="0"/>
+              </a:spcBef>
+              <a:spcAft>
+                <a:spcPts val="700"/>
+              </a:spcAft>
+            </a:pPr>
+            <a:r>
+              <a:rPr sz="1250" b="0">
+                <a:solidFill>
+                  <a:srgbClr val="C9CFD8"/>
+                </a:solidFill>
+                <a:latin typeface="Microsoft JhengHei"/>
+              </a:rPr>
+              <a:t>‧ 蒸發量推算：以平衡差值精準反推蒸發量，取代估算。</a:t>
+            </a:r>
+          </a:p>
+          <a:p>
+            <a:pPr algn="l">
+              <a:spcBef>
+                <a:spcPts val="0"/>
+              </a:spcBef>
+              <a:spcAft>
+                <a:spcPts val="700"/>
+              </a:spcAft>
+            </a:pPr>
+            <a:r>
+              <a:rPr sz="1250" b="0">
+                <a:solidFill>
+                  <a:srgbClr val="C9CFD8"/>
+                </a:solidFill>
+                <a:latin typeface="Microsoft JhengHei"/>
+              </a:rPr>
+              <a:t>‧ Agent 自動化：代理執行計算並整理後續申報資料。</a:t>
+            </a:r>
+          </a:p>
+        </p:txBody>
+      </p:sp>
+      <p:sp>
+        <p:nvSpPr>
+          <p:cNvPr id="13" name="Rectangle 12"/>
+          <p:cNvSpPr/>
+          <p:nvPr/>
+        </p:nvSpPr>
+        <p:spPr>
+          <a:xfrm>
+            <a:off x="6245352" y="1691640"/>
+            <a:ext cx="5486400" cy="1828800"/>
+          </a:xfrm>
+          <a:prstGeom prst="rect">
+            <a:avLst/>
+          </a:prstGeom>
+          <a:solidFill>
+            <a:srgbClr val="1B1F27"/>
+          </a:solidFill>
+          <a:ln>
+            <a:noFill/>
+          </a:ln>
+          <a:effectLst/>
+        </p:spPr>
+        <p:style>
+          <a:lnRef idx="1">
+            <a:schemeClr val="accent1"/>
+          </a:lnRef>
+          <a:fillRef idx="3">
+            <a:schemeClr val="accent1"/>
+          </a:fillRef>
+          <a:effectRef idx="2">
+            <a:schemeClr val="accent1"/>
+          </a:effectRef>
+          <a:fontRef idx="minor">
+            <a:schemeClr val="lt1"/>
+          </a:fontRef>
+        </p:style>
+        <p:txBody>
+          <a:bodyPr rtlCol="0" anchor="ctr"/>
+          <a:lstStyle/>
+          <a:p>
+            <a:pPr algn="ctr"/>
+          </a:p>
+        </p:txBody>
+      </p:sp>
+      <p:sp>
+        <p:nvSpPr>
+          <p:cNvPr id="14" name="Rectangle 13"/>
+          <p:cNvSpPr/>
+          <p:nvPr/>
+        </p:nvSpPr>
+        <p:spPr>
+          <a:xfrm>
+            <a:off x="6245352" y="1691640"/>
+            <a:ext cx="5486400" cy="384048"/>
+          </a:xfrm>
+          <a:prstGeom prst="rect">
+            <a:avLst/>
+          </a:prstGeom>
+          <a:solidFill>
+            <a:srgbClr val="2A2F39"/>
+          </a:solidFill>
+          <a:ln>
+            <a:noFill/>
+          </a:ln>
+          <a:effectLst/>
+        </p:spPr>
+        <p:style>
+          <a:lnRef idx="1">
+            <a:schemeClr val="accent1"/>
+          </a:lnRef>
+          <a:fillRef idx="3">
+            <a:schemeClr val="accent1"/>
+          </a:fillRef>
+          <a:effectRef idx="2">
+            <a:schemeClr val="accent1"/>
+          </a:effectRef>
+          <a:fontRef idx="minor">
+            <a:schemeClr val="lt1"/>
+          </a:fontRef>
+        </p:style>
+        <p:txBody>
+          <a:bodyPr rtlCol="0" anchor="ctr"/>
+          <a:lstStyle/>
+          <a:p>
+            <a:pPr algn="ctr"/>
+          </a:p>
+        </p:txBody>
+      </p:sp>
+      <p:sp>
+        <p:nvSpPr>
+          <p:cNvPr id="15" name="TextBox 14"/>
+          <p:cNvSpPr txBox="1"/>
+          <p:nvPr/>
+        </p:nvSpPr>
+        <p:spPr>
+          <a:xfrm>
+            <a:off x="6428232" y="1691640"/>
+            <a:ext cx="5120640" cy="384048"/>
+          </a:xfrm>
+          <a:prstGeom prst="rect">
+            <a:avLst/>
+          </a:prstGeom>
+          <a:noFill/>
+        </p:spPr>
+        <p:txBody>
+          <a:bodyPr wrap="square" anchor="ctr" tIns="0" bIns="0" lIns="25400" rIns="25400">
+            <a:spAutoFit/>
+          </a:bodyPr>
+          <a:lstStyle/>
+          <a:p>
+            <a:pPr algn="l">
+              <a:spcBef>
+                <a:spcPts val="0"/>
+              </a:spcBef>
+              <a:spcAft>
+                <a:spcPts val="300"/>
+              </a:spcAft>
+            </a:pPr>
+            <a:r>
+              <a:rPr sz="1500" b="1">
+                <a:solidFill>
+                  <a:srgbClr val="35D0E6"/>
+                </a:solidFill>
+                <a:latin typeface="Microsoft JhengHei"/>
+              </a:rPr>
+              <a:t>專案效益</a:t>
+            </a:r>
+          </a:p>
+        </p:txBody>
+      </p:sp>
+      <p:sp>
+        <p:nvSpPr>
+          <p:cNvPr id="16" name="Rectangle 15"/>
+          <p:cNvSpPr/>
+          <p:nvPr/>
+        </p:nvSpPr>
+        <p:spPr>
+          <a:xfrm>
+            <a:off x="6428232" y="2240280"/>
+            <a:ext cx="88900" cy="502920"/>
+          </a:xfrm>
+          <a:prstGeom prst="rect">
+            <a:avLst/>
+          </a:prstGeom>
+          <a:solidFill>
+            <a:srgbClr val="35D0E6"/>
+          </a:solidFill>
+          <a:ln>
+            <a:noFill/>
+          </a:ln>
+          <a:effectLst/>
+        </p:spPr>
+        <p:style>
+          <a:lnRef idx="1">
+            <a:schemeClr val="accent1"/>
+          </a:lnRef>
+          <a:fillRef idx="3">
+            <a:schemeClr val="accent1"/>
+          </a:fillRef>
+          <a:effectRef idx="2">
+            <a:schemeClr val="accent1"/>
+          </a:effectRef>
+          <a:fontRef idx="minor">
+            <a:schemeClr val="lt1"/>
+          </a:fontRef>
+        </p:style>
+        <p:txBody>
+          <a:bodyPr rtlCol="0" anchor="ctr"/>
+          <a:lstStyle/>
+          <a:p>
+            <a:pPr algn="ctr"/>
+          </a:p>
+        </p:txBody>
+      </p:sp>
+      <p:sp>
+        <p:nvSpPr>
+          <p:cNvPr id="17" name="TextBox 16"/>
+          <p:cNvSpPr txBox="1"/>
+          <p:nvPr/>
+        </p:nvSpPr>
+        <p:spPr>
+          <a:xfrm>
+            <a:off x="6565392" y="2240280"/>
+            <a:ext cx="2468880" cy="502920"/>
+          </a:xfrm>
+          <a:prstGeom prst="rect">
+            <a:avLst/>
+          </a:prstGeom>
+          <a:noFill/>
+        </p:spPr>
+        <p:txBody>
+          <a:bodyPr wrap="square" anchor="ctr" tIns="0" bIns="0" lIns="25400" rIns="25400">
+            <a:spAutoFit/>
+          </a:bodyPr>
+          <a:lstStyle/>
+          <a:p>
+            <a:pPr algn="l">
+              <a:spcBef>
+                <a:spcPts val="0"/>
+              </a:spcBef>
+              <a:spcAft>
+                <a:spcPts val="100"/>
+              </a:spcAft>
+            </a:pPr>
+            <a:r>
+              <a:rPr sz="1250" b="1">
+                <a:solidFill>
+                  <a:srgbClr val="FFFFFF"/>
+                </a:solidFill>
+                <a:latin typeface="Microsoft JhengHei"/>
+              </a:rPr>
+              <a:t>自動化</a:t>
+            </a:r>
+          </a:p>
+          <a:p>
+            <a:pPr algn="l">
+              <a:spcBef>
+                <a:spcPts val="0"/>
+              </a:spcBef>
+              <a:spcAft>
+                <a:spcPts val="100"/>
+              </a:spcAft>
+            </a:pPr>
+            <a:r>
+              <a:rPr sz="1000" b="0">
+                <a:solidFill>
+                  <a:srgbClr val="8A93A1"/>
+                </a:solidFill>
+                <a:latin typeface="Microsoft JhengHei"/>
+              </a:rPr>
+              <a:t>減少人工試算與資料搬運</a:t>
+            </a:r>
+          </a:p>
+        </p:txBody>
+      </p:sp>
+      <p:sp>
+        <p:nvSpPr>
+          <p:cNvPr id="18" name="Rectangle 17"/>
+          <p:cNvSpPr/>
+          <p:nvPr/>
+        </p:nvSpPr>
+        <p:spPr>
+          <a:xfrm>
+            <a:off x="9125712" y="2240280"/>
+            <a:ext cx="88900" cy="502920"/>
+          </a:xfrm>
+          <a:prstGeom prst="rect">
+            <a:avLst/>
+          </a:prstGeom>
+          <a:solidFill>
+            <a:srgbClr val="35D0E6"/>
+          </a:solidFill>
+          <a:ln>
+            <a:noFill/>
+          </a:ln>
+          <a:effectLst/>
+        </p:spPr>
+        <p:style>
+          <a:lnRef idx="1">
+            <a:schemeClr val="accent1"/>
+          </a:lnRef>
+          <a:fillRef idx="3">
+            <a:schemeClr val="accent1"/>
+          </a:fillRef>
+          <a:effectRef idx="2">
+            <a:schemeClr val="accent1"/>
+          </a:effectRef>
+          <a:fontRef idx="minor">
+            <a:schemeClr val="lt1"/>
+          </a:fontRef>
+        </p:style>
+        <p:txBody>
+          <a:bodyPr rtlCol="0" anchor="ctr"/>
+          <a:lstStyle/>
+          <a:p>
+            <a:pPr algn="ctr"/>
+          </a:p>
+        </p:txBody>
+      </p:sp>
+      <p:sp>
+        <p:nvSpPr>
+          <p:cNvPr id="19" name="TextBox 18"/>
+          <p:cNvSpPr txBox="1"/>
+          <p:nvPr/>
+        </p:nvSpPr>
+        <p:spPr>
+          <a:xfrm>
+            <a:off x="9262872" y="2240280"/>
+            <a:ext cx="2468880" cy="502920"/>
+          </a:xfrm>
+          <a:prstGeom prst="rect">
+            <a:avLst/>
+          </a:prstGeom>
+          <a:noFill/>
+        </p:spPr>
+        <p:txBody>
+          <a:bodyPr wrap="square" anchor="ctr" tIns="0" bIns="0" lIns="25400" rIns="25400">
+            <a:spAutoFit/>
+          </a:bodyPr>
+          <a:lstStyle/>
+          <a:p>
+            <a:pPr algn="l">
+              <a:spcBef>
+                <a:spcPts val="0"/>
+              </a:spcBef>
+              <a:spcAft>
+                <a:spcPts val="100"/>
+              </a:spcAft>
+            </a:pPr>
+            <a:r>
+              <a:rPr sz="1250" b="1">
+                <a:solidFill>
+                  <a:srgbClr val="FFFFFF"/>
+                </a:solidFill>
+                <a:latin typeface="Microsoft JhengHei"/>
+              </a:rPr>
+              <a:t>準確性</a:t>
+            </a:r>
+          </a:p>
+          <a:p>
+            <a:pPr algn="l">
+              <a:spcBef>
+                <a:spcPts val="0"/>
+              </a:spcBef>
+              <a:spcAft>
+                <a:spcPts val="100"/>
+              </a:spcAft>
+            </a:pPr>
+            <a:r>
+              <a:rPr sz="1000" b="0">
+                <a:solidFill>
+                  <a:srgbClr val="8A93A1"/>
+                </a:solidFill>
+                <a:latin typeface="Microsoft JhengHei"/>
+              </a:rPr>
+              <a:t>邏輯統一、結果可重現可稽核</a:t>
+            </a:r>
+          </a:p>
+        </p:txBody>
+      </p:sp>
+      <p:sp>
+        <p:nvSpPr>
+          <p:cNvPr id="20" name="Rectangle 19"/>
+          <p:cNvSpPr/>
+          <p:nvPr/>
+        </p:nvSpPr>
+        <p:spPr>
+          <a:xfrm>
+            <a:off x="6428232" y="2843784"/>
+            <a:ext cx="88900" cy="502920"/>
+          </a:xfrm>
+          <a:prstGeom prst="rect">
+            <a:avLst/>
+          </a:prstGeom>
+          <a:solidFill>
+            <a:srgbClr val="35D0E6"/>
+          </a:solidFill>
+          <a:ln>
+            <a:noFill/>
+          </a:ln>
+          <a:effectLst/>
+        </p:spPr>
+        <p:style>
+          <a:lnRef idx="1">
+            <a:schemeClr val="accent1"/>
+          </a:lnRef>
+          <a:fillRef idx="3">
+            <a:schemeClr val="accent1"/>
+          </a:fillRef>
+          <a:effectRef idx="2">
+            <a:schemeClr val="accent1"/>
+          </a:effectRef>
+          <a:fontRef idx="minor">
+            <a:schemeClr val="lt1"/>
+          </a:fontRef>
+        </p:style>
+        <p:txBody>
+          <a:bodyPr rtlCol="0" anchor="ctr"/>
+          <a:lstStyle/>
+          <a:p>
+            <a:pPr algn="ctr"/>
+          </a:p>
+        </p:txBody>
+      </p:sp>
+      <p:sp>
+        <p:nvSpPr>
+          <p:cNvPr id="21" name="TextBox 20"/>
+          <p:cNvSpPr txBox="1"/>
+          <p:nvPr/>
+        </p:nvSpPr>
+        <p:spPr>
+          <a:xfrm>
+            <a:off x="6565392" y="2843784"/>
+            <a:ext cx="2468880" cy="502920"/>
+          </a:xfrm>
+          <a:prstGeom prst="rect">
+            <a:avLst/>
+          </a:prstGeom>
+          <a:noFill/>
+        </p:spPr>
+        <p:txBody>
+          <a:bodyPr wrap="square" anchor="ctr" tIns="0" bIns="0" lIns="25400" rIns="25400">
+            <a:spAutoFit/>
+          </a:bodyPr>
+          <a:lstStyle/>
+          <a:p>
+            <a:pPr algn="l">
+              <a:spcBef>
+                <a:spcPts val="0"/>
+              </a:spcBef>
+              <a:spcAft>
+                <a:spcPts val="100"/>
+              </a:spcAft>
+            </a:pPr>
+            <a:r>
+              <a:rPr sz="1250" b="1">
+                <a:solidFill>
+                  <a:srgbClr val="FFFFFF"/>
+                </a:solidFill>
+                <a:latin typeface="Microsoft JhengHei"/>
+              </a:rPr>
+              <a:t>效率提升</a:t>
+            </a:r>
+          </a:p>
+          <a:p>
+            <a:pPr algn="l">
+              <a:spcBef>
+                <a:spcPts val="0"/>
+              </a:spcBef>
+              <a:spcAft>
+                <a:spcPts val="100"/>
+              </a:spcAft>
+            </a:pPr>
+            <a:r>
+              <a:rPr sz="1000" b="0">
+                <a:solidFill>
+                  <a:srgbClr val="8A93A1"/>
+                </a:solidFill>
+                <a:latin typeface="Microsoft JhengHei"/>
+              </a:rPr>
+              <a:t>申報資料自動彙整成型</a:t>
+            </a:r>
+          </a:p>
+        </p:txBody>
+      </p:sp>
+      <p:sp>
+        <p:nvSpPr>
+          <p:cNvPr id="22" name="Rectangle 21"/>
+          <p:cNvSpPr/>
+          <p:nvPr/>
+        </p:nvSpPr>
+        <p:spPr>
+          <a:xfrm>
+            <a:off x="9125712" y="2843784"/>
+            <a:ext cx="88900" cy="502920"/>
+          </a:xfrm>
+          <a:prstGeom prst="rect">
+            <a:avLst/>
+          </a:prstGeom>
+          <a:solidFill>
+            <a:srgbClr val="35D0E6"/>
+          </a:solidFill>
+          <a:ln>
+            <a:noFill/>
+          </a:ln>
+          <a:effectLst/>
+        </p:spPr>
+        <p:style>
+          <a:lnRef idx="1">
+            <a:schemeClr val="accent1"/>
+          </a:lnRef>
+          <a:fillRef idx="3">
+            <a:schemeClr val="accent1"/>
+          </a:fillRef>
+          <a:effectRef idx="2">
+            <a:schemeClr val="accent1"/>
+          </a:effectRef>
+          <a:fontRef idx="minor">
+            <a:schemeClr val="lt1"/>
+          </a:fontRef>
+        </p:style>
+        <p:txBody>
+          <a:bodyPr rtlCol="0" anchor="ctr"/>
+          <a:lstStyle/>
+          <a:p>
+            <a:pPr algn="ctr"/>
+          </a:p>
+        </p:txBody>
+      </p:sp>
+      <p:sp>
+        <p:nvSpPr>
+          <p:cNvPr id="23" name="TextBox 22"/>
+          <p:cNvSpPr txBox="1"/>
+          <p:nvPr/>
+        </p:nvSpPr>
+        <p:spPr>
+          <a:xfrm>
+            <a:off x="9262872" y="2843784"/>
+            <a:ext cx="2468880" cy="502920"/>
+          </a:xfrm>
+          <a:prstGeom prst="rect">
+            <a:avLst/>
+          </a:prstGeom>
+          <a:noFill/>
+        </p:spPr>
+        <p:txBody>
+          <a:bodyPr wrap="square" anchor="ctr" tIns="0" bIns="0" lIns="25400" rIns="25400">
+            <a:spAutoFit/>
+          </a:bodyPr>
+          <a:lstStyle/>
+          <a:p>
+            <a:pPr algn="l">
+              <a:spcBef>
+                <a:spcPts val="0"/>
+              </a:spcBef>
+              <a:spcAft>
+                <a:spcPts val="100"/>
+              </a:spcAft>
+            </a:pPr>
+            <a:r>
+              <a:rPr sz="1250" b="1">
+                <a:solidFill>
+                  <a:srgbClr val="FFFFFF"/>
+                </a:solidFill>
+                <a:latin typeface="Microsoft JhengHei"/>
+              </a:rPr>
+              <a:t>可追溯／合規</a:t>
+            </a:r>
+          </a:p>
+          <a:p>
+            <a:pPr algn="l">
+              <a:spcBef>
+                <a:spcPts val="0"/>
+              </a:spcBef>
+              <a:spcAft>
+                <a:spcPts val="100"/>
+              </a:spcAft>
+            </a:pPr>
+            <a:r>
+              <a:rPr sz="1000" b="0">
+                <a:solidFill>
+                  <a:srgbClr val="8A93A1"/>
+                </a:solidFill>
+                <a:latin typeface="Microsoft JhengHei"/>
+              </a:rPr>
+              <a:t>保留計算過程供申報佐證</a:t>
+            </a:r>
+          </a:p>
+        </p:txBody>
+      </p:sp>
+      <p:sp>
+        <p:nvSpPr>
+          <p:cNvPr id="24" name="Rectangle 23"/>
+          <p:cNvSpPr/>
+          <p:nvPr/>
+        </p:nvSpPr>
+        <p:spPr>
+          <a:xfrm>
+            <a:off x="457200" y="3657600"/>
+            <a:ext cx="11274552" cy="868680"/>
+          </a:xfrm>
+          <a:prstGeom prst="rect">
+            <a:avLst/>
+          </a:prstGeom>
+          <a:solidFill>
+            <a:srgbClr val="1B1F27"/>
+          </a:solidFill>
+          <a:ln>
+            <a:noFill/>
+          </a:ln>
+          <a:effectLst/>
+        </p:spPr>
+        <p:style>
+          <a:lnRef idx="1">
+            <a:schemeClr val="accent1"/>
+          </a:lnRef>
+          <a:fillRef idx="3">
+            <a:schemeClr val="accent1"/>
+          </a:fillRef>
+          <a:effectRef idx="2">
+            <a:schemeClr val="accent1"/>
+          </a:effectRef>
+          <a:fontRef idx="minor">
+            <a:schemeClr val="lt1"/>
+          </a:fontRef>
+        </p:style>
+        <p:txBody>
+          <a:bodyPr rtlCol="0" anchor="ctr"/>
+          <a:lstStyle/>
+          <a:p>
+            <a:pPr algn="ctr"/>
+          </a:p>
+        </p:txBody>
+      </p:sp>
+      <p:sp>
+        <p:nvSpPr>
+          <p:cNvPr id="25" name="TextBox 24"/>
+          <p:cNvSpPr txBox="1"/>
+          <p:nvPr/>
+        </p:nvSpPr>
+        <p:spPr>
+          <a:xfrm>
+            <a:off x="640080" y="3730752"/>
+            <a:ext cx="3657600" cy="274320"/>
+          </a:xfrm>
+          <a:prstGeom prst="rect">
+            <a:avLst/>
+          </a:prstGeom>
+          <a:noFill/>
+        </p:spPr>
+        <p:txBody>
+          <a:bodyPr wrap="square" anchor="t" tIns="0" bIns="0" lIns="25400" rIns="25400">
+            <a:spAutoFit/>
+          </a:bodyPr>
+          <a:lstStyle/>
+          <a:p>
+            <a:pPr algn="l">
+              <a:spcBef>
+                <a:spcPts val="0"/>
+              </a:spcBef>
+              <a:spcAft>
+                <a:spcPts val="300"/>
+              </a:spcAft>
+            </a:pPr>
+            <a:r>
+              <a:rPr sz="1400" b="1">
+                <a:solidFill>
+                  <a:srgbClr val="35D0E6"/>
+                </a:solidFill>
+                <a:latin typeface="Microsoft JhengHei"/>
+              </a:rPr>
+              <a:t>當前進度</a:t>
+            </a:r>
+          </a:p>
+        </p:txBody>
+      </p:sp>
+      <p:sp>
+        <p:nvSpPr>
+          <p:cNvPr id="26" name="Rectangle 25"/>
+          <p:cNvSpPr/>
+          <p:nvPr/>
+        </p:nvSpPr>
+        <p:spPr>
+          <a:xfrm>
+            <a:off x="640080" y="4069080"/>
+            <a:ext cx="5486400" cy="182880"/>
+          </a:xfrm>
+          <a:prstGeom prst="rect">
+            <a:avLst/>
+          </a:prstGeom>
+          <a:solidFill>
+            <a:srgbClr val="2A2F39"/>
+          </a:solidFill>
+          <a:ln>
+            <a:noFill/>
+          </a:ln>
+          <a:effectLst/>
+        </p:spPr>
+        <p:style>
+          <a:lnRef idx="1">
+            <a:schemeClr val="accent1"/>
+          </a:lnRef>
+          <a:fillRef idx="3">
+            <a:schemeClr val="accent1"/>
+          </a:fillRef>
+          <a:effectRef idx="2">
+            <a:schemeClr val="accent1"/>
+          </a:effectRef>
+          <a:fontRef idx="minor">
+            <a:schemeClr val="lt1"/>
+          </a:fontRef>
+        </p:style>
+        <p:txBody>
+          <a:bodyPr rtlCol="0" anchor="ctr"/>
+          <a:lstStyle/>
+          <a:p>
+            <a:pPr algn="ctr"/>
+          </a:p>
+        </p:txBody>
+      </p:sp>
+      <p:sp>
+        <p:nvSpPr>
+          <p:cNvPr id="27" name="Rectangle 26"/>
+          <p:cNvSpPr/>
+          <p:nvPr/>
+        </p:nvSpPr>
+        <p:spPr>
+          <a:xfrm>
+            <a:off x="640080" y="4069080"/>
+            <a:ext cx="1371600" cy="182880"/>
+          </a:xfrm>
+          <a:prstGeom prst="rect">
+            <a:avLst/>
+          </a:prstGeom>
+          <a:solidFill>
+            <a:srgbClr val="35D0E6"/>
+          </a:solidFill>
+          <a:ln>
+            <a:noFill/>
+          </a:ln>
+          <a:effectLst/>
+        </p:spPr>
+        <p:style>
+          <a:lnRef idx="1">
+            <a:schemeClr val="accent1"/>
+          </a:lnRef>
+          <a:fillRef idx="3">
+            <a:schemeClr val="accent1"/>
+          </a:fillRef>
+          <a:effectRef idx="2">
+            <a:schemeClr val="accent1"/>
+          </a:effectRef>
+          <a:fontRef idx="minor">
+            <a:schemeClr val="lt1"/>
+          </a:fontRef>
+        </p:style>
+        <p:txBody>
+          <a:bodyPr rtlCol="0" anchor="ctr"/>
+          <a:lstStyle/>
+          <a:p>
+            <a:pPr algn="ctr"/>
+          </a:p>
+        </p:txBody>
+      </p:sp>
+      <p:sp>
+        <p:nvSpPr>
+          <p:cNvPr id="28" name="TextBox 27"/>
+          <p:cNvSpPr txBox="1"/>
+          <p:nvPr/>
+        </p:nvSpPr>
+        <p:spPr>
+          <a:xfrm>
+            <a:off x="6217920" y="4023360"/>
+            <a:ext cx="914400" cy="274320"/>
+          </a:xfrm>
+          <a:prstGeom prst="rect">
+            <a:avLst/>
+          </a:prstGeom>
+          <a:noFill/>
+        </p:spPr>
+        <p:txBody>
+          <a:bodyPr wrap="square" anchor="t" tIns="0" bIns="0" lIns="25400" rIns="25400">
+            <a:spAutoFit/>
+          </a:bodyPr>
+          <a:lstStyle/>
+          <a:p>
+            <a:pPr algn="l">
+              <a:spcBef>
+                <a:spcPts val="0"/>
+              </a:spcBef>
+              <a:spcAft>
+                <a:spcPts val="300"/>
+              </a:spcAft>
+            </a:pPr>
+            <a:r>
+              <a:rPr sz="1100" b="1">
+                <a:solidFill>
+                  <a:srgbClr val="35D0E6"/>
+                </a:solidFill>
+                <a:latin typeface="Microsoft JhengHei"/>
+              </a:rPr>
+              <a:t>約 25%</a:t>
+            </a:r>
+          </a:p>
+        </p:txBody>
+      </p:sp>
+      <p:sp>
+        <p:nvSpPr>
+          <p:cNvPr id="29" name="TextBox 28"/>
+          <p:cNvSpPr txBox="1"/>
+          <p:nvPr/>
+        </p:nvSpPr>
+        <p:spPr>
+          <a:xfrm>
+            <a:off x="7315200" y="3730752"/>
+            <a:ext cx="4297680" cy="777240"/>
+          </a:xfrm>
+          <a:prstGeom prst="rect">
+            <a:avLst/>
+          </a:prstGeom>
+          <a:noFill/>
+        </p:spPr>
+        <p:txBody>
+          <a:bodyPr wrap="square" anchor="t" tIns="0" bIns="0" lIns="25400" rIns="25400">
+            <a:spAutoFit/>
+          </a:bodyPr>
+          <a:lstStyle/>
+          <a:p>
+            <a:pPr algn="l">
+              <a:spcBef>
+                <a:spcPts val="0"/>
+              </a:spcBef>
+              <a:spcAft>
+                <a:spcPts val="400"/>
+              </a:spcAft>
+            </a:pPr>
+            <a:r>
+              <a:rPr sz="1150" b="0">
+                <a:solidFill>
+                  <a:srgbClr val="C9CFD8"/>
+                </a:solidFill>
+                <a:latin typeface="Microsoft JhengHei"/>
+              </a:rPr>
+              <a:t>‧ AS-IS / TO-BE 流程圖整理（進行中）</a:t>
+            </a:r>
+          </a:p>
+          <a:p>
+            <a:pPr algn="l">
+              <a:spcBef>
+                <a:spcPts val="0"/>
+              </a:spcBef>
+              <a:spcAft>
+                <a:spcPts val="400"/>
+              </a:spcAft>
+            </a:pPr>
+            <a:r>
+              <a:rPr sz="1150" b="0">
+                <a:solidFill>
+                  <a:srgbClr val="C9CFD8"/>
+                </a:solidFill>
+                <a:latin typeface="Microsoft JhengHei"/>
+              </a:rPr>
+              <a:t>‧ 過往相關資料盤點與蒐集（進行中）</a:t>
+            </a:r>
+          </a:p>
+        </p:txBody>
+      </p:sp>
+      <p:sp>
+        <p:nvSpPr>
+          <p:cNvPr id="30" name="Rectangle 29"/>
+          <p:cNvSpPr/>
+          <p:nvPr/>
+        </p:nvSpPr>
+        <p:spPr>
+          <a:xfrm>
+            <a:off x="457200" y="4663440"/>
+            <a:ext cx="11274552" cy="1783080"/>
+          </a:xfrm>
+          <a:prstGeom prst="rect">
+            <a:avLst/>
+          </a:prstGeom>
+          <a:solidFill>
+            <a:srgbClr val="1B1F27"/>
+          </a:solidFill>
+          <a:ln>
+            <a:noFill/>
+          </a:ln>
+          <a:effectLst/>
+        </p:spPr>
+        <p:style>
+          <a:lnRef idx="1">
+            <a:schemeClr val="accent1"/>
+          </a:lnRef>
+          <a:fillRef idx="3">
+            <a:schemeClr val="accent1"/>
+          </a:fillRef>
+          <a:effectRef idx="2">
+            <a:schemeClr val="accent1"/>
+          </a:effectRef>
+          <a:fontRef idx="minor">
+            <a:schemeClr val="lt1"/>
+          </a:fontRef>
+        </p:style>
+        <p:txBody>
+          <a:bodyPr rtlCol="0" anchor="ctr"/>
+          <a:lstStyle/>
+          <a:p>
+            <a:pPr algn="ctr"/>
+          </a:p>
+        </p:txBody>
+      </p:sp>
+      <p:sp>
+        <p:nvSpPr>
+          <p:cNvPr id="31" name="Rectangle 30"/>
+          <p:cNvSpPr/>
+          <p:nvPr/>
+        </p:nvSpPr>
+        <p:spPr>
+          <a:xfrm>
+            <a:off x="457200" y="4663440"/>
+            <a:ext cx="11274552" cy="384048"/>
+          </a:xfrm>
+          <a:prstGeom prst="rect">
+            <a:avLst/>
+          </a:prstGeom>
+          <a:solidFill>
+            <a:srgbClr val="2A2F39"/>
+          </a:solidFill>
+          <a:ln>
+            <a:noFill/>
+          </a:ln>
+          <a:effectLst/>
+        </p:spPr>
+        <p:style>
+          <a:lnRef idx="1">
+            <a:schemeClr val="accent1"/>
+          </a:lnRef>
+          <a:fillRef idx="3">
+            <a:schemeClr val="accent1"/>
+          </a:fillRef>
+          <a:effectRef idx="2">
+            <a:schemeClr val="accent1"/>
+          </a:effectRef>
+          <a:fontRef idx="minor">
+            <a:schemeClr val="lt1"/>
+          </a:fontRef>
+        </p:style>
+        <p:txBody>
+          <a:bodyPr rtlCol="0" anchor="ctr"/>
+          <a:lstStyle/>
+          <a:p>
+            <a:pPr algn="ctr"/>
+          </a:p>
+        </p:txBody>
+      </p:sp>
+      <p:sp>
+        <p:nvSpPr>
+          <p:cNvPr id="32" name="TextBox 31"/>
+          <p:cNvSpPr txBox="1"/>
+          <p:nvPr/>
+        </p:nvSpPr>
+        <p:spPr>
+          <a:xfrm>
+            <a:off x="640080" y="4663440"/>
+            <a:ext cx="7315200" cy="384048"/>
+          </a:xfrm>
+          <a:prstGeom prst="rect">
+            <a:avLst/>
+          </a:prstGeom>
+          <a:noFill/>
+        </p:spPr>
+        <p:txBody>
+          <a:bodyPr wrap="square" anchor="ctr" tIns="0" bIns="0" lIns="25400" rIns="25400">
+            <a:spAutoFit/>
+          </a:bodyPr>
+          <a:lstStyle/>
+          <a:p>
+            <a:pPr algn="l">
+              <a:spcBef>
+                <a:spcPts val="0"/>
+              </a:spcBef>
+              <a:spcAft>
+                <a:spcPts val="300"/>
+              </a:spcAft>
+            </a:pPr>
+            <a:r>
+              <a:rPr sz="1500" b="1">
+                <a:solidFill>
+                  <a:srgbClr val="35D0E6"/>
+                </a:solidFill>
+                <a:latin typeface="Microsoft JhengHei"/>
+              </a:rPr>
+              <a:t>開發團隊</a:t>
+            </a:r>
+          </a:p>
+        </p:txBody>
+      </p:sp>
+      <p:sp>
+        <p:nvSpPr>
+          <p:cNvPr id="33" name="TextBox 32"/>
+          <p:cNvSpPr txBox="1"/>
+          <p:nvPr/>
+        </p:nvSpPr>
+        <p:spPr>
+          <a:xfrm>
+            <a:off x="7772400" y="4663440"/>
+            <a:ext cx="3749039" cy="384048"/>
+          </a:xfrm>
+          <a:prstGeom prst="rect">
+            <a:avLst/>
+          </a:prstGeom>
+          <a:noFill/>
+        </p:spPr>
+        <p:txBody>
+          <a:bodyPr wrap="square" anchor="ctr" tIns="0" bIns="0" lIns="25400" rIns="25400">
+            <a:spAutoFit/>
+          </a:bodyPr>
+          <a:lstStyle/>
+          <a:p>
+            <a:pPr algn="r">
+              <a:spcBef>
+                <a:spcPts val="0"/>
+              </a:spcBef>
+              <a:spcAft>
+                <a:spcPts val="300"/>
+              </a:spcAft>
+            </a:pPr>
+            <a:r>
+              <a:rPr sz="1050" b="0">
+                <a:solidFill>
+                  <a:srgbClr val="8A93A1"/>
+                </a:solidFill>
+                <a:latin typeface="Microsoft JhengHei"/>
+              </a:rPr>
+              <a:t>＊姓名待補，先以角色呈現</a:t>
+            </a:r>
+          </a:p>
+        </p:txBody>
+      </p:sp>
+      <p:sp>
+        <p:nvSpPr>
+          <p:cNvPr id="34" name="Rectangle 33"/>
+          <p:cNvSpPr/>
+          <p:nvPr/>
+        </p:nvSpPr>
+        <p:spPr>
+          <a:xfrm>
+            <a:off x="566928" y="5166360"/>
+            <a:ext cx="2176272" cy="1143000"/>
+          </a:xfrm>
+          <a:prstGeom prst="rect">
+            <a:avLst/>
+          </a:prstGeom>
+          <a:solidFill>
+            <a:srgbClr val="101216"/>
+          </a:solidFill>
+          <a:ln w="12700">
+            <a:solidFill>
+              <a:srgbClr val="2A2F39"/>
+            </a:solidFill>
+          </a:ln>
+          <a:effectLst/>
+        </p:spPr>
+        <p:style>
+          <a:lnRef idx="1">
+            <a:schemeClr val="accent1"/>
+          </a:lnRef>
+          <a:fillRef idx="3">
+            <a:schemeClr val="accent1"/>
+          </a:fillRef>
+          <a:effectRef idx="2">
+            <a:schemeClr val="accent1"/>
+          </a:effectRef>
+          <a:fontRef idx="minor">
+            <a:schemeClr val="lt1"/>
+          </a:fontRef>
+        </p:style>
+        <p:txBody>
+          <a:bodyPr rtlCol="0" anchor="ctr"/>
+          <a:lstStyle/>
+          <a:p>
+            <a:pPr algn="ctr"/>
+          </a:p>
+        </p:txBody>
+      </p:sp>
+      <p:sp>
+        <p:nvSpPr>
+          <p:cNvPr id="35" name="Rectangle 34"/>
+          <p:cNvSpPr/>
+          <p:nvPr/>
+        </p:nvSpPr>
+        <p:spPr>
+          <a:xfrm>
+            <a:off x="566928" y="5166360"/>
+            <a:ext cx="2176272" cy="63500"/>
+          </a:xfrm>
+          <a:prstGeom prst="rect">
+            <a:avLst/>
+          </a:prstGeom>
+          <a:solidFill>
+            <a:srgbClr val="35D0E6"/>
+          </a:solidFill>
+          <a:ln>
+            <a:noFill/>
+          </a:ln>
+          <a:effectLst/>
+        </p:spPr>
+        <p:style>
+          <a:lnRef idx="1">
+            <a:schemeClr val="accent1"/>
+          </a:lnRef>
+          <a:fillRef idx="3">
+            <a:schemeClr val="accent1"/>
+          </a:fillRef>
+          <a:effectRef idx="2">
+            <a:schemeClr val="accent1"/>
+          </a:effectRef>
+          <a:fontRef idx="minor">
+            <a:schemeClr val="lt1"/>
+          </a:fontRef>
+        </p:style>
+        <p:txBody>
+          <a:bodyPr rtlCol="0" anchor="ctr"/>
+          <a:lstStyle/>
+          <a:p>
+            <a:pPr algn="ctr"/>
+          </a:p>
+        </p:txBody>
+      </p:sp>
+      <p:sp>
+        <p:nvSpPr>
+          <p:cNvPr id="36" name="Oval 35"/>
+          <p:cNvSpPr/>
+          <p:nvPr/>
+        </p:nvSpPr>
+        <p:spPr>
+          <a:xfrm>
+            <a:off x="731520" y="5330952"/>
+            <a:ext cx="457200" cy="457200"/>
+          </a:xfrm>
+          <a:prstGeom prst="ellipse">
+            <a:avLst/>
+          </a:prstGeom>
+          <a:solidFill>
+            <a:srgbClr val="2A2F39"/>
+          </a:solidFill>
+          <a:ln>
+            <a:noFill/>
+          </a:ln>
+          <a:effectLst/>
+        </p:spPr>
+        <p:style>
+          <a:lnRef idx="1">
+            <a:schemeClr val="accent1"/>
+          </a:lnRef>
+          <a:fillRef idx="3">
+            <a:schemeClr val="accent1"/>
+          </a:fillRef>
+          <a:effectRef idx="2">
+            <a:schemeClr val="accent1"/>
+          </a:effectRef>
+          <a:fontRef idx="minor">
+            <a:schemeClr val="lt1"/>
+          </a:fontRef>
+        </p:style>
+        <p:txBody>
+          <a:bodyPr rtlCol="0" anchor="ctr"/>
+          <a:lstStyle/>
+          <a:p>
+            <a:pPr algn="ctr"/>
+          </a:p>
+        </p:txBody>
+      </p:sp>
+      <p:sp>
+        <p:nvSpPr>
+          <p:cNvPr id="37" name="TextBox 36"/>
+          <p:cNvSpPr txBox="1"/>
+          <p:nvPr/>
+        </p:nvSpPr>
+        <p:spPr>
+          <a:xfrm>
+            <a:off x="731520" y="5330952"/>
+            <a:ext cx="457200" cy="457200"/>
+          </a:xfrm>
+          <a:prstGeom prst="rect">
+            <a:avLst/>
+          </a:prstGeom>
+          <a:noFill/>
+        </p:spPr>
+        <p:txBody>
+          <a:bodyPr wrap="square" anchor="ctr" tIns="0" bIns="0" lIns="25400" rIns="25400">
+            <a:spAutoFit/>
+          </a:bodyPr>
+          <a:lstStyle/>
+          <a:p>
+            <a:pPr algn="ctr">
+              <a:spcBef>
+                <a:spcPts val="0"/>
+              </a:spcBef>
+              <a:spcAft>
+                <a:spcPts val="300"/>
+              </a:spcAft>
+            </a:pPr>
+            <a:r>
+              <a:rPr sz="1600" b="1">
+                <a:solidFill>
+                  <a:srgbClr val="35D0E6"/>
+                </a:solidFill>
+                <a:latin typeface="Microsoft JhengHei"/>
+              </a:rPr>
+              <a:t>▣</a:t>
+            </a:r>
+          </a:p>
+        </p:txBody>
+      </p:sp>
+      <p:sp>
+        <p:nvSpPr>
+          <p:cNvPr id="38" name="TextBox 37"/>
+          <p:cNvSpPr txBox="1"/>
+          <p:nvPr/>
+        </p:nvSpPr>
+        <p:spPr>
+          <a:xfrm>
+            <a:off x="1280160" y="5330952"/>
+            <a:ext cx="1399032" cy="502920"/>
+          </a:xfrm>
+          <a:prstGeom prst="rect">
+            <a:avLst/>
+          </a:prstGeom>
+          <a:noFill/>
+        </p:spPr>
+        <p:txBody>
+          <a:bodyPr wrap="square" anchor="ctr" tIns="0" bIns="0" lIns="25400" rIns="25400">
+            <a:spAutoFit/>
+          </a:bodyPr>
+          <a:lstStyle/>
+          <a:p>
+            <a:pPr algn="l">
+              <a:spcBef>
+                <a:spcPts val="0"/>
+              </a:spcBef>
+              <a:spcAft>
+                <a:spcPts val="300"/>
+              </a:spcAft>
+            </a:pPr>
+            <a:r>
+              <a:rPr sz="1250" b="1">
+                <a:solidFill>
+                  <a:srgbClr val="FFFFFF"/>
+                </a:solidFill>
+                <a:latin typeface="Microsoft JhengHei"/>
+              </a:rPr>
+              <a:t>專案經理 PM</a:t>
+            </a:r>
+          </a:p>
+        </p:txBody>
+      </p:sp>
+      <p:sp>
+        <p:nvSpPr>
+          <p:cNvPr id="39" name="TextBox 38"/>
+          <p:cNvSpPr txBox="1"/>
+          <p:nvPr/>
+        </p:nvSpPr>
+        <p:spPr>
+          <a:xfrm>
+            <a:off x="731520" y="5843016"/>
+            <a:ext cx="1865376" cy="411480"/>
+          </a:xfrm>
+          <a:prstGeom prst="rect">
+            <a:avLst/>
+          </a:prstGeom>
+          <a:noFill/>
+        </p:spPr>
+        <p:txBody>
+          <a:bodyPr wrap="square" anchor="t" tIns="0" bIns="0" lIns="25400" rIns="25400">
+            <a:spAutoFit/>
+          </a:bodyPr>
+          <a:lstStyle/>
+          <a:p>
+            <a:pPr algn="l">
+              <a:spcBef>
+                <a:spcPts val="0"/>
+              </a:spcBef>
+              <a:spcAft>
+                <a:spcPts val="300"/>
+              </a:spcAft>
+            </a:pPr>
+            <a:r>
+              <a:rPr sz="950" b="0">
+                <a:solidFill>
+                  <a:srgbClr val="8A93A1"/>
+                </a:solidFill>
+                <a:latin typeface="Microsoft JhengHei"/>
+              </a:rPr>
+              <a:t>統籌規劃、時程控管與利害關係人溝通</a:t>
+            </a:r>
+          </a:p>
+        </p:txBody>
+      </p:sp>
+      <p:sp>
+        <p:nvSpPr>
+          <p:cNvPr id="40" name="Rectangle 39"/>
+          <p:cNvSpPr/>
+          <p:nvPr/>
+        </p:nvSpPr>
+        <p:spPr>
+          <a:xfrm>
+            <a:off x="2798064" y="5166360"/>
+            <a:ext cx="2176272" cy="1143000"/>
+          </a:xfrm>
+          <a:prstGeom prst="rect">
+            <a:avLst/>
+          </a:prstGeom>
+          <a:solidFill>
+            <a:srgbClr val="101216"/>
+          </a:solidFill>
+          <a:ln w="12700">
+            <a:solidFill>
+              <a:srgbClr val="2A2F39"/>
+            </a:solidFill>
+          </a:ln>
+          <a:effectLst/>
+        </p:spPr>
+        <p:style>
+          <a:lnRef idx="1">
+            <a:schemeClr val="accent1"/>
+          </a:lnRef>
+          <a:fillRef idx="3">
+            <a:schemeClr val="accent1"/>
+          </a:fillRef>
+          <a:effectRef idx="2">
+            <a:schemeClr val="accent1"/>
+          </a:effectRef>
+          <a:fontRef idx="minor">
+            <a:schemeClr val="lt1"/>
+          </a:fontRef>
+        </p:style>
+        <p:txBody>
+          <a:bodyPr rtlCol="0" anchor="ctr"/>
+          <a:lstStyle/>
+          <a:p>
+            <a:pPr algn="ctr"/>
+          </a:p>
+        </p:txBody>
+      </p:sp>
+      <p:sp>
+        <p:nvSpPr>
+          <p:cNvPr id="41" name="Rectangle 40"/>
+          <p:cNvSpPr/>
+          <p:nvPr/>
+        </p:nvSpPr>
+        <p:spPr>
+          <a:xfrm>
+            <a:off x="2798064" y="5166360"/>
+            <a:ext cx="2176272" cy="63500"/>
+          </a:xfrm>
+          <a:prstGeom prst="rect">
+            <a:avLst/>
+          </a:prstGeom>
+          <a:solidFill>
+            <a:srgbClr val="3E8FD6"/>
+          </a:solidFill>
+          <a:ln>
+            <a:noFill/>
+          </a:ln>
+          <a:effectLst/>
+        </p:spPr>
+        <p:style>
+          <a:lnRef idx="1">
+            <a:schemeClr val="accent1"/>
+          </a:lnRef>
+          <a:fillRef idx="3">
+            <a:schemeClr val="accent1"/>
+          </a:fillRef>
+          <a:effectRef idx="2">
+            <a:schemeClr val="accent1"/>
+          </a:effectRef>
+          <a:fontRef idx="minor">
+            <a:schemeClr val="lt1"/>
+          </a:fontRef>
+        </p:style>
+        <p:txBody>
+          <a:bodyPr rtlCol="0" anchor="ctr"/>
+          <a:lstStyle/>
+          <a:p>
+            <a:pPr algn="ctr"/>
+          </a:p>
+        </p:txBody>
+      </p:sp>
+      <p:sp>
+        <p:nvSpPr>
+          <p:cNvPr id="42" name="Oval 41"/>
+          <p:cNvSpPr/>
+          <p:nvPr/>
+        </p:nvSpPr>
+        <p:spPr>
+          <a:xfrm>
+            <a:off x="2962656" y="5330952"/>
+            <a:ext cx="457200" cy="457200"/>
+          </a:xfrm>
+          <a:prstGeom prst="ellipse">
+            <a:avLst/>
+          </a:prstGeom>
+          <a:solidFill>
+            <a:srgbClr val="2A2F39"/>
+          </a:solidFill>
+          <a:ln>
+            <a:noFill/>
+          </a:ln>
+          <a:effectLst/>
+        </p:spPr>
+        <p:style>
+          <a:lnRef idx="1">
+            <a:schemeClr val="accent1"/>
+          </a:lnRef>
+          <a:fillRef idx="3">
+            <a:schemeClr val="accent1"/>
+          </a:fillRef>
+          <a:effectRef idx="2">
+            <a:schemeClr val="accent1"/>
+          </a:effectRef>
+          <a:fontRef idx="minor">
+            <a:schemeClr val="lt1"/>
+          </a:fontRef>
+        </p:style>
+        <p:txBody>
+          <a:bodyPr rtlCol="0" anchor="ctr"/>
+          <a:lstStyle/>
+          <a:p>
+            <a:pPr algn="ctr"/>
+          </a:p>
+        </p:txBody>
+      </p:sp>
+      <p:sp>
+        <p:nvSpPr>
+          <p:cNvPr id="43" name="TextBox 42"/>
+          <p:cNvSpPr txBox="1"/>
+          <p:nvPr/>
+        </p:nvSpPr>
+        <p:spPr>
+          <a:xfrm>
+            <a:off x="2962656" y="5330952"/>
+            <a:ext cx="457200" cy="457200"/>
+          </a:xfrm>
+          <a:prstGeom prst="rect">
+            <a:avLst/>
+          </a:prstGeom>
+          <a:noFill/>
+        </p:spPr>
+        <p:txBody>
+          <a:bodyPr wrap="square" anchor="ctr" tIns="0" bIns="0" lIns="25400" rIns="25400">
+            <a:spAutoFit/>
+          </a:bodyPr>
+          <a:lstStyle/>
+          <a:p>
+            <a:pPr algn="ctr">
+              <a:spcBef>
+                <a:spcPts val="0"/>
+              </a:spcBef>
+              <a:spcAft>
+                <a:spcPts val="300"/>
+              </a:spcAft>
+            </a:pPr>
+            <a:r>
+              <a:rPr sz="1600" b="1">
+                <a:solidFill>
+                  <a:srgbClr val="3E8FD6"/>
+                </a:solidFill>
+                <a:latin typeface="Microsoft JhengHei"/>
+              </a:rPr>
+              <a:t>▣</a:t>
+            </a:r>
+          </a:p>
+        </p:txBody>
+      </p:sp>
+      <p:sp>
+        <p:nvSpPr>
+          <p:cNvPr id="44" name="TextBox 43"/>
+          <p:cNvSpPr txBox="1"/>
+          <p:nvPr/>
+        </p:nvSpPr>
+        <p:spPr>
+          <a:xfrm>
+            <a:off x="3511296" y="5330952"/>
+            <a:ext cx="1399032" cy="502920"/>
+          </a:xfrm>
+          <a:prstGeom prst="rect">
+            <a:avLst/>
+          </a:prstGeom>
+          <a:noFill/>
+        </p:spPr>
+        <p:txBody>
+          <a:bodyPr wrap="square" anchor="ctr" tIns="0" bIns="0" lIns="25400" rIns="25400">
+            <a:spAutoFit/>
+          </a:bodyPr>
+          <a:lstStyle/>
+          <a:p>
+            <a:pPr algn="l">
+              <a:spcBef>
+                <a:spcPts val="0"/>
+              </a:spcBef>
+              <a:spcAft>
+                <a:spcPts val="300"/>
+              </a:spcAft>
+            </a:pPr>
+            <a:r>
+              <a:rPr sz="1250" b="1">
+                <a:solidFill>
+                  <a:srgbClr val="FFFFFF"/>
+                </a:solidFill>
+                <a:latin typeface="Microsoft JhengHei"/>
+              </a:rPr>
+              <a:t>AI / Agent 工程師</a:t>
+            </a:r>
+          </a:p>
+        </p:txBody>
+      </p:sp>
+      <p:sp>
+        <p:nvSpPr>
+          <p:cNvPr id="45" name="TextBox 44"/>
+          <p:cNvSpPr txBox="1"/>
+          <p:nvPr/>
+        </p:nvSpPr>
+        <p:spPr>
+          <a:xfrm>
+            <a:off x="2962656" y="5843016"/>
+            <a:ext cx="1865376" cy="411480"/>
+          </a:xfrm>
+          <a:prstGeom prst="rect">
+            <a:avLst/>
+          </a:prstGeom>
+          <a:noFill/>
+        </p:spPr>
+        <p:txBody>
+          <a:bodyPr wrap="square" anchor="t" tIns="0" bIns="0" lIns="25400" rIns="25400">
+            <a:spAutoFit/>
+          </a:bodyPr>
+          <a:lstStyle/>
+          <a:p>
+            <a:pPr algn="l">
+              <a:spcBef>
+                <a:spcPts val="0"/>
+              </a:spcBef>
+              <a:spcAft>
+                <a:spcPts val="300"/>
+              </a:spcAft>
+            </a:pPr>
+            <a:r>
+              <a:rPr sz="950" b="0">
+                <a:solidFill>
+                  <a:srgbClr val="8A93A1"/>
+                </a:solidFill>
+                <a:latin typeface="Microsoft JhengHei"/>
+              </a:rPr>
+              <a:t>Agent 設計與平衡計算邏輯實作</a:t>
+            </a:r>
+          </a:p>
+        </p:txBody>
+      </p:sp>
+      <p:sp>
+        <p:nvSpPr>
+          <p:cNvPr id="46" name="Rectangle 45"/>
+          <p:cNvSpPr/>
+          <p:nvPr/>
+        </p:nvSpPr>
+        <p:spPr>
+          <a:xfrm>
+            <a:off x="5029200" y="5166360"/>
+            <a:ext cx="2176272" cy="1143000"/>
+          </a:xfrm>
+          <a:prstGeom prst="rect">
+            <a:avLst/>
+          </a:prstGeom>
+          <a:solidFill>
+            <a:srgbClr val="101216"/>
+          </a:solidFill>
+          <a:ln w="12700">
+            <a:solidFill>
+              <a:srgbClr val="2A2F39"/>
+            </a:solidFill>
+          </a:ln>
+          <a:effectLst/>
+        </p:spPr>
+        <p:style>
+          <a:lnRef idx="1">
+            <a:schemeClr val="accent1"/>
+          </a:lnRef>
+          <a:fillRef idx="3">
+            <a:schemeClr val="accent1"/>
+          </a:fillRef>
+          <a:effectRef idx="2">
+            <a:schemeClr val="accent1"/>
+          </a:effectRef>
+          <a:fontRef idx="minor">
+            <a:schemeClr val="lt1"/>
+          </a:fontRef>
+        </p:style>
+        <p:txBody>
+          <a:bodyPr rtlCol="0" anchor="ctr"/>
+          <a:lstStyle/>
+          <a:p>
+            <a:pPr algn="ctr"/>
+          </a:p>
+        </p:txBody>
+      </p:sp>
+      <p:sp>
+        <p:nvSpPr>
+          <p:cNvPr id="47" name="Rectangle 46"/>
+          <p:cNvSpPr/>
+          <p:nvPr/>
+        </p:nvSpPr>
+        <p:spPr>
+          <a:xfrm>
+            <a:off x="5029200" y="5166360"/>
+            <a:ext cx="2176272" cy="63500"/>
+          </a:xfrm>
+          <a:prstGeom prst="rect">
+            <a:avLst/>
+          </a:prstGeom>
+          <a:solidFill>
+            <a:srgbClr val="4FC17A"/>
+          </a:solidFill>
+          <a:ln>
+            <a:noFill/>
+          </a:ln>
+          <a:effectLst/>
+        </p:spPr>
+        <p:style>
+          <a:lnRef idx="1">
+            <a:schemeClr val="accent1"/>
+          </a:lnRef>
+          <a:fillRef idx="3">
+            <a:schemeClr val="accent1"/>
+          </a:fillRef>
+          <a:effectRef idx="2">
+            <a:schemeClr val="accent1"/>
+          </a:effectRef>
+          <a:fontRef idx="minor">
+            <a:schemeClr val="lt1"/>
+          </a:fontRef>
+        </p:style>
+        <p:txBody>
+          <a:bodyPr rtlCol="0" anchor="ctr"/>
+          <a:lstStyle/>
+          <a:p>
+            <a:pPr algn="ctr"/>
+          </a:p>
+        </p:txBody>
+      </p:sp>
+      <p:sp>
+        <p:nvSpPr>
+          <p:cNvPr id="48" name="Oval 47"/>
+          <p:cNvSpPr/>
+          <p:nvPr/>
+        </p:nvSpPr>
+        <p:spPr>
+          <a:xfrm>
+            <a:off x="5193792" y="5330952"/>
+            <a:ext cx="457200" cy="457200"/>
+          </a:xfrm>
+          <a:prstGeom prst="ellipse">
+            <a:avLst/>
+          </a:prstGeom>
+          <a:solidFill>
+            <a:srgbClr val="2A2F39"/>
+          </a:solidFill>
+          <a:ln>
+            <a:noFill/>
+          </a:ln>
+          <a:effectLst/>
+        </p:spPr>
+        <p:style>
+          <a:lnRef idx="1">
+            <a:schemeClr val="accent1"/>
+          </a:lnRef>
+          <a:fillRef idx="3">
+            <a:schemeClr val="accent1"/>
+          </a:fillRef>
+          <a:effectRef idx="2">
+            <a:schemeClr val="accent1"/>
+          </a:effectRef>
+          <a:fontRef idx="minor">
+            <a:schemeClr val="lt1"/>
+          </a:fontRef>
+        </p:style>
+        <p:txBody>
+          <a:bodyPr rtlCol="0" anchor="ctr"/>
+          <a:lstStyle/>
+          <a:p>
+            <a:pPr algn="ctr"/>
+          </a:p>
+        </p:txBody>
+      </p:sp>
+      <p:sp>
+        <p:nvSpPr>
+          <p:cNvPr id="49" name="TextBox 48"/>
+          <p:cNvSpPr txBox="1"/>
+          <p:nvPr/>
+        </p:nvSpPr>
+        <p:spPr>
+          <a:xfrm>
+            <a:off x="5193792" y="5330952"/>
+            <a:ext cx="457200" cy="457200"/>
+          </a:xfrm>
+          <a:prstGeom prst="rect">
+            <a:avLst/>
+          </a:prstGeom>
+          <a:noFill/>
+        </p:spPr>
+        <p:txBody>
+          <a:bodyPr wrap="square" anchor="ctr" tIns="0" bIns="0" lIns="25400" rIns="25400">
+            <a:spAutoFit/>
+          </a:bodyPr>
+          <a:lstStyle/>
+          <a:p>
+            <a:pPr algn="ctr">
+              <a:spcBef>
+                <a:spcPts val="0"/>
+              </a:spcBef>
+              <a:spcAft>
+                <a:spcPts val="300"/>
+              </a:spcAft>
+            </a:pPr>
+            <a:r>
+              <a:rPr sz="1600" b="1">
+                <a:solidFill>
+                  <a:srgbClr val="4FC17A"/>
+                </a:solidFill>
+                <a:latin typeface="Microsoft JhengHei"/>
+              </a:rPr>
+              <a:t>▣</a:t>
+            </a:r>
+          </a:p>
+        </p:txBody>
+      </p:sp>
+      <p:sp>
+        <p:nvSpPr>
+          <p:cNvPr id="50" name="TextBox 49"/>
+          <p:cNvSpPr txBox="1"/>
+          <p:nvPr/>
+        </p:nvSpPr>
+        <p:spPr>
+          <a:xfrm>
+            <a:off x="5742432" y="5330952"/>
+            <a:ext cx="1399032" cy="502920"/>
+          </a:xfrm>
+          <a:prstGeom prst="rect">
+            <a:avLst/>
+          </a:prstGeom>
+          <a:noFill/>
+        </p:spPr>
+        <p:txBody>
+          <a:bodyPr wrap="square" anchor="ctr" tIns="0" bIns="0" lIns="25400" rIns="25400">
+            <a:spAutoFit/>
+          </a:bodyPr>
+          <a:lstStyle/>
+          <a:p>
+            <a:pPr algn="l">
+              <a:spcBef>
+                <a:spcPts val="0"/>
+              </a:spcBef>
+              <a:spcAft>
+                <a:spcPts val="300"/>
+              </a:spcAft>
+            </a:pPr>
+            <a:r>
+              <a:rPr sz="1250" b="1">
+                <a:solidFill>
+                  <a:srgbClr val="FFFFFF"/>
+                </a:solidFill>
+                <a:latin typeface="Microsoft JhengHei"/>
+              </a:rPr>
+              <a:t>資料工程師</a:t>
+            </a:r>
+          </a:p>
+        </p:txBody>
+      </p:sp>
+      <p:sp>
+        <p:nvSpPr>
+          <p:cNvPr id="51" name="TextBox 50"/>
+          <p:cNvSpPr txBox="1"/>
+          <p:nvPr/>
+        </p:nvSpPr>
+        <p:spPr>
+          <a:xfrm>
+            <a:off x="5193792" y="5843016"/>
+            <a:ext cx="1865376" cy="411480"/>
+          </a:xfrm>
+          <a:prstGeom prst="rect">
+            <a:avLst/>
+          </a:prstGeom>
+          <a:noFill/>
+        </p:spPr>
+        <p:txBody>
+          <a:bodyPr wrap="square" anchor="t" tIns="0" bIns="0" lIns="25400" rIns="25400">
+            <a:spAutoFit/>
+          </a:bodyPr>
+          <a:lstStyle/>
+          <a:p>
+            <a:pPr algn="l">
+              <a:spcBef>
+                <a:spcPts val="0"/>
+              </a:spcBef>
+              <a:spcAft>
+                <a:spcPts val="300"/>
+              </a:spcAft>
+            </a:pPr>
+            <a:r>
+              <a:rPr sz="950" b="0">
+                <a:solidFill>
+                  <a:srgbClr val="8A93A1"/>
+                </a:solidFill>
+                <a:latin typeface="Microsoft JhengHei"/>
+              </a:rPr>
+              <a:t>資料盤點、清洗與跨系統串接</a:t>
+            </a:r>
+          </a:p>
+        </p:txBody>
+      </p:sp>
+      <p:sp>
+        <p:nvSpPr>
+          <p:cNvPr id="52" name="Rectangle 51"/>
+          <p:cNvSpPr/>
+          <p:nvPr/>
+        </p:nvSpPr>
+        <p:spPr>
+          <a:xfrm>
+            <a:off x="7260336" y="5166360"/>
+            <a:ext cx="2176272" cy="1143000"/>
+          </a:xfrm>
+          <a:prstGeom prst="rect">
+            <a:avLst/>
+          </a:prstGeom>
+          <a:solidFill>
+            <a:srgbClr val="101216"/>
+          </a:solidFill>
+          <a:ln w="12700">
+            <a:solidFill>
+              <a:srgbClr val="2A2F39"/>
+            </a:solidFill>
+          </a:ln>
+          <a:effectLst/>
+        </p:spPr>
+        <p:style>
+          <a:lnRef idx="1">
+            <a:schemeClr val="accent1"/>
+          </a:lnRef>
+          <a:fillRef idx="3">
+            <a:schemeClr val="accent1"/>
+          </a:fillRef>
+          <a:effectRef idx="2">
+            <a:schemeClr val="accent1"/>
+          </a:effectRef>
+          <a:fontRef idx="minor">
+            <a:schemeClr val="lt1"/>
+          </a:fontRef>
+        </p:style>
+        <p:txBody>
+          <a:bodyPr rtlCol="0" anchor="ctr"/>
+          <a:lstStyle/>
+          <a:p>
+            <a:pPr algn="ctr"/>
+          </a:p>
+        </p:txBody>
+      </p:sp>
+      <p:sp>
+        <p:nvSpPr>
+          <p:cNvPr id="53" name="Rectangle 52"/>
+          <p:cNvSpPr/>
+          <p:nvPr/>
+        </p:nvSpPr>
+        <p:spPr>
+          <a:xfrm>
+            <a:off x="7260336" y="5166360"/>
+            <a:ext cx="2176272" cy="63500"/>
+          </a:xfrm>
+          <a:prstGeom prst="rect">
+            <a:avLst/>
+          </a:prstGeom>
+          <a:solidFill>
+            <a:srgbClr val="E7B43C"/>
+          </a:solidFill>
+          <a:ln>
+            <a:noFill/>
+          </a:ln>
+          <a:effectLst/>
+        </p:spPr>
+        <p:style>
+          <a:lnRef idx="1">
+            <a:schemeClr val="accent1"/>
+          </a:lnRef>
+          <a:fillRef idx="3">
+            <a:schemeClr val="accent1"/>
+          </a:fillRef>
+          <a:effectRef idx="2">
+            <a:schemeClr val="accent1"/>
+          </a:effectRef>
+          <a:fontRef idx="minor">
+            <a:schemeClr val="lt1"/>
+          </a:fontRef>
+        </p:style>
+        <p:txBody>
+          <a:bodyPr rtlCol="0" anchor="ctr"/>
+          <a:lstStyle/>
+          <a:p>
+            <a:pPr algn="ctr"/>
+          </a:p>
+        </p:txBody>
+      </p:sp>
+      <p:sp>
+        <p:nvSpPr>
+          <p:cNvPr id="54" name="Oval 53"/>
+          <p:cNvSpPr/>
+          <p:nvPr/>
+        </p:nvSpPr>
+        <p:spPr>
+          <a:xfrm>
+            <a:off x="7424928" y="5330952"/>
+            <a:ext cx="457200" cy="457200"/>
+          </a:xfrm>
+          <a:prstGeom prst="ellipse">
+            <a:avLst/>
+          </a:prstGeom>
+          <a:solidFill>
+            <a:srgbClr val="2A2F39"/>
+          </a:solidFill>
+          <a:ln>
+            <a:noFill/>
+          </a:ln>
+          <a:effectLst/>
+        </p:spPr>
+        <p:style>
+          <a:lnRef idx="1">
+            <a:schemeClr val="accent1"/>
+          </a:lnRef>
+          <a:fillRef idx="3">
+            <a:schemeClr val="accent1"/>
+          </a:fillRef>
+          <a:effectRef idx="2">
+            <a:schemeClr val="accent1"/>
+          </a:effectRef>
+          <a:fontRef idx="minor">
+            <a:schemeClr val="lt1"/>
+          </a:fontRef>
+        </p:style>
+        <p:txBody>
+          <a:bodyPr rtlCol="0" anchor="ctr"/>
+          <a:lstStyle/>
+          <a:p>
+            <a:pPr algn="ctr"/>
+          </a:p>
+        </p:txBody>
+      </p:sp>
+      <p:sp>
+        <p:nvSpPr>
+          <p:cNvPr id="55" name="TextBox 54"/>
+          <p:cNvSpPr txBox="1"/>
+          <p:nvPr/>
+        </p:nvSpPr>
+        <p:spPr>
+          <a:xfrm>
+            <a:off x="7424928" y="5330952"/>
+            <a:ext cx="457200" cy="457200"/>
+          </a:xfrm>
+          <a:prstGeom prst="rect">
+            <a:avLst/>
+          </a:prstGeom>
+          <a:noFill/>
+        </p:spPr>
+        <p:txBody>
+          <a:bodyPr wrap="square" anchor="ctr" tIns="0" bIns="0" lIns="25400" rIns="25400">
+            <a:spAutoFit/>
+          </a:bodyPr>
+          <a:lstStyle/>
+          <a:p>
+            <a:pPr algn="ctr">
+              <a:spcBef>
+                <a:spcPts val="0"/>
+              </a:spcBef>
+              <a:spcAft>
+                <a:spcPts val="300"/>
+              </a:spcAft>
+            </a:pPr>
+            <a:r>
+              <a:rPr sz="1600" b="1">
+                <a:solidFill>
+                  <a:srgbClr val="E7B43C"/>
+                </a:solidFill>
+                <a:latin typeface="Microsoft JhengHei"/>
+              </a:rPr>
+              <a:t>▣</a:t>
+            </a:r>
+          </a:p>
+        </p:txBody>
+      </p:sp>
+      <p:sp>
+        <p:nvSpPr>
+          <p:cNvPr id="56" name="TextBox 55"/>
+          <p:cNvSpPr txBox="1"/>
+          <p:nvPr/>
+        </p:nvSpPr>
+        <p:spPr>
+          <a:xfrm>
+            <a:off x="7973568" y="5330952"/>
+            <a:ext cx="1399032" cy="502920"/>
+          </a:xfrm>
+          <a:prstGeom prst="rect">
+            <a:avLst/>
+          </a:prstGeom>
+          <a:noFill/>
+        </p:spPr>
+        <p:txBody>
+          <a:bodyPr wrap="square" anchor="ctr" tIns="0" bIns="0" lIns="25400" rIns="25400">
+            <a:spAutoFit/>
+          </a:bodyPr>
+          <a:lstStyle/>
+          <a:p>
+            <a:pPr algn="l">
+              <a:spcBef>
+                <a:spcPts val="0"/>
+              </a:spcBef>
+              <a:spcAft>
+                <a:spcPts val="300"/>
+              </a:spcAft>
+            </a:pPr>
+            <a:r>
+              <a:rPr sz="1250" b="1">
+                <a:solidFill>
+                  <a:srgbClr val="FFFFFF"/>
+                </a:solidFill>
+                <a:latin typeface="Microsoft JhengHei"/>
+              </a:rPr>
+              <a:t>領域 / 水務專家</a:t>
+            </a:r>
+          </a:p>
+        </p:txBody>
+      </p:sp>
+      <p:sp>
+        <p:nvSpPr>
+          <p:cNvPr id="57" name="TextBox 56"/>
+          <p:cNvSpPr txBox="1"/>
+          <p:nvPr/>
+        </p:nvSpPr>
+        <p:spPr>
+          <a:xfrm>
+            <a:off x="7424928" y="5843016"/>
+            <a:ext cx="1865376" cy="411480"/>
+          </a:xfrm>
+          <a:prstGeom prst="rect">
+            <a:avLst/>
+          </a:prstGeom>
+          <a:noFill/>
+        </p:spPr>
+        <p:txBody>
+          <a:bodyPr wrap="square" anchor="t" tIns="0" bIns="0" lIns="25400" rIns="25400">
+            <a:spAutoFit/>
+          </a:bodyPr>
+          <a:lstStyle/>
+          <a:p>
+            <a:pPr algn="l">
+              <a:spcBef>
+                <a:spcPts val="0"/>
+              </a:spcBef>
+              <a:spcAft>
+                <a:spcPts val="300"/>
+              </a:spcAft>
+            </a:pPr>
+            <a:r>
+              <a:rPr sz="950" b="0">
+                <a:solidFill>
+                  <a:srgbClr val="8A93A1"/>
+                </a:solidFill>
+                <a:latin typeface="Microsoft JhengHei"/>
+              </a:rPr>
+              <a:t>水平衡與蒸發量計算驗證、申報需求</a:t>
+            </a:r>
+          </a:p>
+        </p:txBody>
+      </p:sp>
+      <p:sp>
+        <p:nvSpPr>
+          <p:cNvPr id="58" name="Rectangle 57"/>
+          <p:cNvSpPr/>
+          <p:nvPr/>
+        </p:nvSpPr>
+        <p:spPr>
+          <a:xfrm>
+            <a:off x="9491472" y="5166360"/>
+            <a:ext cx="2176272" cy="1143000"/>
+          </a:xfrm>
+          <a:prstGeom prst="rect">
+            <a:avLst/>
+          </a:prstGeom>
+          <a:solidFill>
+            <a:srgbClr val="101216"/>
+          </a:solidFill>
+          <a:ln w="12700">
+            <a:solidFill>
+              <a:srgbClr val="2A2F39"/>
+            </a:solidFill>
+          </a:ln>
+          <a:effectLst/>
+        </p:spPr>
+        <p:style>
+          <a:lnRef idx="1">
+            <a:schemeClr val="accent1"/>
+          </a:lnRef>
+          <a:fillRef idx="3">
+            <a:schemeClr val="accent1"/>
+          </a:fillRef>
+          <a:effectRef idx="2">
+            <a:schemeClr val="accent1"/>
+          </a:effectRef>
+          <a:fontRef idx="minor">
+            <a:schemeClr val="lt1"/>
+          </a:fontRef>
+        </p:style>
+        <p:txBody>
+          <a:bodyPr rtlCol="0" anchor="ctr"/>
+          <a:lstStyle/>
+          <a:p>
+            <a:pPr algn="ctr"/>
+          </a:p>
+        </p:txBody>
+      </p:sp>
+      <p:sp>
+        <p:nvSpPr>
+          <p:cNvPr id="59" name="Rectangle 58"/>
+          <p:cNvSpPr/>
+          <p:nvPr/>
+        </p:nvSpPr>
+        <p:spPr>
+          <a:xfrm>
+            <a:off x="9491472" y="5166360"/>
+            <a:ext cx="2176272" cy="63500"/>
+          </a:xfrm>
+          <a:prstGeom prst="rect">
+            <a:avLst/>
+          </a:prstGeom>
+          <a:solidFill>
+            <a:srgbClr val="C77DE0"/>
+          </a:solidFill>
+          <a:ln>
+            <a:noFill/>
+          </a:ln>
+          <a:effectLst/>
+        </p:spPr>
+        <p:style>
+          <a:lnRef idx="1">
+            <a:schemeClr val="accent1"/>
+          </a:lnRef>
+          <a:fillRef idx="3">
+            <a:schemeClr val="accent1"/>
+          </a:fillRef>
+          <a:effectRef idx="2">
+            <a:schemeClr val="accent1"/>
+          </a:effectRef>
+          <a:fontRef idx="minor">
+            <a:schemeClr val="lt1"/>
+          </a:fontRef>
+        </p:style>
+        <p:txBody>
+          <a:bodyPr rtlCol="0" anchor="ctr"/>
+          <a:lstStyle/>
+          <a:p>
+            <a:pPr algn="ctr"/>
+          </a:p>
+        </p:txBody>
+      </p:sp>
+      <p:sp>
+        <p:nvSpPr>
+          <p:cNvPr id="60" name="Oval 59"/>
+          <p:cNvSpPr/>
+          <p:nvPr/>
+        </p:nvSpPr>
+        <p:spPr>
+          <a:xfrm>
+            <a:off x="9656064" y="5330952"/>
+            <a:ext cx="457200" cy="457200"/>
+          </a:xfrm>
+          <a:prstGeom prst="ellipse">
+            <a:avLst/>
+          </a:prstGeom>
+          <a:solidFill>
+            <a:srgbClr val="2A2F39"/>
+          </a:solidFill>
+          <a:ln>
+            <a:noFill/>
+          </a:ln>
+          <a:effectLst/>
+        </p:spPr>
+        <p:style>
+          <a:lnRef idx="1">
+            <a:schemeClr val="accent1"/>
+          </a:lnRef>
+          <a:fillRef idx="3">
+            <a:schemeClr val="accent1"/>
+          </a:fillRef>
+          <a:effectRef idx="2">
+            <a:schemeClr val="accent1"/>
+          </a:effectRef>
+          <a:fontRef idx="minor">
+            <a:schemeClr val="lt1"/>
+          </a:fontRef>
+        </p:style>
+        <p:txBody>
+          <a:bodyPr rtlCol="0" anchor="ctr"/>
+          <a:lstStyle/>
+          <a:p>
+            <a:pPr algn="ctr"/>
+          </a:p>
+        </p:txBody>
+      </p:sp>
+      <p:sp>
+        <p:nvSpPr>
+          <p:cNvPr id="61" name="TextBox 60"/>
+          <p:cNvSpPr txBox="1"/>
+          <p:nvPr/>
+        </p:nvSpPr>
+        <p:spPr>
+          <a:xfrm>
+            <a:off x="9656064" y="5330952"/>
+            <a:ext cx="457200" cy="457200"/>
+          </a:xfrm>
+          <a:prstGeom prst="rect">
+            <a:avLst/>
+          </a:prstGeom>
+          <a:noFill/>
+        </p:spPr>
+        <p:txBody>
+          <a:bodyPr wrap="square" anchor="ctr" tIns="0" bIns="0" lIns="25400" rIns="25400">
+            <a:spAutoFit/>
+          </a:bodyPr>
+          <a:lstStyle/>
+          <a:p>
+            <a:pPr algn="ctr">
+              <a:spcBef>
+                <a:spcPts val="0"/>
+              </a:spcBef>
+              <a:spcAft>
+                <a:spcPts val="300"/>
+              </a:spcAft>
+            </a:pPr>
+            <a:r>
+              <a:rPr sz="1600" b="1">
+                <a:solidFill>
+                  <a:srgbClr val="C77DE0"/>
+                </a:solidFill>
+                <a:latin typeface="Microsoft JhengHei"/>
+              </a:rPr>
+              <a:t>▣</a:t>
+            </a:r>
+          </a:p>
+        </p:txBody>
+      </p:sp>
+      <p:sp>
+        <p:nvSpPr>
+          <p:cNvPr id="62" name="TextBox 61"/>
+          <p:cNvSpPr txBox="1"/>
+          <p:nvPr/>
+        </p:nvSpPr>
+        <p:spPr>
+          <a:xfrm>
+            <a:off x="10204704" y="5330952"/>
+            <a:ext cx="1399032" cy="502920"/>
+          </a:xfrm>
+          <a:prstGeom prst="rect">
+            <a:avLst/>
+          </a:prstGeom>
+          <a:noFill/>
+        </p:spPr>
+        <p:txBody>
+          <a:bodyPr wrap="square" anchor="ctr" tIns="0" bIns="0" lIns="25400" rIns="25400">
+            <a:spAutoFit/>
+          </a:bodyPr>
+          <a:lstStyle/>
+          <a:p>
+            <a:pPr algn="l">
+              <a:spcBef>
+                <a:spcPts val="0"/>
+              </a:spcBef>
+              <a:spcAft>
+                <a:spcPts val="300"/>
+              </a:spcAft>
+            </a:pPr>
+            <a:r>
+              <a:rPr sz="1250" b="1">
+                <a:solidFill>
+                  <a:srgbClr val="FFFFFF"/>
+                </a:solidFill>
+                <a:latin typeface="Microsoft JhengHei"/>
+              </a:rPr>
+              <a:t>測試 / QA</a:t>
+            </a:r>
+          </a:p>
+        </p:txBody>
+      </p:sp>
+      <p:sp>
+        <p:nvSpPr>
+          <p:cNvPr id="63" name="TextBox 62"/>
+          <p:cNvSpPr txBox="1"/>
+          <p:nvPr/>
+        </p:nvSpPr>
+        <p:spPr>
+          <a:xfrm>
+            <a:off x="9656064" y="5843016"/>
+            <a:ext cx="1865376" cy="411480"/>
+          </a:xfrm>
+          <a:prstGeom prst="rect">
+            <a:avLst/>
+          </a:prstGeom>
+          <a:noFill/>
+        </p:spPr>
+        <p:txBody>
+          <a:bodyPr wrap="square" anchor="t" tIns="0" bIns="0" lIns="25400" rIns="25400">
+            <a:spAutoFit/>
+          </a:bodyPr>
+          <a:lstStyle/>
+          <a:p>
+            <a:pPr algn="l">
+              <a:spcBef>
+                <a:spcPts val="0"/>
+              </a:spcBef>
+              <a:spcAft>
+                <a:spcPts val="300"/>
+              </a:spcAft>
+            </a:pPr>
+            <a:r>
+              <a:rPr sz="950" b="0">
+                <a:solidFill>
+                  <a:srgbClr val="8A93A1"/>
+                </a:solidFill>
+                <a:latin typeface="Microsoft JhengHei"/>
+              </a:rPr>
+              <a:t>準確性驗證與 UAT 使用者驗收</a:t>
+            </a:r>
+          </a:p>
+        </p:txBody>
+      </p:sp>
+      <p:sp>
+        <p:nvSpPr>
+          <p:cNvPr id="64" name="TextBox 63"/>
+          <p:cNvSpPr txBox="1"/>
+          <p:nvPr/>
+        </p:nvSpPr>
+        <p:spPr>
+          <a:xfrm>
+            <a:off x="457200" y="6565392"/>
+            <a:ext cx="11274552" cy="228600"/>
+          </a:xfrm>
+          <a:prstGeom prst="rect">
+            <a:avLst/>
+          </a:prstGeom>
+          <a:noFill/>
+        </p:spPr>
+        <p:txBody>
+          <a:bodyPr wrap="square" anchor="t" tIns="0" bIns="0" lIns="25400" rIns="25400">
+            <a:spAutoFit/>
+          </a:bodyPr>
+          <a:lstStyle/>
+          <a:p>
+            <a:pPr algn="ctr">
+              <a:spcBef>
+                <a:spcPts val="0"/>
+              </a:spcBef>
+              <a:spcAft>
+                <a:spcPts val="300"/>
+              </a:spcAft>
+            </a:pPr>
+            <a:r>
+              <a:rPr sz="1000" b="1">
+                <a:solidFill>
+                  <a:srgbClr val="8A93A1"/>
+                </a:solidFill>
+                <a:latin typeface="Microsoft JhengHei"/>
+              </a:rPr>
+              <a:t>下一步：凍結 TO-BE 需求範圍 ▶ 定義平衡計算公式與 Agent 規格 ▶ 完成歷史資料盤點（需相關單位協助提供資料來源與申報欄位）</a:t>
+            </a:r>
+          </a:p>
+        </p:txBody>
+      </p:sp>
+    </p:spTree>
+  </p:cSld>
+  <p:clrMapOvr>
+    <a:masterClrMapping/>
+  </p:clrMapOvr>
+</p:sld>
+</file>
+
+<file path=ppt/slides/slide2.xml><?xml version="1.0" encoding="utf-8"?>
+<p:sld xmlns:a="http://schemas.openxmlformats.org/drawingml/2006/main" xmlns:p="http://schemas.openxmlformats.org/presentationml/2006/main" xmlns:r="http://schemas.openxmlformats.org/officeDocument/2006/relationships">
+  <p:cSld>
+    <p:spTree>
+      <p:nvGrpSpPr>
+        <p:cNvPr id="1" name=""/>
+        <p:cNvGrpSpPr/>
+        <p:nvPr/>
+      </p:nvGrpSpPr>
+      <p:grpSpPr/>
+      <p:sp>
+        <p:nvSpPr>
+          <p:cNvPr id="2" name="Rectangle 1"/>
+          <p:cNvSpPr/>
+          <p:nvPr/>
+        </p:nvSpPr>
+        <p:spPr>
+          <a:xfrm>
+            <a:off x="0" y="0"/>
+            <a:ext cx="12191695" cy="6858000"/>
+          </a:xfrm>
+          <a:prstGeom prst="rect">
+            <a:avLst/>
+          </a:prstGeom>
+          <a:solidFill>
+            <a:srgbClr val="101216"/>
+          </a:solidFill>
+          <a:ln>
+            <a:noFill/>
+          </a:ln>
+          <a:effectLst/>
+        </p:spPr>
+        <p:style>
+          <a:lnRef idx="1">
+            <a:schemeClr val="accent1"/>
+          </a:lnRef>
+          <a:fillRef idx="3">
+            <a:schemeClr val="accent1"/>
+          </a:fillRef>
+          <a:effectRef idx="2">
+            <a:schemeClr val="accent1"/>
+          </a:effectRef>
+          <a:fontRef idx="minor">
+            <a:schemeClr val="lt1"/>
+          </a:fontRef>
+        </p:style>
+        <p:txBody>
+          <a:bodyPr rtlCol="0" anchor="ctr"/>
+          <a:lstStyle/>
+          <a:p>
+            <a:pPr algn="ctr"/>
+          </a:p>
+        </p:txBody>
+      </p:sp>
+      <p:sp>
+        <p:nvSpPr>
+          <p:cNvPr id="3" name="Rectangle 2"/>
+          <p:cNvSpPr/>
+          <p:nvPr/>
+        </p:nvSpPr>
+        <p:spPr>
+          <a:xfrm>
+            <a:off x="0" y="0"/>
+            <a:ext cx="164592" cy="960120"/>
+          </a:xfrm>
+          <a:prstGeom prst="rect">
+            <a:avLst/>
+          </a:prstGeom>
+          <a:solidFill>
+            <a:srgbClr val="35D0E6"/>
+          </a:solidFill>
+          <a:ln>
+            <a:noFill/>
+          </a:ln>
+          <a:effectLst/>
+        </p:spPr>
+        <p:style>
+          <a:lnRef idx="1">
+            <a:schemeClr val="accent1"/>
+          </a:lnRef>
+          <a:fillRef idx="3">
+            <a:schemeClr val="accent1"/>
+          </a:fillRef>
+          <a:effectRef idx="2">
+            <a:schemeClr val="accent1"/>
+          </a:effectRef>
+          <a:fontRef idx="minor">
+            <a:schemeClr val="lt1"/>
+          </a:fontRef>
+        </p:style>
+        <p:txBody>
+          <a:bodyPr rtlCol="0" anchor="ctr"/>
+          <a:lstStyle/>
+          <a:p>
+            <a:pPr algn="ctr"/>
+          </a:p>
+        </p:txBody>
+      </p:sp>
+      <p:sp>
+        <p:nvSpPr>
+          <p:cNvPr id="4" name="TextBox 3"/>
+          <p:cNvSpPr txBox="1"/>
+          <p:nvPr/>
+        </p:nvSpPr>
+        <p:spPr>
+          <a:xfrm>
+            <a:off x="457200" y="128016"/>
+            <a:ext cx="9144000" cy="292608"/>
+          </a:xfrm>
+          <a:prstGeom prst="rect">
+            <a:avLst/>
+          </a:prstGeom>
+          <a:noFill/>
+        </p:spPr>
+        <p:txBody>
+          <a:bodyPr wrap="square" anchor="t" tIns="0" bIns="0" lIns="25400" rIns="25400">
+            <a:spAutoFit/>
+          </a:bodyPr>
+          <a:lstStyle/>
+          <a:p>
+            <a:pPr algn="l">
+              <a:spcBef>
+                <a:spcPts val="0"/>
+              </a:spcBef>
+              <a:spcAft>
+                <a:spcPts val="300"/>
+              </a:spcAft>
+            </a:pPr>
+            <a:r>
+              <a:rPr sz="1200" b="1">
+                <a:solidFill>
+                  <a:srgbClr val="35D0E6"/>
+                </a:solidFill>
+                <a:latin typeface="Microsoft JhengHei"/>
+              </a:rPr>
+              <a:t>MILESTONE ROADMAP ‧ 2026/06 → 2026/10</a:t>
+            </a:r>
+          </a:p>
+        </p:txBody>
+      </p:sp>
+      <p:sp>
+        <p:nvSpPr>
           <p:cNvPr id="5" name="TextBox 4"/>
           <p:cNvSpPr txBox="1"/>
           <p:nvPr/>
         </p:nvSpPr>
         <p:spPr>
           <a:xfrm>
-            <a:off x="457200" y="109728"/>
-            <a:ext cx="8686800" cy="731520"/>
+            <a:off x="457200" y="384048"/>
+            <a:ext cx="10058400" cy="548640"/>
           </a:xfrm>
           <a:prstGeom prst="rect">
             <a:avLst/>
@@ -3237,12 +6106,270 @@
           <a:noFill/>
         </p:spPr>
         <p:txBody>
-          <a:bodyPr wrap="square" anchor="ctr" tIns="0" bIns="0">
+          <a:bodyPr wrap="square" anchor="t" tIns="0" bIns="0" lIns="25400" rIns="25400">
             <a:spAutoFit/>
           </a:bodyPr>
           <a:lstStyle/>
           <a:p>
             <a:pPr algn="l">
+              <a:spcBef>
+                <a:spcPts val="0"/>
+              </a:spcBef>
+              <a:spcAft>
+                <a:spcPts val="300"/>
+              </a:spcAft>
+            </a:pPr>
+            <a:r>
+              <a:rPr sz="2600" b="1">
+                <a:solidFill>
+                  <a:srgbClr val="FFFFFF"/>
+                </a:solidFill>
+                <a:latin typeface="Microsoft JhengHei"/>
+              </a:rPr>
+              <a:t>專案里程碑（10 步驟）</a:t>
+            </a:r>
+          </a:p>
+        </p:txBody>
+      </p:sp>
+      <p:sp>
+        <p:nvSpPr>
+          <p:cNvPr id="6" name="TextBox 5"/>
+          <p:cNvSpPr txBox="1"/>
+          <p:nvPr/>
+        </p:nvSpPr>
+        <p:spPr>
+          <a:xfrm>
+            <a:off x="10789920" y="274320"/>
+            <a:ext cx="1097280" cy="457200"/>
+          </a:xfrm>
+          <a:prstGeom prst="rect">
+            <a:avLst/>
+          </a:prstGeom>
+          <a:noFill/>
+        </p:spPr>
+        <p:txBody>
+          <a:bodyPr wrap="square" anchor="t" tIns="0" bIns="0" lIns="25400" rIns="25400">
+            <a:spAutoFit/>
+          </a:bodyPr>
+          <a:lstStyle/>
+          <a:p>
+            <a:pPr algn="r">
+              <a:spcBef>
+                <a:spcPts val="0"/>
+              </a:spcBef>
+              <a:spcAft>
+                <a:spcPts val="300"/>
+              </a:spcAft>
+            </a:pPr>
+            <a:r>
+              <a:rPr sz="1200" b="1">
+                <a:solidFill>
+                  <a:srgbClr val="8A93A1"/>
+                </a:solidFill>
+                <a:latin typeface="Microsoft JhengHei"/>
+              </a:rPr>
+              <a:t>PAGE 02</a:t>
+            </a:r>
+          </a:p>
+        </p:txBody>
+      </p:sp>
+      <p:sp>
+        <p:nvSpPr>
+          <p:cNvPr id="7" name="Rectangle 6"/>
+          <p:cNvSpPr/>
+          <p:nvPr/>
+        </p:nvSpPr>
+        <p:spPr>
+          <a:xfrm>
+            <a:off x="457200" y="987552"/>
+            <a:ext cx="11274552" cy="25400"/>
+          </a:xfrm>
+          <a:prstGeom prst="rect">
+            <a:avLst/>
+          </a:prstGeom>
+          <a:solidFill>
+            <a:srgbClr val="2A2F39"/>
+          </a:solidFill>
+          <a:ln>
+            <a:noFill/>
+          </a:ln>
+          <a:effectLst/>
+        </p:spPr>
+        <p:style>
+          <a:lnRef idx="1">
+            <a:schemeClr val="accent1"/>
+          </a:lnRef>
+          <a:fillRef idx="3">
+            <a:schemeClr val="accent1"/>
+          </a:fillRef>
+          <a:effectRef idx="2">
+            <a:schemeClr val="accent1"/>
+          </a:effectRef>
+          <a:fontRef idx="minor">
+            <a:schemeClr val="lt1"/>
+          </a:fontRef>
+        </p:style>
+        <p:txBody>
+          <a:bodyPr rtlCol="0" anchor="ctr"/>
+          <a:lstStyle/>
+          <a:p>
+            <a:pPr algn="ctr"/>
+          </a:p>
+        </p:txBody>
+      </p:sp>
+      <p:sp>
+        <p:nvSpPr>
+          <p:cNvPr id="8" name="TextBox 7"/>
+          <p:cNvSpPr txBox="1"/>
+          <p:nvPr/>
+        </p:nvSpPr>
+        <p:spPr>
+          <a:xfrm>
+            <a:off x="10058400" y="1097280"/>
+            <a:ext cx="1673352" cy="274320"/>
+          </a:xfrm>
+          <a:prstGeom prst="rect">
+            <a:avLst/>
+          </a:prstGeom>
+          <a:noFill/>
+        </p:spPr>
+        <p:txBody>
+          <a:bodyPr wrap="square" anchor="t" tIns="0" bIns="0" lIns="25400" rIns="25400">
+            <a:spAutoFit/>
+          </a:bodyPr>
+          <a:lstStyle/>
+          <a:p>
+            <a:pPr algn="r">
+              <a:spcBef>
+                <a:spcPts val="0"/>
+              </a:spcBef>
+              <a:spcAft>
+                <a:spcPts val="300"/>
+              </a:spcAft>
+            </a:pPr>
+            <a:r>
+              <a:rPr sz="1200" b="1">
+                <a:solidFill>
+                  <a:srgbClr val="35D0E6"/>
+                </a:solidFill>
+                <a:latin typeface="Microsoft JhengHei"/>
+              </a:rPr>
+              <a:t>完成後應產出</a:t>
+            </a:r>
+          </a:p>
+        </p:txBody>
+      </p:sp>
+      <p:sp>
+        <p:nvSpPr>
+          <p:cNvPr id="9" name="Rectangle 8"/>
+          <p:cNvSpPr/>
+          <p:nvPr/>
+        </p:nvSpPr>
+        <p:spPr>
+          <a:xfrm>
+            <a:off x="457200" y="1417320"/>
+            <a:ext cx="868680" cy="978408"/>
+          </a:xfrm>
+          <a:prstGeom prst="rect">
+            <a:avLst/>
+          </a:prstGeom>
+          <a:solidFill>
+            <a:srgbClr val="2A2F39"/>
+          </a:solidFill>
+          <a:ln>
+            <a:noFill/>
+          </a:ln>
+          <a:effectLst/>
+        </p:spPr>
+        <p:style>
+          <a:lnRef idx="1">
+            <a:schemeClr val="accent1"/>
+          </a:lnRef>
+          <a:fillRef idx="3">
+            <a:schemeClr val="accent1"/>
+          </a:fillRef>
+          <a:effectRef idx="2">
+            <a:schemeClr val="accent1"/>
+          </a:effectRef>
+          <a:fontRef idx="minor">
+            <a:schemeClr val="lt1"/>
+          </a:fontRef>
+        </p:style>
+        <p:txBody>
+          <a:bodyPr rtlCol="0" anchor="ctr"/>
+          <a:lstStyle/>
+          <a:p>
+            <a:pPr algn="ctr"/>
+          </a:p>
+        </p:txBody>
+      </p:sp>
+      <p:sp>
+        <p:nvSpPr>
+          <p:cNvPr id="10" name="Rectangle 9"/>
+          <p:cNvSpPr/>
+          <p:nvPr/>
+        </p:nvSpPr>
+        <p:spPr>
+          <a:xfrm>
+            <a:off x="457200" y="1417320"/>
+            <a:ext cx="63500" cy="978408"/>
+          </a:xfrm>
+          <a:prstGeom prst="rect">
+            <a:avLst/>
+          </a:prstGeom>
+          <a:solidFill>
+            <a:srgbClr val="35D0E6"/>
+          </a:solidFill>
+          <a:ln>
+            <a:noFill/>
+          </a:ln>
+          <a:effectLst/>
+        </p:spPr>
+        <p:style>
+          <a:lnRef idx="1">
+            <a:schemeClr val="accent1"/>
+          </a:lnRef>
+          <a:fillRef idx="3">
+            <a:schemeClr val="accent1"/>
+          </a:fillRef>
+          <a:effectRef idx="2">
+            <a:schemeClr val="accent1"/>
+          </a:effectRef>
+          <a:fontRef idx="minor">
+            <a:schemeClr val="lt1"/>
+          </a:fontRef>
+        </p:style>
+        <p:txBody>
+          <a:bodyPr rtlCol="0" anchor="ctr"/>
+          <a:lstStyle/>
+          <a:p>
+            <a:pPr algn="ctr"/>
+          </a:p>
+        </p:txBody>
+      </p:sp>
+      <p:sp>
+        <p:nvSpPr>
+          <p:cNvPr id="11" name="TextBox 10"/>
+          <p:cNvSpPr txBox="1"/>
+          <p:nvPr/>
+        </p:nvSpPr>
+        <p:spPr>
+          <a:xfrm>
+            <a:off x="457200" y="1417320"/>
+            <a:ext cx="868680" cy="978408"/>
+          </a:xfrm>
+          <a:prstGeom prst="rect">
+            <a:avLst/>
+          </a:prstGeom>
+          <a:noFill/>
+        </p:spPr>
+        <p:txBody>
+          <a:bodyPr wrap="square" anchor="ctr" tIns="0" bIns="0" lIns="25400" rIns="25400">
+            <a:spAutoFit/>
+          </a:bodyPr>
+          <a:lstStyle/>
+          <a:p>
+            <a:pPr algn="ctr">
               <a:spcBef>
                 <a:spcPts val="0"/>
               </a:spcBef>
@@ -3251,17 +6378,17 @@
               </a:spcAft>
             </a:pPr>
             <a:r>
-              <a:rPr sz="2500" b="1">
+              <a:rPr sz="1300" b="1">
                 <a:solidFill>
                   <a:srgbClr val="FFFFFF"/>
                 </a:solidFill>
                 <a:latin typeface="Microsoft JhengHei"/>
               </a:rPr>
-              <a:t>進出水平衡計算對照系統 ‧ 專案進度報告</a:t>
-            </a:r>
-          </a:p>
-          <a:p>
-            <a:pPr algn="l">
+              <a:t>需求確認</a:t>
+            </a:r>
+          </a:p>
+          <a:p>
+            <a:pPr algn="ctr">
               <a:spcBef>
                 <a:spcPts val="0"/>
               </a:spcBef>
@@ -3270,27 +6397,73 @@
               </a:spcAft>
             </a:pPr>
             <a:r>
-              <a:rPr sz="1300" b="0">
-                <a:solidFill>
-                  <a:srgbClr val="C4D2E2"/>
+              <a:rPr sz="1000" b="1">
+                <a:solidFill>
+                  <a:srgbClr val="35D0E6"/>
                 </a:solidFill>
                 <a:latin typeface="Microsoft JhengHei"/>
               </a:rPr>
-              <a:t>精確計算蒸發量 ‧ Agent 自動化平衡計算與申報整理</a:t>
-            </a:r>
-          </a:p>
-        </p:txBody>
-      </p:sp>
-      <p:sp>
-        <p:nvSpPr>
-          <p:cNvPr id="6" name="TextBox 5"/>
+              <a:t>6 月</a:t>
+            </a:r>
+          </a:p>
+        </p:txBody>
+      </p:sp>
+      <p:sp>
+        <p:nvSpPr>
+          <p:cNvPr id="12" name="Rectangle 11"/>
+          <p:cNvSpPr/>
+          <p:nvPr/>
+        </p:nvSpPr>
+        <p:spPr>
+          <a:xfrm>
+            <a:off x="1417320" y="1417320"/>
+            <a:ext cx="960120" cy="457200"/>
+          </a:xfrm>
+          <a:prstGeom prst="rect">
+            <a:avLst/>
+          </a:prstGeom>
+          <a:solidFill>
+            <a:srgbClr val="1B1F27"/>
+          </a:solidFill>
+          <a:ln w="12700">
+            <a:solidFill>
+              <a:srgbClr val="2A2F39"/>
+            </a:solidFill>
+          </a:ln>
+          <a:effectLst/>
+        </p:spPr>
+        <p:style>
+          <a:lnRef idx="1">
+            <a:schemeClr val="accent1"/>
+          </a:lnRef>
+          <a:fillRef idx="3">
+            <a:schemeClr val="accent1"/>
+          </a:fillRef>
+          <a:effectRef idx="2">
+            <a:schemeClr val="accent1"/>
+          </a:effectRef>
+          <a:fontRef idx="minor">
+            <a:schemeClr val="lt1"/>
+          </a:fontRef>
+        </p:style>
+        <p:txBody>
+          <a:bodyPr rtlCol="0" anchor="ctr"/>
+          <a:lstStyle/>
+          <a:p>
+            <a:pPr algn="ctr"/>
+          </a:p>
+        </p:txBody>
+      </p:sp>
+      <p:sp>
+        <p:nvSpPr>
+          <p:cNvPr id="13" name="TextBox 12"/>
           <p:cNvSpPr txBox="1"/>
           <p:nvPr/>
         </p:nvSpPr>
         <p:spPr>
           <a:xfrm>
-            <a:off x="9052560" y="109728"/>
-            <a:ext cx="2743200" cy="731520"/>
+            <a:off x="1417320" y="1435608"/>
+            <a:ext cx="713232" cy="457200"/>
           </a:xfrm>
           <a:prstGeom prst="rect">
             <a:avLst/>
@@ -3298,12 +6471,740 @@
           <a:noFill/>
         </p:spPr>
         <p:txBody>
-          <a:bodyPr wrap="square" anchor="ctr" tIns="0" bIns="0">
+          <a:bodyPr wrap="square" anchor="ctr" tIns="0" bIns="0" lIns="25400" rIns="25400">
             <a:spAutoFit/>
           </a:bodyPr>
           <a:lstStyle/>
           <a:p>
-            <a:pPr algn="r">
+            <a:pPr algn="ctr">
+              <a:spcBef>
+                <a:spcPts val="0"/>
+              </a:spcBef>
+              <a:spcAft>
+                <a:spcPts val="0"/>
+              </a:spcAft>
+            </a:pPr>
+            <a:r>
+              <a:rPr sz="800" b="1">
+                <a:solidFill>
+                  <a:srgbClr val="8A93A1"/>
+                </a:solidFill>
+                <a:latin typeface="Microsoft JhengHei"/>
+              </a:rPr>
+              <a:t>STEP</a:t>
+            </a:r>
+          </a:p>
+          <a:p>
+            <a:pPr algn="ctr">
+              <a:spcBef>
+                <a:spcPts val="0"/>
+              </a:spcBef>
+              <a:spcAft>
+                <a:spcPts val="0"/>
+              </a:spcAft>
+            </a:pPr>
+            <a:r>
+              <a:rPr sz="1600" b="1">
+                <a:solidFill>
+                  <a:srgbClr val="FFFFFF"/>
+                </a:solidFill>
+                <a:latin typeface="Microsoft JhengHei"/>
+              </a:rPr>
+              <a:t>01</a:t>
+            </a:r>
+          </a:p>
+        </p:txBody>
+      </p:sp>
+      <p:sp>
+        <p:nvSpPr>
+          <p:cNvPr id="14" name="TextBox 13"/>
+          <p:cNvSpPr txBox="1"/>
+          <p:nvPr/>
+        </p:nvSpPr>
+        <p:spPr>
+          <a:xfrm>
+            <a:off x="2093976" y="1417320"/>
+            <a:ext cx="274320" cy="457200"/>
+          </a:xfrm>
+          <a:prstGeom prst="rect">
+            <a:avLst/>
+          </a:prstGeom>
+          <a:noFill/>
+        </p:spPr>
+        <p:txBody>
+          <a:bodyPr wrap="square" anchor="ctr" tIns="0" bIns="0" lIns="25400" rIns="25400">
+            <a:spAutoFit/>
+          </a:bodyPr>
+          <a:lstStyle/>
+          <a:p>
+            <a:pPr algn="ctr">
+              <a:spcBef>
+                <a:spcPts val="0"/>
+              </a:spcBef>
+              <a:spcAft>
+                <a:spcPts val="300"/>
+              </a:spcAft>
+            </a:pPr>
+            <a:r>
+              <a:rPr sz="950" b="1">
+                <a:solidFill>
+                  <a:srgbClr val="35D0E6"/>
+                </a:solidFill>
+                <a:latin typeface="Microsoft JhengHei"/>
+              </a:rPr>
+              <a:t>10%</a:t>
+            </a:r>
+          </a:p>
+        </p:txBody>
+      </p:sp>
+      <p:sp>
+        <p:nvSpPr>
+          <p:cNvPr id="15" name="Rectangle 14"/>
+          <p:cNvSpPr/>
+          <p:nvPr/>
+        </p:nvSpPr>
+        <p:spPr>
+          <a:xfrm>
+            <a:off x="2514600" y="1417320"/>
+            <a:ext cx="2011680" cy="457200"/>
+          </a:xfrm>
+          <a:prstGeom prst="rect">
+            <a:avLst/>
+          </a:prstGeom>
+          <a:solidFill>
+            <a:srgbClr val="C9CFD8"/>
+          </a:solidFill>
+          <a:ln>
+            <a:noFill/>
+          </a:ln>
+          <a:effectLst/>
+        </p:spPr>
+        <p:style>
+          <a:lnRef idx="1">
+            <a:schemeClr val="accent1"/>
+          </a:lnRef>
+          <a:fillRef idx="3">
+            <a:schemeClr val="accent1"/>
+          </a:fillRef>
+          <a:effectRef idx="2">
+            <a:schemeClr val="accent1"/>
+          </a:effectRef>
+          <a:fontRef idx="minor">
+            <a:schemeClr val="lt1"/>
+          </a:fontRef>
+        </p:style>
+        <p:txBody>
+          <a:bodyPr rtlCol="0" anchor="ctr"/>
+          <a:lstStyle/>
+          <a:p>
+            <a:pPr algn="ctr"/>
+          </a:p>
+        </p:txBody>
+      </p:sp>
+      <p:sp>
+        <p:nvSpPr>
+          <p:cNvPr id="16" name="TextBox 15"/>
+          <p:cNvSpPr txBox="1"/>
+          <p:nvPr/>
+        </p:nvSpPr>
+        <p:spPr>
+          <a:xfrm>
+            <a:off x="2624328" y="1417320"/>
+            <a:ext cx="1828800" cy="457200"/>
+          </a:xfrm>
+          <a:prstGeom prst="rect">
+            <a:avLst/>
+          </a:prstGeom>
+          <a:noFill/>
+        </p:spPr>
+        <p:txBody>
+          <a:bodyPr wrap="square" anchor="ctr" tIns="0" bIns="0" lIns="25400" rIns="25400">
+            <a:spAutoFit/>
+          </a:bodyPr>
+          <a:lstStyle/>
+          <a:p>
+            <a:pPr algn="l">
+              <a:spcBef>
+                <a:spcPts val="0"/>
+              </a:spcBef>
+              <a:spcAft>
+                <a:spcPts val="300"/>
+              </a:spcAft>
+            </a:pPr>
+            <a:r>
+              <a:rPr sz="1250" b="1">
+                <a:solidFill>
+                  <a:srgbClr val="181C22"/>
+                </a:solidFill>
+                <a:latin typeface="Microsoft JhengHei"/>
+              </a:rPr>
+              <a:t>Agent 任務確認</a:t>
+            </a:r>
+          </a:p>
+        </p:txBody>
+      </p:sp>
+      <p:sp>
+        <p:nvSpPr>
+          <p:cNvPr id="17" name="Rectangle 16"/>
+          <p:cNvSpPr/>
+          <p:nvPr/>
+        </p:nvSpPr>
+        <p:spPr>
+          <a:xfrm>
+            <a:off x="4617720" y="1417320"/>
+            <a:ext cx="5989320" cy="457200"/>
+          </a:xfrm>
+          <a:prstGeom prst="rect">
+            <a:avLst/>
+          </a:prstGeom>
+          <a:solidFill>
+            <a:srgbClr val="B2B9C4"/>
+          </a:solidFill>
+          <a:ln>
+            <a:noFill/>
+          </a:ln>
+          <a:effectLst/>
+        </p:spPr>
+        <p:style>
+          <a:lnRef idx="1">
+            <a:schemeClr val="accent1"/>
+          </a:lnRef>
+          <a:fillRef idx="3">
+            <a:schemeClr val="accent1"/>
+          </a:fillRef>
+          <a:effectRef idx="2">
+            <a:schemeClr val="accent1"/>
+          </a:effectRef>
+          <a:fontRef idx="minor">
+            <a:schemeClr val="lt1"/>
+          </a:fontRef>
+        </p:style>
+        <p:txBody>
+          <a:bodyPr rtlCol="0" anchor="ctr"/>
+          <a:lstStyle/>
+          <a:p>
+            <a:pPr algn="ctr"/>
+          </a:p>
+        </p:txBody>
+      </p:sp>
+      <p:sp>
+        <p:nvSpPr>
+          <p:cNvPr id="18" name="TextBox 17"/>
+          <p:cNvSpPr txBox="1"/>
+          <p:nvPr/>
+        </p:nvSpPr>
+        <p:spPr>
+          <a:xfrm>
+            <a:off x="4754880" y="1417320"/>
+            <a:ext cx="5715000" cy="457200"/>
+          </a:xfrm>
+          <a:prstGeom prst="rect">
+            <a:avLst/>
+          </a:prstGeom>
+          <a:noFill/>
+        </p:spPr>
+        <p:txBody>
+          <a:bodyPr wrap="square" anchor="ctr" tIns="0" bIns="0" lIns="25400" rIns="25400">
+            <a:spAutoFit/>
+          </a:bodyPr>
+          <a:lstStyle/>
+          <a:p>
+            <a:pPr algn="l">
+              <a:spcBef>
+                <a:spcPts val="0"/>
+              </a:spcBef>
+              <a:spcAft>
+                <a:spcPts val="300"/>
+              </a:spcAft>
+            </a:pPr>
+            <a:r>
+              <a:rPr sz="1100" b="0">
+                <a:solidFill>
+                  <a:srgbClr val="181C22"/>
+                </a:solidFill>
+                <a:latin typeface="Microsoft JhengHei"/>
+              </a:rPr>
+              <a:t>明確定義水平衡／蒸發量計算範圍、痛點與 Agent 效益</a:t>
+            </a:r>
+          </a:p>
+        </p:txBody>
+      </p:sp>
+      <p:sp>
+        <p:nvSpPr>
+          <p:cNvPr id="19" name="Rectangle 18"/>
+          <p:cNvSpPr/>
+          <p:nvPr/>
+        </p:nvSpPr>
+        <p:spPr>
+          <a:xfrm>
+            <a:off x="1417320" y="1938528"/>
+            <a:ext cx="960120" cy="457200"/>
+          </a:xfrm>
+          <a:prstGeom prst="rect">
+            <a:avLst/>
+          </a:prstGeom>
+          <a:solidFill>
+            <a:srgbClr val="1B1F27"/>
+          </a:solidFill>
+          <a:ln w="12700">
+            <a:solidFill>
+              <a:srgbClr val="2A2F39"/>
+            </a:solidFill>
+          </a:ln>
+          <a:effectLst/>
+        </p:spPr>
+        <p:style>
+          <a:lnRef idx="1">
+            <a:schemeClr val="accent1"/>
+          </a:lnRef>
+          <a:fillRef idx="3">
+            <a:schemeClr val="accent1"/>
+          </a:fillRef>
+          <a:effectRef idx="2">
+            <a:schemeClr val="accent1"/>
+          </a:effectRef>
+          <a:fontRef idx="minor">
+            <a:schemeClr val="lt1"/>
+          </a:fontRef>
+        </p:style>
+        <p:txBody>
+          <a:bodyPr rtlCol="0" anchor="ctr"/>
+          <a:lstStyle/>
+          <a:p>
+            <a:pPr algn="ctr"/>
+          </a:p>
+        </p:txBody>
+      </p:sp>
+      <p:sp>
+        <p:nvSpPr>
+          <p:cNvPr id="20" name="TextBox 19"/>
+          <p:cNvSpPr txBox="1"/>
+          <p:nvPr/>
+        </p:nvSpPr>
+        <p:spPr>
+          <a:xfrm>
+            <a:off x="1417320" y="1956816"/>
+            <a:ext cx="713232" cy="457200"/>
+          </a:xfrm>
+          <a:prstGeom prst="rect">
+            <a:avLst/>
+          </a:prstGeom>
+          <a:noFill/>
+        </p:spPr>
+        <p:txBody>
+          <a:bodyPr wrap="square" anchor="ctr" tIns="0" bIns="0" lIns="25400" rIns="25400">
+            <a:spAutoFit/>
+          </a:bodyPr>
+          <a:lstStyle/>
+          <a:p>
+            <a:pPr algn="ctr">
+              <a:spcBef>
+                <a:spcPts val="0"/>
+              </a:spcBef>
+              <a:spcAft>
+                <a:spcPts val="0"/>
+              </a:spcAft>
+            </a:pPr>
+            <a:r>
+              <a:rPr sz="800" b="1">
+                <a:solidFill>
+                  <a:srgbClr val="8A93A1"/>
+                </a:solidFill>
+                <a:latin typeface="Microsoft JhengHei"/>
+              </a:rPr>
+              <a:t>STEP</a:t>
+            </a:r>
+          </a:p>
+          <a:p>
+            <a:pPr algn="ctr">
+              <a:spcBef>
+                <a:spcPts val="0"/>
+              </a:spcBef>
+              <a:spcAft>
+                <a:spcPts val="0"/>
+              </a:spcAft>
+            </a:pPr>
+            <a:r>
+              <a:rPr sz="1600" b="1">
+                <a:solidFill>
+                  <a:srgbClr val="FFFFFF"/>
+                </a:solidFill>
+                <a:latin typeface="Microsoft JhengHei"/>
+              </a:rPr>
+              <a:t>02</a:t>
+            </a:r>
+          </a:p>
+        </p:txBody>
+      </p:sp>
+      <p:sp>
+        <p:nvSpPr>
+          <p:cNvPr id="21" name="TextBox 20"/>
+          <p:cNvSpPr txBox="1"/>
+          <p:nvPr/>
+        </p:nvSpPr>
+        <p:spPr>
+          <a:xfrm>
+            <a:off x="2093976" y="1938528"/>
+            <a:ext cx="274320" cy="457200"/>
+          </a:xfrm>
+          <a:prstGeom prst="rect">
+            <a:avLst/>
+          </a:prstGeom>
+          <a:noFill/>
+        </p:spPr>
+        <p:txBody>
+          <a:bodyPr wrap="square" anchor="ctr" tIns="0" bIns="0" lIns="25400" rIns="25400">
+            <a:spAutoFit/>
+          </a:bodyPr>
+          <a:lstStyle/>
+          <a:p>
+            <a:pPr algn="ctr">
+              <a:spcBef>
+                <a:spcPts val="0"/>
+              </a:spcBef>
+              <a:spcAft>
+                <a:spcPts val="300"/>
+              </a:spcAft>
+            </a:pPr>
+            <a:r>
+              <a:rPr sz="950" b="1">
+                <a:solidFill>
+                  <a:srgbClr val="35D0E6"/>
+                </a:solidFill>
+                <a:latin typeface="Microsoft JhengHei"/>
+              </a:rPr>
+              <a:t>20%</a:t>
+            </a:r>
+          </a:p>
+        </p:txBody>
+      </p:sp>
+      <p:sp>
+        <p:nvSpPr>
+          <p:cNvPr id="22" name="Rectangle 21"/>
+          <p:cNvSpPr/>
+          <p:nvPr/>
+        </p:nvSpPr>
+        <p:spPr>
+          <a:xfrm>
+            <a:off x="2514600" y="1938528"/>
+            <a:ext cx="2011680" cy="457200"/>
+          </a:xfrm>
+          <a:prstGeom prst="rect">
+            <a:avLst/>
+          </a:prstGeom>
+          <a:solidFill>
+            <a:srgbClr val="C9CFD8"/>
+          </a:solidFill>
+          <a:ln>
+            <a:noFill/>
+          </a:ln>
+          <a:effectLst/>
+        </p:spPr>
+        <p:style>
+          <a:lnRef idx="1">
+            <a:schemeClr val="accent1"/>
+          </a:lnRef>
+          <a:fillRef idx="3">
+            <a:schemeClr val="accent1"/>
+          </a:fillRef>
+          <a:effectRef idx="2">
+            <a:schemeClr val="accent1"/>
+          </a:effectRef>
+          <a:fontRef idx="minor">
+            <a:schemeClr val="lt1"/>
+          </a:fontRef>
+        </p:style>
+        <p:txBody>
+          <a:bodyPr rtlCol="0" anchor="ctr"/>
+          <a:lstStyle/>
+          <a:p>
+            <a:pPr algn="ctr"/>
+          </a:p>
+        </p:txBody>
+      </p:sp>
+      <p:sp>
+        <p:nvSpPr>
+          <p:cNvPr id="23" name="TextBox 22"/>
+          <p:cNvSpPr txBox="1"/>
+          <p:nvPr/>
+        </p:nvSpPr>
+        <p:spPr>
+          <a:xfrm>
+            <a:off x="2624328" y="1938528"/>
+            <a:ext cx="1828800" cy="457200"/>
+          </a:xfrm>
+          <a:prstGeom prst="rect">
+            <a:avLst/>
+          </a:prstGeom>
+          <a:noFill/>
+        </p:spPr>
+        <p:txBody>
+          <a:bodyPr wrap="square" anchor="ctr" tIns="0" bIns="0" lIns="25400" rIns="25400">
+            <a:spAutoFit/>
+          </a:bodyPr>
+          <a:lstStyle/>
+          <a:p>
+            <a:pPr algn="l">
+              <a:spcBef>
+                <a:spcPts val="0"/>
+              </a:spcBef>
+              <a:spcAft>
+                <a:spcPts val="300"/>
+              </a:spcAft>
+            </a:pPr>
+            <a:r>
+              <a:rPr sz="1250" b="1">
+                <a:solidFill>
+                  <a:srgbClr val="181C22"/>
+                </a:solidFill>
+                <a:latin typeface="Microsoft JhengHei"/>
+              </a:rPr>
+              <a:t>作業流程定義</a:t>
+            </a:r>
+          </a:p>
+        </p:txBody>
+      </p:sp>
+      <p:sp>
+        <p:nvSpPr>
+          <p:cNvPr id="24" name="Rectangle 23"/>
+          <p:cNvSpPr/>
+          <p:nvPr/>
+        </p:nvSpPr>
+        <p:spPr>
+          <a:xfrm>
+            <a:off x="4617720" y="1938528"/>
+            <a:ext cx="5989320" cy="457200"/>
+          </a:xfrm>
+          <a:prstGeom prst="rect">
+            <a:avLst/>
+          </a:prstGeom>
+          <a:solidFill>
+            <a:srgbClr val="B2B9C4"/>
+          </a:solidFill>
+          <a:ln>
+            <a:noFill/>
+          </a:ln>
+          <a:effectLst/>
+        </p:spPr>
+        <p:style>
+          <a:lnRef idx="1">
+            <a:schemeClr val="accent1"/>
+          </a:lnRef>
+          <a:fillRef idx="3">
+            <a:schemeClr val="accent1"/>
+          </a:fillRef>
+          <a:effectRef idx="2">
+            <a:schemeClr val="accent1"/>
+          </a:effectRef>
+          <a:fontRef idx="minor">
+            <a:schemeClr val="lt1"/>
+          </a:fontRef>
+        </p:style>
+        <p:txBody>
+          <a:bodyPr rtlCol="0" anchor="ctr"/>
+          <a:lstStyle/>
+          <a:p>
+            <a:pPr algn="ctr"/>
+          </a:p>
+        </p:txBody>
+      </p:sp>
+      <p:sp>
+        <p:nvSpPr>
+          <p:cNvPr id="25" name="TextBox 24"/>
+          <p:cNvSpPr txBox="1"/>
+          <p:nvPr/>
+        </p:nvSpPr>
+        <p:spPr>
+          <a:xfrm>
+            <a:off x="4754880" y="1938528"/>
+            <a:ext cx="5715000" cy="457200"/>
+          </a:xfrm>
+          <a:prstGeom prst="rect">
+            <a:avLst/>
+          </a:prstGeom>
+          <a:noFill/>
+        </p:spPr>
+        <p:txBody>
+          <a:bodyPr wrap="square" anchor="ctr" tIns="0" bIns="0" lIns="25400" rIns="25400">
+            <a:spAutoFit/>
+          </a:bodyPr>
+          <a:lstStyle/>
+          <a:p>
+            <a:pPr algn="l">
+              <a:spcBef>
+                <a:spcPts val="0"/>
+              </a:spcBef>
+              <a:spcAft>
+                <a:spcPts val="300"/>
+              </a:spcAft>
+            </a:pPr>
+            <a:r>
+              <a:rPr sz="1100" b="0">
+                <a:solidFill>
+                  <a:srgbClr val="181C22"/>
+                </a:solidFill>
+                <a:latin typeface="Microsoft JhengHei"/>
+              </a:rPr>
+              <a:t>將現行人工水量試算與申報流程，翻譯成 Agent 執行節點（AS-IS→TO-BE）</a:t>
+            </a:r>
+          </a:p>
+        </p:txBody>
+      </p:sp>
+      <p:sp>
+        <p:nvSpPr>
+          <p:cNvPr id="26" name="Rectangle 25"/>
+          <p:cNvSpPr/>
+          <p:nvPr/>
+        </p:nvSpPr>
+        <p:spPr>
+          <a:xfrm>
+            <a:off x="10744200" y="1417320"/>
+            <a:ext cx="38100" cy="978408"/>
+          </a:xfrm>
+          <a:prstGeom prst="rect">
+            <a:avLst/>
+          </a:prstGeom>
+          <a:solidFill>
+            <a:srgbClr val="35D0E6"/>
+          </a:solidFill>
+          <a:ln>
+            <a:noFill/>
+          </a:ln>
+          <a:effectLst/>
+        </p:spPr>
+        <p:style>
+          <a:lnRef idx="1">
+            <a:schemeClr val="accent1"/>
+          </a:lnRef>
+          <a:fillRef idx="3">
+            <a:schemeClr val="accent1"/>
+          </a:fillRef>
+          <a:effectRef idx="2">
+            <a:schemeClr val="accent1"/>
+          </a:effectRef>
+          <a:fontRef idx="minor">
+            <a:schemeClr val="lt1"/>
+          </a:fontRef>
+        </p:style>
+        <p:txBody>
+          <a:bodyPr rtlCol="0" anchor="ctr"/>
+          <a:lstStyle/>
+          <a:p>
+            <a:pPr algn="ctr"/>
+          </a:p>
+        </p:txBody>
+      </p:sp>
+      <p:sp>
+        <p:nvSpPr>
+          <p:cNvPr id="27" name="Rectangle 26"/>
+          <p:cNvSpPr/>
+          <p:nvPr/>
+        </p:nvSpPr>
+        <p:spPr>
+          <a:xfrm>
+            <a:off x="457200" y="2505456"/>
+            <a:ext cx="868680" cy="1499616"/>
+          </a:xfrm>
+          <a:prstGeom prst="rect">
+            <a:avLst/>
+          </a:prstGeom>
+          <a:solidFill>
+            <a:srgbClr val="2A2F39"/>
+          </a:solidFill>
+          <a:ln>
+            <a:noFill/>
+          </a:ln>
+          <a:effectLst/>
+        </p:spPr>
+        <p:style>
+          <a:lnRef idx="1">
+            <a:schemeClr val="accent1"/>
+          </a:lnRef>
+          <a:fillRef idx="3">
+            <a:schemeClr val="accent1"/>
+          </a:fillRef>
+          <a:effectRef idx="2">
+            <a:schemeClr val="accent1"/>
+          </a:effectRef>
+          <a:fontRef idx="minor">
+            <a:schemeClr val="lt1"/>
+          </a:fontRef>
+        </p:style>
+        <p:txBody>
+          <a:bodyPr rtlCol="0" anchor="ctr"/>
+          <a:lstStyle/>
+          <a:p>
+            <a:pPr algn="ctr"/>
+          </a:p>
+        </p:txBody>
+      </p:sp>
+      <p:sp>
+        <p:nvSpPr>
+          <p:cNvPr id="28" name="Rectangle 27"/>
+          <p:cNvSpPr/>
+          <p:nvPr/>
+        </p:nvSpPr>
+        <p:spPr>
+          <a:xfrm>
+            <a:off x="457200" y="2505456"/>
+            <a:ext cx="63500" cy="1499616"/>
+          </a:xfrm>
+          <a:prstGeom prst="rect">
+            <a:avLst/>
+          </a:prstGeom>
+          <a:solidFill>
+            <a:srgbClr val="3E8FD6"/>
+          </a:solidFill>
+          <a:ln>
+            <a:noFill/>
+          </a:ln>
+          <a:effectLst/>
+        </p:spPr>
+        <p:style>
+          <a:lnRef idx="1">
+            <a:schemeClr val="accent1"/>
+          </a:lnRef>
+          <a:fillRef idx="3">
+            <a:schemeClr val="accent1"/>
+          </a:fillRef>
+          <a:effectRef idx="2">
+            <a:schemeClr val="accent1"/>
+          </a:effectRef>
+          <a:fontRef idx="minor">
+            <a:schemeClr val="lt1"/>
+          </a:fontRef>
+        </p:style>
+        <p:txBody>
+          <a:bodyPr rtlCol="0" anchor="ctr"/>
+          <a:lstStyle/>
+          <a:p>
+            <a:pPr algn="ctr"/>
+          </a:p>
+        </p:txBody>
+      </p:sp>
+      <p:sp>
+        <p:nvSpPr>
+          <p:cNvPr id="29" name="TextBox 28"/>
+          <p:cNvSpPr txBox="1"/>
+          <p:nvPr/>
+        </p:nvSpPr>
+        <p:spPr>
+          <a:xfrm>
+            <a:off x="457200" y="2505456"/>
+            <a:ext cx="868680" cy="1499616"/>
+          </a:xfrm>
+          <a:prstGeom prst="rect">
+            <a:avLst/>
+          </a:prstGeom>
+          <a:noFill/>
+        </p:spPr>
+        <p:txBody>
+          <a:bodyPr wrap="square" anchor="ctr" tIns="0" bIns="0" lIns="25400" rIns="25400">
+            <a:spAutoFit/>
+          </a:bodyPr>
+          <a:lstStyle/>
+          <a:p>
+            <a:pPr algn="ctr">
               <a:spcBef>
                 <a:spcPts val="0"/>
               </a:spcBef>
@@ -3312,17 +7213,17 @@
               </a:spcAft>
             </a:pPr>
             <a:r>
-              <a:rPr sz="1400" b="1">
-                <a:solidFill>
-                  <a:srgbClr val="E09F2A"/>
+              <a:rPr sz="1300" b="1">
+                <a:solidFill>
+                  <a:srgbClr val="FFFFFF"/>
                 </a:solidFill>
                 <a:latin typeface="Microsoft JhengHei"/>
               </a:rPr>
-              <a:t>預計上線：2026 / 10</a:t>
-            </a:r>
-          </a:p>
-          <a:p>
-            <a:pPr algn="r">
+              <a:t>知識建立</a:t>
+            </a:r>
+          </a:p>
+          <a:p>
+            <a:pPr algn="ctr">
               <a:spcBef>
                 <a:spcPts val="0"/>
               </a:spcBef>
@@ -3331,33 +7232,182 @@
               </a:spcAft>
             </a:pPr>
             <a:r>
-              <a:rPr sz="1100" b="0">
-                <a:solidFill>
-                  <a:srgbClr val="C4D2E2"/>
+              <a:rPr sz="1000" b="1">
+                <a:solidFill>
+                  <a:srgbClr val="3E8FD6"/>
                 </a:solidFill>
                 <a:latin typeface="Microsoft JhengHei"/>
               </a:rPr>
-              <a:t>報告日期：2026 / 06　進度約 25%</a:t>
-            </a:r>
-          </a:p>
-        </p:txBody>
-      </p:sp>
-      <p:sp>
-        <p:nvSpPr>
-          <p:cNvPr id="7" name="Rectangle 6"/>
+              <a:t>7 月</a:t>
+            </a:r>
+          </a:p>
+        </p:txBody>
+      </p:sp>
+      <p:sp>
+        <p:nvSpPr>
+          <p:cNvPr id="30" name="Rectangle 29"/>
           <p:cNvSpPr/>
           <p:nvPr/>
         </p:nvSpPr>
         <p:spPr>
           <a:xfrm>
-            <a:off x="411480" y="1143000"/>
-            <a:ext cx="5532120" cy="1783080"/>
+            <a:off x="1417320" y="2505456"/>
+            <a:ext cx="960120" cy="457200"/>
           </a:xfrm>
           <a:prstGeom prst="rect">
             <a:avLst/>
           </a:prstGeom>
           <a:solidFill>
-            <a:srgbClr val="EEF3F8"/>
+            <a:srgbClr val="1B1F27"/>
+          </a:solidFill>
+          <a:ln w="12700">
+            <a:solidFill>
+              <a:srgbClr val="2A2F39"/>
+            </a:solidFill>
+          </a:ln>
+          <a:effectLst/>
+        </p:spPr>
+        <p:style>
+          <a:lnRef idx="1">
+            <a:schemeClr val="accent1"/>
+          </a:lnRef>
+          <a:fillRef idx="3">
+            <a:schemeClr val="accent1"/>
+          </a:fillRef>
+          <a:effectRef idx="2">
+            <a:schemeClr val="accent1"/>
+          </a:effectRef>
+          <a:fontRef idx="minor">
+            <a:schemeClr val="lt1"/>
+          </a:fontRef>
+        </p:style>
+        <p:txBody>
+          <a:bodyPr rtlCol="0" anchor="ctr"/>
+          <a:lstStyle/>
+          <a:p>
+            <a:pPr algn="ctr"/>
+          </a:p>
+        </p:txBody>
+      </p:sp>
+      <p:sp>
+        <p:nvSpPr>
+          <p:cNvPr id="31" name="TextBox 30"/>
+          <p:cNvSpPr txBox="1"/>
+          <p:nvPr/>
+        </p:nvSpPr>
+        <p:spPr>
+          <a:xfrm>
+            <a:off x="1417320" y="2523744"/>
+            <a:ext cx="713232" cy="457200"/>
+          </a:xfrm>
+          <a:prstGeom prst="rect">
+            <a:avLst/>
+          </a:prstGeom>
+          <a:noFill/>
+        </p:spPr>
+        <p:txBody>
+          <a:bodyPr wrap="square" anchor="ctr" tIns="0" bIns="0" lIns="25400" rIns="25400">
+            <a:spAutoFit/>
+          </a:bodyPr>
+          <a:lstStyle/>
+          <a:p>
+            <a:pPr algn="ctr">
+              <a:spcBef>
+                <a:spcPts val="0"/>
+              </a:spcBef>
+              <a:spcAft>
+                <a:spcPts val="0"/>
+              </a:spcAft>
+            </a:pPr>
+            <a:r>
+              <a:rPr sz="800" b="1">
+                <a:solidFill>
+                  <a:srgbClr val="8A93A1"/>
+                </a:solidFill>
+                <a:latin typeface="Microsoft JhengHei"/>
+              </a:rPr>
+              <a:t>STEP</a:t>
+            </a:r>
+          </a:p>
+          <a:p>
+            <a:pPr algn="ctr">
+              <a:spcBef>
+                <a:spcPts val="0"/>
+              </a:spcBef>
+              <a:spcAft>
+                <a:spcPts val="0"/>
+              </a:spcAft>
+            </a:pPr>
+            <a:r>
+              <a:rPr sz="1600" b="1">
+                <a:solidFill>
+                  <a:srgbClr val="FFFFFF"/>
+                </a:solidFill>
+                <a:latin typeface="Microsoft JhengHei"/>
+              </a:rPr>
+              <a:t>03</a:t>
+            </a:r>
+          </a:p>
+        </p:txBody>
+      </p:sp>
+      <p:sp>
+        <p:nvSpPr>
+          <p:cNvPr id="32" name="TextBox 31"/>
+          <p:cNvSpPr txBox="1"/>
+          <p:nvPr/>
+        </p:nvSpPr>
+        <p:spPr>
+          <a:xfrm>
+            <a:off x="2093976" y="2505456"/>
+            <a:ext cx="274320" cy="457200"/>
+          </a:xfrm>
+          <a:prstGeom prst="rect">
+            <a:avLst/>
+          </a:prstGeom>
+          <a:noFill/>
+        </p:spPr>
+        <p:txBody>
+          <a:bodyPr wrap="square" anchor="ctr" tIns="0" bIns="0" lIns="25400" rIns="25400">
+            <a:spAutoFit/>
+          </a:bodyPr>
+          <a:lstStyle/>
+          <a:p>
+            <a:pPr algn="ctr">
+              <a:spcBef>
+                <a:spcPts val="0"/>
+              </a:spcBef>
+              <a:spcAft>
+                <a:spcPts val="300"/>
+              </a:spcAft>
+            </a:pPr>
+            <a:r>
+              <a:rPr sz="950" b="1">
+                <a:solidFill>
+                  <a:srgbClr val="3E8FD6"/>
+                </a:solidFill>
+                <a:latin typeface="Microsoft JhengHei"/>
+              </a:rPr>
+              <a:t>30%</a:t>
+            </a:r>
+          </a:p>
+        </p:txBody>
+      </p:sp>
+      <p:sp>
+        <p:nvSpPr>
+          <p:cNvPr id="33" name="Rectangle 32"/>
+          <p:cNvSpPr/>
+          <p:nvPr/>
+        </p:nvSpPr>
+        <p:spPr>
+          <a:xfrm>
+            <a:off x="2514600" y="2505456"/>
+            <a:ext cx="2011680" cy="457200"/>
+          </a:xfrm>
+          <a:prstGeom prst="rect">
+            <a:avLst/>
+          </a:prstGeom>
+          <a:solidFill>
+            <a:srgbClr val="C9CFD8"/>
           </a:solidFill>
           <a:ln>
             <a:noFill/>
@@ -3388,20 +7438,62 @@
       </p:sp>
       <p:sp>
         <p:nvSpPr>
-          <p:cNvPr id="8" name="Rectangle 7"/>
+          <p:cNvPr id="34" name="TextBox 33"/>
+          <p:cNvSpPr txBox="1"/>
+          <p:nvPr/>
+        </p:nvSpPr>
+        <p:spPr>
+          <a:xfrm>
+            <a:off x="2624328" y="2505456"/>
+            <a:ext cx="1828800" cy="457200"/>
+          </a:xfrm>
+          <a:prstGeom prst="rect">
+            <a:avLst/>
+          </a:prstGeom>
+          <a:noFill/>
+        </p:spPr>
+        <p:txBody>
+          <a:bodyPr wrap="square" anchor="ctr" tIns="0" bIns="0" lIns="25400" rIns="25400">
+            <a:spAutoFit/>
+          </a:bodyPr>
+          <a:lstStyle/>
+          <a:p>
+            <a:pPr algn="l">
+              <a:spcBef>
+                <a:spcPts val="0"/>
+              </a:spcBef>
+              <a:spcAft>
+                <a:spcPts val="300"/>
+              </a:spcAft>
+            </a:pPr>
+            <a:r>
+              <a:rPr sz="1250" b="1">
+                <a:solidFill>
+                  <a:srgbClr val="181C22"/>
+                </a:solidFill>
+                <a:latin typeface="Microsoft JhengHei"/>
+              </a:rPr>
+              <a:t>資料文件盤點</a:t>
+            </a:r>
+          </a:p>
+        </p:txBody>
+      </p:sp>
+      <p:sp>
+        <p:nvSpPr>
+          <p:cNvPr id="35" name="Rectangle 34"/>
           <p:cNvSpPr/>
           <p:nvPr/>
         </p:nvSpPr>
         <p:spPr>
           <a:xfrm>
-            <a:off x="411480" y="1143000"/>
-            <a:ext cx="5532120" cy="384048"/>
+            <a:off x="4617720" y="2505456"/>
+            <a:ext cx="5989320" cy="457200"/>
           </a:xfrm>
           <a:prstGeom prst="rect">
             <a:avLst/>
           </a:prstGeom>
           <a:solidFill>
-            <a:srgbClr val="1F6FB2"/>
+            <a:srgbClr val="B2B9C4"/>
           </a:solidFill>
           <a:ln>
             <a:noFill/>
@@ -3432,14 +7524,14 @@
       </p:sp>
       <p:sp>
         <p:nvSpPr>
-          <p:cNvPr id="9" name="TextBox 8"/>
+          <p:cNvPr id="36" name="TextBox 35"/>
           <p:cNvSpPr txBox="1"/>
           <p:nvPr/>
         </p:nvSpPr>
         <p:spPr>
           <a:xfrm>
-            <a:off x="576072" y="1143000"/>
-            <a:ext cx="5257800" cy="384048"/>
+            <a:off x="4754880" y="2505456"/>
+            <a:ext cx="5715000" cy="457200"/>
           </a:xfrm>
           <a:prstGeom prst="rect">
             <a:avLst/>
@@ -3447,7 +7539,7 @@
           <a:noFill/>
         </p:spPr>
         <p:txBody>
-          <a:bodyPr wrap="square" anchor="ctr" tIns="0" bIns="0">
+          <a:bodyPr wrap="square" anchor="ctr" tIns="0" bIns="0" lIns="25400" rIns="25400">
             <a:spAutoFit/>
           </a:bodyPr>
           <a:lstStyle/>
@@ -3461,27 +7553,73 @@
               </a:spcAft>
             </a:pPr>
             <a:r>
-              <a:rPr sz="1400" b="1">
-                <a:solidFill>
-                  <a:srgbClr val="FFFFFF"/>
+              <a:rPr sz="1100" b="0">
+                <a:solidFill>
+                  <a:srgbClr val="181C22"/>
                 </a:solidFill>
                 <a:latin typeface="Microsoft JhengHei"/>
               </a:rPr>
-              <a:t>專案目的</a:t>
-            </a:r>
-          </a:p>
-        </p:txBody>
-      </p:sp>
-      <p:sp>
-        <p:nvSpPr>
-          <p:cNvPr id="10" name="TextBox 9"/>
+              <a:t>盤點歷史進出水量、用水紀錄與既有申報報表等所需資料</a:t>
+            </a:r>
+          </a:p>
+        </p:txBody>
+      </p:sp>
+      <p:sp>
+        <p:nvSpPr>
+          <p:cNvPr id="37" name="Rectangle 36"/>
+          <p:cNvSpPr/>
+          <p:nvPr/>
+        </p:nvSpPr>
+        <p:spPr>
+          <a:xfrm>
+            <a:off x="1417320" y="3026664"/>
+            <a:ext cx="960120" cy="457200"/>
+          </a:xfrm>
+          <a:prstGeom prst="rect">
+            <a:avLst/>
+          </a:prstGeom>
+          <a:solidFill>
+            <a:srgbClr val="1B1F27"/>
+          </a:solidFill>
+          <a:ln w="12700">
+            <a:solidFill>
+              <a:srgbClr val="2A2F39"/>
+            </a:solidFill>
+          </a:ln>
+          <a:effectLst/>
+        </p:spPr>
+        <p:style>
+          <a:lnRef idx="1">
+            <a:schemeClr val="accent1"/>
+          </a:lnRef>
+          <a:fillRef idx="3">
+            <a:schemeClr val="accent1"/>
+          </a:fillRef>
+          <a:effectRef idx="2">
+            <a:schemeClr val="accent1"/>
+          </a:effectRef>
+          <a:fontRef idx="minor">
+            <a:schemeClr val="lt1"/>
+          </a:fontRef>
+        </p:style>
+        <p:txBody>
+          <a:bodyPr rtlCol="0" anchor="ctr"/>
+          <a:lstStyle/>
+          <a:p>
+            <a:pPr algn="ctr"/>
+          </a:p>
+        </p:txBody>
+      </p:sp>
+      <p:sp>
+        <p:nvSpPr>
+          <p:cNvPr id="38" name="TextBox 37"/>
           <p:cNvSpPr txBox="1"/>
           <p:nvPr/>
         </p:nvSpPr>
         <p:spPr>
           <a:xfrm>
-            <a:off x="594360" y="1627632"/>
-            <a:ext cx="5212080" cy="1280160"/>
+            <a:off x="1417320" y="3044952"/>
+            <a:ext cx="713232" cy="457200"/>
           </a:xfrm>
           <a:prstGeom prst="rect">
             <a:avLst/>
@@ -3489,85 +7627,108 @@
           <a:noFill/>
         </p:spPr>
         <p:txBody>
-          <a:bodyPr wrap="square" anchor="t" tIns="0" bIns="0">
+          <a:bodyPr wrap="square" anchor="ctr" tIns="0" bIns="0" lIns="25400" rIns="25400">
             <a:spAutoFit/>
           </a:bodyPr>
           <a:lstStyle/>
           <a:p>
-            <a:pPr algn="l">
+            <a:pPr algn="ctr">
               <a:spcBef>
                 <a:spcPts val="0"/>
               </a:spcBef>
               <a:spcAft>
-                <a:spcPts val="600"/>
+                <a:spcPts val="0"/>
               </a:spcAft>
             </a:pPr>
             <a:r>
-              <a:rPr sz="1250" b="0">
-                <a:solidFill>
-                  <a:srgbClr val="444F5B"/>
+              <a:rPr sz="800" b="1">
+                <a:solidFill>
+                  <a:srgbClr val="8A93A1"/>
                 </a:solidFill>
                 <a:latin typeface="Microsoft JhengHei"/>
               </a:rPr>
-              <a:t>‧ 水平衡計算：彙整進／出水資料，建立可稽核的進出水對照基準。</a:t>
-            </a:r>
-          </a:p>
-          <a:p>
-            <a:pPr algn="l">
+              <a:t>STEP</a:t>
+            </a:r>
+          </a:p>
+          <a:p>
+            <a:pPr algn="ctr">
               <a:spcBef>
                 <a:spcPts val="0"/>
               </a:spcBef>
               <a:spcAft>
-                <a:spcPts val="600"/>
+                <a:spcPts val="0"/>
               </a:spcAft>
             </a:pPr>
             <a:r>
-              <a:rPr sz="1250" b="0">
-                <a:solidFill>
-                  <a:srgbClr val="444F5B"/>
+              <a:rPr sz="1600" b="1">
+                <a:solidFill>
+                  <a:srgbClr val="FFFFFF"/>
                 </a:solidFill>
                 <a:latin typeface="Microsoft JhengHei"/>
               </a:rPr>
-              <a:t>‧ 蒸發量推算：以平衡差值精確反推蒸發量，取代人工估算。</a:t>
-            </a:r>
-          </a:p>
-          <a:p>
-            <a:pPr algn="l">
+              <a:t>04</a:t>
+            </a:r>
+          </a:p>
+        </p:txBody>
+      </p:sp>
+      <p:sp>
+        <p:nvSpPr>
+          <p:cNvPr id="39" name="TextBox 38"/>
+          <p:cNvSpPr txBox="1"/>
+          <p:nvPr/>
+        </p:nvSpPr>
+        <p:spPr>
+          <a:xfrm>
+            <a:off x="2093976" y="3026664"/>
+            <a:ext cx="274320" cy="457200"/>
+          </a:xfrm>
+          <a:prstGeom prst="rect">
+            <a:avLst/>
+          </a:prstGeom>
+          <a:noFill/>
+        </p:spPr>
+        <p:txBody>
+          <a:bodyPr wrap="square" anchor="ctr" tIns="0" bIns="0" lIns="25400" rIns="25400">
+            <a:spAutoFit/>
+          </a:bodyPr>
+          <a:lstStyle/>
+          <a:p>
+            <a:pPr algn="ctr">
               <a:spcBef>
                 <a:spcPts val="0"/>
               </a:spcBef>
               <a:spcAft>
-                <a:spcPts val="600"/>
+                <a:spcPts val="300"/>
               </a:spcAft>
             </a:pPr>
             <a:r>
-              <a:rPr sz="1250" b="0">
-                <a:solidFill>
-                  <a:srgbClr val="444F5B"/>
+              <a:rPr sz="950" b="1">
+                <a:solidFill>
+                  <a:srgbClr val="3E8FD6"/>
                 </a:solidFill>
                 <a:latin typeface="Microsoft JhengHei"/>
               </a:rPr>
-              <a:t>‧ Agent 自動化：代理執行平衡計算並整理後續申報所需資料。</a:t>
-            </a:r>
-          </a:p>
-        </p:txBody>
-      </p:sp>
-      <p:sp>
-        <p:nvSpPr>
-          <p:cNvPr id="11" name="Rectangle 10"/>
+              <a:t>40%</a:t>
+            </a:r>
+          </a:p>
+        </p:txBody>
+      </p:sp>
+      <p:sp>
+        <p:nvSpPr>
+          <p:cNvPr id="40" name="Rectangle 39"/>
           <p:cNvSpPr/>
           <p:nvPr/>
         </p:nvSpPr>
         <p:spPr>
           <a:xfrm>
-            <a:off x="6263640" y="1143000"/>
-            <a:ext cx="5532120" cy="1783080"/>
+            <a:off x="2514600" y="3026664"/>
+            <a:ext cx="2011680" cy="457200"/>
           </a:xfrm>
           <a:prstGeom prst="rect">
             <a:avLst/>
           </a:prstGeom>
           <a:solidFill>
-            <a:srgbClr val="EEF3F8"/>
+            <a:srgbClr val="C9CFD8"/>
           </a:solidFill>
           <a:ln>
             <a:noFill/>
@@ -3598,20 +7759,62 @@
       </p:sp>
       <p:sp>
         <p:nvSpPr>
-          <p:cNvPr id="12" name="Rectangle 11"/>
+          <p:cNvPr id="41" name="TextBox 40"/>
+          <p:cNvSpPr txBox="1"/>
+          <p:nvPr/>
+        </p:nvSpPr>
+        <p:spPr>
+          <a:xfrm>
+            <a:off x="2624328" y="3026664"/>
+            <a:ext cx="1828800" cy="457200"/>
+          </a:xfrm>
+          <a:prstGeom prst="rect">
+            <a:avLst/>
+          </a:prstGeom>
+          <a:noFill/>
+        </p:spPr>
+        <p:txBody>
+          <a:bodyPr wrap="square" anchor="ctr" tIns="0" bIns="0" lIns="25400" rIns="25400">
+            <a:spAutoFit/>
+          </a:bodyPr>
+          <a:lstStyle/>
+          <a:p>
+            <a:pPr algn="l">
+              <a:spcBef>
+                <a:spcPts val="0"/>
+              </a:spcBef>
+              <a:spcAft>
+                <a:spcPts val="300"/>
+              </a:spcAft>
+            </a:pPr>
+            <a:r>
+              <a:rPr sz="1250" b="1">
+                <a:solidFill>
+                  <a:srgbClr val="181C22"/>
+                </a:solidFill>
+                <a:latin typeface="Microsoft JhengHei"/>
+              </a:rPr>
+              <a:t>資料整理 / 清洗</a:t>
+            </a:r>
+          </a:p>
+        </p:txBody>
+      </p:sp>
+      <p:sp>
+        <p:nvSpPr>
+          <p:cNvPr id="42" name="Rectangle 41"/>
           <p:cNvSpPr/>
           <p:nvPr/>
         </p:nvSpPr>
         <p:spPr>
           <a:xfrm>
-            <a:off x="6263640" y="1143000"/>
-            <a:ext cx="5532120" cy="384048"/>
+            <a:off x="4617720" y="3026664"/>
+            <a:ext cx="5989320" cy="457200"/>
           </a:xfrm>
           <a:prstGeom prst="rect">
             <a:avLst/>
           </a:prstGeom>
           <a:solidFill>
-            <a:srgbClr val="129A9A"/>
+            <a:srgbClr val="B2B9C4"/>
           </a:solidFill>
           <a:ln>
             <a:noFill/>
@@ -3642,14 +7845,14 @@
       </p:sp>
       <p:sp>
         <p:nvSpPr>
-          <p:cNvPr id="13" name="TextBox 12"/>
+          <p:cNvPr id="43" name="TextBox 42"/>
           <p:cNvSpPr txBox="1"/>
           <p:nvPr/>
         </p:nvSpPr>
         <p:spPr>
           <a:xfrm>
-            <a:off x="6428232" y="1143000"/>
-            <a:ext cx="5257800" cy="384048"/>
+            <a:off x="4754880" y="3026664"/>
+            <a:ext cx="5715000" cy="457200"/>
           </a:xfrm>
           <a:prstGeom prst="rect">
             <a:avLst/>
@@ -3657,7 +7860,7 @@
           <a:noFill/>
         </p:spPr>
         <p:txBody>
-          <a:bodyPr wrap="square" anchor="ctr" tIns="0" bIns="0">
+          <a:bodyPr wrap="square" anchor="ctr" tIns="0" bIns="0" lIns="25400" rIns="25400">
             <a:spAutoFit/>
           </a:bodyPr>
           <a:lstStyle/>
@@ -3671,33 +7874,182 @@
               </a:spcAft>
             </a:pPr>
             <a:r>
-              <a:rPr sz="1400" b="1">
-                <a:solidFill>
-                  <a:srgbClr val="FFFFFF"/>
+              <a:rPr sz="1100" b="0">
+                <a:solidFill>
+                  <a:srgbClr val="181C22"/>
                 </a:solidFill>
                 <a:latin typeface="Microsoft JhengHei"/>
               </a:rPr>
-              <a:t>專案效益</a:t>
-            </a:r>
-          </a:p>
-        </p:txBody>
-      </p:sp>
-      <p:sp>
-        <p:nvSpPr>
-          <p:cNvPr id="14" name="Rectangle 13"/>
+              <a:t>整理相關資料、去除雜訊、統一欄位格式，建立計算基準</a:t>
+            </a:r>
+          </a:p>
+        </p:txBody>
+      </p:sp>
+      <p:sp>
+        <p:nvSpPr>
+          <p:cNvPr id="44" name="Rectangle 43"/>
           <p:cNvSpPr/>
           <p:nvPr/>
         </p:nvSpPr>
         <p:spPr>
           <a:xfrm>
-            <a:off x="6428232" y="1627632"/>
-            <a:ext cx="91440" cy="548640"/>
+            <a:off x="1417320" y="3547872"/>
+            <a:ext cx="960120" cy="457200"/>
           </a:xfrm>
           <a:prstGeom prst="rect">
             <a:avLst/>
           </a:prstGeom>
           <a:solidFill>
-            <a:srgbClr val="129A9A"/>
+            <a:srgbClr val="1B1F27"/>
+          </a:solidFill>
+          <a:ln w="12700">
+            <a:solidFill>
+              <a:srgbClr val="2A2F39"/>
+            </a:solidFill>
+          </a:ln>
+          <a:effectLst/>
+        </p:spPr>
+        <p:style>
+          <a:lnRef idx="1">
+            <a:schemeClr val="accent1"/>
+          </a:lnRef>
+          <a:fillRef idx="3">
+            <a:schemeClr val="accent1"/>
+          </a:fillRef>
+          <a:effectRef idx="2">
+            <a:schemeClr val="accent1"/>
+          </a:effectRef>
+          <a:fontRef idx="minor">
+            <a:schemeClr val="lt1"/>
+          </a:fontRef>
+        </p:style>
+        <p:txBody>
+          <a:bodyPr rtlCol="0" anchor="ctr"/>
+          <a:lstStyle/>
+          <a:p>
+            <a:pPr algn="ctr"/>
+          </a:p>
+        </p:txBody>
+      </p:sp>
+      <p:sp>
+        <p:nvSpPr>
+          <p:cNvPr id="45" name="TextBox 44"/>
+          <p:cNvSpPr txBox="1"/>
+          <p:nvPr/>
+        </p:nvSpPr>
+        <p:spPr>
+          <a:xfrm>
+            <a:off x="1417320" y="3566160"/>
+            <a:ext cx="713232" cy="457200"/>
+          </a:xfrm>
+          <a:prstGeom prst="rect">
+            <a:avLst/>
+          </a:prstGeom>
+          <a:noFill/>
+        </p:spPr>
+        <p:txBody>
+          <a:bodyPr wrap="square" anchor="ctr" tIns="0" bIns="0" lIns="25400" rIns="25400">
+            <a:spAutoFit/>
+          </a:bodyPr>
+          <a:lstStyle/>
+          <a:p>
+            <a:pPr algn="ctr">
+              <a:spcBef>
+                <a:spcPts val="0"/>
+              </a:spcBef>
+              <a:spcAft>
+                <a:spcPts val="0"/>
+              </a:spcAft>
+            </a:pPr>
+            <a:r>
+              <a:rPr sz="800" b="1">
+                <a:solidFill>
+                  <a:srgbClr val="8A93A1"/>
+                </a:solidFill>
+                <a:latin typeface="Microsoft JhengHei"/>
+              </a:rPr>
+              <a:t>STEP</a:t>
+            </a:r>
+          </a:p>
+          <a:p>
+            <a:pPr algn="ctr">
+              <a:spcBef>
+                <a:spcPts val="0"/>
+              </a:spcBef>
+              <a:spcAft>
+                <a:spcPts val="0"/>
+              </a:spcAft>
+            </a:pPr>
+            <a:r>
+              <a:rPr sz="1600" b="1">
+                <a:solidFill>
+                  <a:srgbClr val="FFFFFF"/>
+                </a:solidFill>
+                <a:latin typeface="Microsoft JhengHei"/>
+              </a:rPr>
+              <a:t>05</a:t>
+            </a:r>
+          </a:p>
+        </p:txBody>
+      </p:sp>
+      <p:sp>
+        <p:nvSpPr>
+          <p:cNvPr id="46" name="TextBox 45"/>
+          <p:cNvSpPr txBox="1"/>
+          <p:nvPr/>
+        </p:nvSpPr>
+        <p:spPr>
+          <a:xfrm>
+            <a:off x="2093976" y="3547872"/>
+            <a:ext cx="274320" cy="457200"/>
+          </a:xfrm>
+          <a:prstGeom prst="rect">
+            <a:avLst/>
+          </a:prstGeom>
+          <a:noFill/>
+        </p:spPr>
+        <p:txBody>
+          <a:bodyPr wrap="square" anchor="ctr" tIns="0" bIns="0" lIns="25400" rIns="25400">
+            <a:spAutoFit/>
+          </a:bodyPr>
+          <a:lstStyle/>
+          <a:p>
+            <a:pPr algn="ctr">
+              <a:spcBef>
+                <a:spcPts val="0"/>
+              </a:spcBef>
+              <a:spcAft>
+                <a:spcPts val="300"/>
+              </a:spcAft>
+            </a:pPr>
+            <a:r>
+              <a:rPr sz="950" b="1">
+                <a:solidFill>
+                  <a:srgbClr val="3E8FD6"/>
+                </a:solidFill>
+                <a:latin typeface="Microsoft JhengHei"/>
+              </a:rPr>
+              <a:t>50%</a:t>
+            </a:r>
+          </a:p>
+        </p:txBody>
+      </p:sp>
+      <p:sp>
+        <p:nvSpPr>
+          <p:cNvPr id="47" name="Rectangle 46"/>
+          <p:cNvSpPr/>
+          <p:nvPr/>
+        </p:nvSpPr>
+        <p:spPr>
+          <a:xfrm>
+            <a:off x="2514600" y="3547872"/>
+            <a:ext cx="2011680" cy="457200"/>
+          </a:xfrm>
+          <a:prstGeom prst="rect">
+            <a:avLst/>
+          </a:prstGeom>
+          <a:solidFill>
+            <a:srgbClr val="C9CFD8"/>
           </a:solidFill>
           <a:ln>
             <a:noFill/>
@@ -3728,14 +8080,14 @@
       </p:sp>
       <p:sp>
         <p:nvSpPr>
-          <p:cNvPr id="15" name="TextBox 14"/>
+          <p:cNvPr id="48" name="TextBox 47"/>
           <p:cNvSpPr txBox="1"/>
           <p:nvPr/>
         </p:nvSpPr>
         <p:spPr>
           <a:xfrm>
-            <a:off x="6611112" y="1627632"/>
-            <a:ext cx="2468880" cy="548640"/>
+            <a:off x="2624328" y="3547872"/>
+            <a:ext cx="1828800" cy="457200"/>
           </a:xfrm>
           <a:prstGeom prst="rect">
             <a:avLst/>
@@ -3743,7 +8095,7 @@
           <a:noFill/>
         </p:spPr>
         <p:txBody>
-          <a:bodyPr wrap="square" anchor="ctr" tIns="0" bIns="0">
+          <a:bodyPr wrap="square" anchor="ctr" tIns="0" bIns="0" lIns="25400" rIns="25400">
             <a:spAutoFit/>
           </a:bodyPr>
           <a:lstStyle/>
@@ -3753,56 +8105,37 @@
                 <a:spcPts val="0"/>
               </a:spcBef>
               <a:spcAft>
-                <a:spcPts val="100"/>
+                <a:spcPts val="300"/>
               </a:spcAft>
             </a:pPr>
             <a:r>
-              <a:rPr sz="1300" b="1">
-                <a:solidFill>
-                  <a:srgbClr val="0F2A4A"/>
+              <a:rPr sz="1250" b="1">
+                <a:solidFill>
+                  <a:srgbClr val="181C22"/>
                 </a:solidFill>
                 <a:latin typeface="Microsoft JhengHei"/>
               </a:rPr>
-              <a:t>自動化</a:t>
-            </a:r>
-          </a:p>
-          <a:p>
-            <a:pPr algn="l">
-              <a:spcBef>
-                <a:spcPts val="0"/>
-              </a:spcBef>
-              <a:spcAft>
-                <a:spcPts val="100"/>
-              </a:spcAft>
-            </a:pPr>
-            <a:r>
-              <a:rPr sz="1050" b="0">
-                <a:solidFill>
-                  <a:srgbClr val="444F5B"/>
-                </a:solidFill>
-                <a:latin typeface="Microsoft JhengHei"/>
-              </a:rPr>
-              <a:t>減少人工試算與資料搬運</a:t>
-            </a:r>
-          </a:p>
-        </p:txBody>
-      </p:sp>
-      <p:sp>
-        <p:nvSpPr>
-          <p:cNvPr id="16" name="Rectangle 15"/>
+              <a:t>結構化分類 / 屬性</a:t>
+            </a:r>
+          </a:p>
+        </p:txBody>
+      </p:sp>
+      <p:sp>
+        <p:nvSpPr>
+          <p:cNvPr id="49" name="Rectangle 48"/>
           <p:cNvSpPr/>
           <p:nvPr/>
         </p:nvSpPr>
         <p:spPr>
           <a:xfrm>
-            <a:off x="9125712" y="1627632"/>
-            <a:ext cx="91440" cy="548640"/>
+            <a:off x="4617720" y="3547872"/>
+            <a:ext cx="5989320" cy="457200"/>
           </a:xfrm>
           <a:prstGeom prst="rect">
             <a:avLst/>
           </a:prstGeom>
           <a:solidFill>
-            <a:srgbClr val="1F6FB2"/>
+            <a:srgbClr val="B2B9C4"/>
           </a:solidFill>
           <a:ln>
             <a:noFill/>
@@ -3833,14 +8166,14 @@
       </p:sp>
       <p:sp>
         <p:nvSpPr>
-          <p:cNvPr id="17" name="TextBox 16"/>
+          <p:cNvPr id="50" name="TextBox 49"/>
           <p:cNvSpPr txBox="1"/>
           <p:nvPr/>
         </p:nvSpPr>
         <p:spPr>
           <a:xfrm>
-            <a:off x="9308592" y="1627632"/>
-            <a:ext cx="2468880" cy="548640"/>
+            <a:off x="4754880" y="3547872"/>
+            <a:ext cx="5715000" cy="457200"/>
           </a:xfrm>
           <a:prstGeom prst="rect">
             <a:avLst/>
@@ -3848,7 +8181,7 @@
           <a:noFill/>
         </p:spPr>
         <p:txBody>
-          <a:bodyPr wrap="square" anchor="ctr" tIns="0" bIns="0">
+          <a:bodyPr wrap="square" anchor="ctr" tIns="0" bIns="0" lIns="25400" rIns="25400">
             <a:spAutoFit/>
           </a:bodyPr>
           <a:lstStyle/>
@@ -3858,56 +8191,37 @@
                 <a:spcPts val="0"/>
               </a:spcBef>
               <a:spcAft>
-                <a:spcPts val="100"/>
+                <a:spcPts val="300"/>
               </a:spcAft>
             </a:pPr>
             <a:r>
-              <a:rPr sz="1300" b="1">
-                <a:solidFill>
-                  <a:srgbClr val="0F2A4A"/>
+              <a:rPr sz="1100" b="0">
+                <a:solidFill>
+                  <a:srgbClr val="181C22"/>
                 </a:solidFill>
                 <a:latin typeface="Microsoft JhengHei"/>
               </a:rPr>
-              <a:t>準確性</a:t>
-            </a:r>
-          </a:p>
-          <a:p>
-            <a:pPr algn="l">
-              <a:spcBef>
-                <a:spcPts val="0"/>
-              </a:spcBef>
-              <a:spcAft>
-                <a:spcPts val="100"/>
-              </a:spcAft>
-            </a:pPr>
-            <a:r>
-              <a:rPr sz="1050" b="0">
-                <a:solidFill>
-                  <a:srgbClr val="444F5B"/>
-                </a:solidFill>
-                <a:latin typeface="Microsoft JhengHei"/>
-              </a:rPr>
-              <a:t>統一邏輯、結果可重現可稽核</a:t>
-            </a:r>
-          </a:p>
-        </p:txBody>
-      </p:sp>
-      <p:sp>
-        <p:nvSpPr>
-          <p:cNvPr id="18" name="Rectangle 17"/>
+              <a:t>建立水量項目分類與屬性標籤，設定計算與檢索邊界</a:t>
+            </a:r>
+          </a:p>
+        </p:txBody>
+      </p:sp>
+      <p:sp>
+        <p:nvSpPr>
+          <p:cNvPr id="51" name="Rectangle 50"/>
           <p:cNvSpPr/>
           <p:nvPr/>
         </p:nvSpPr>
         <p:spPr>
           <a:xfrm>
-            <a:off x="6428232" y="2286000"/>
-            <a:ext cx="91440" cy="548640"/>
+            <a:off x="10744200" y="2505456"/>
+            <a:ext cx="38100" cy="1499616"/>
           </a:xfrm>
           <a:prstGeom prst="rect">
             <a:avLst/>
           </a:prstGeom>
           <a:solidFill>
-            <a:srgbClr val="E09F2A"/>
+            <a:srgbClr val="3E8FD6"/>
           </a:solidFill>
           <a:ln>
             <a:noFill/>
@@ -3938,81 +8252,20 @@
       </p:sp>
       <p:sp>
         <p:nvSpPr>
-          <p:cNvPr id="19" name="TextBox 18"/>
-          <p:cNvSpPr txBox="1"/>
-          <p:nvPr/>
-        </p:nvSpPr>
-        <p:spPr>
-          <a:xfrm>
-            <a:off x="6611112" y="2286000"/>
-            <a:ext cx="2468880" cy="548640"/>
-          </a:xfrm>
-          <a:prstGeom prst="rect">
-            <a:avLst/>
-          </a:prstGeom>
-          <a:noFill/>
-        </p:spPr>
-        <p:txBody>
-          <a:bodyPr wrap="square" anchor="ctr" tIns="0" bIns="0">
-            <a:spAutoFit/>
-          </a:bodyPr>
-          <a:lstStyle/>
-          <a:p>
-            <a:pPr algn="l">
-              <a:spcBef>
-                <a:spcPts val="0"/>
-              </a:spcBef>
-              <a:spcAft>
-                <a:spcPts val="100"/>
-              </a:spcAft>
-            </a:pPr>
-            <a:r>
-              <a:rPr sz="1300" b="1">
-                <a:solidFill>
-                  <a:srgbClr val="0F2A4A"/>
-                </a:solidFill>
-                <a:latin typeface="Microsoft JhengHei"/>
-              </a:rPr>
-              <a:t>效率提升</a:t>
-            </a:r>
-          </a:p>
-          <a:p>
-            <a:pPr algn="l">
-              <a:spcBef>
-                <a:spcPts val="0"/>
-              </a:spcBef>
-              <a:spcAft>
-                <a:spcPts val="100"/>
-              </a:spcAft>
-            </a:pPr>
-            <a:r>
-              <a:rPr sz="1050" b="0">
-                <a:solidFill>
-                  <a:srgbClr val="444F5B"/>
-                </a:solidFill>
-                <a:latin typeface="Microsoft JhengHei"/>
-              </a:rPr>
-              <a:t>申報資料自動彙整成型</a:t>
-            </a:r>
-          </a:p>
-        </p:txBody>
-      </p:sp>
-      <p:sp>
-        <p:nvSpPr>
-          <p:cNvPr id="20" name="Rectangle 19"/>
+          <p:cNvPr id="52" name="Rectangle 51"/>
           <p:cNvSpPr/>
           <p:nvPr/>
         </p:nvSpPr>
         <p:spPr>
           <a:xfrm>
-            <a:off x="9125712" y="2286000"/>
-            <a:ext cx="91440" cy="548640"/>
+            <a:off x="457200" y="4114800"/>
+            <a:ext cx="868680" cy="978408"/>
           </a:xfrm>
           <a:prstGeom prst="rect">
             <a:avLst/>
           </a:prstGeom>
           <a:solidFill>
-            <a:srgbClr val="0F2A4A"/>
+            <a:srgbClr val="2A2F39"/>
           </a:solidFill>
           <a:ln>
             <a:noFill/>
@@ -4043,81 +8296,20 @@
       </p:sp>
       <p:sp>
         <p:nvSpPr>
-          <p:cNvPr id="21" name="TextBox 20"/>
-          <p:cNvSpPr txBox="1"/>
-          <p:nvPr/>
-        </p:nvSpPr>
-        <p:spPr>
-          <a:xfrm>
-            <a:off x="9308592" y="2286000"/>
-            <a:ext cx="2468880" cy="548640"/>
-          </a:xfrm>
-          <a:prstGeom prst="rect">
-            <a:avLst/>
-          </a:prstGeom>
-          <a:noFill/>
-        </p:spPr>
-        <p:txBody>
-          <a:bodyPr wrap="square" anchor="ctr" tIns="0" bIns="0">
-            <a:spAutoFit/>
-          </a:bodyPr>
-          <a:lstStyle/>
-          <a:p>
-            <a:pPr algn="l">
-              <a:spcBef>
-                <a:spcPts val="0"/>
-              </a:spcBef>
-              <a:spcAft>
-                <a:spcPts val="100"/>
-              </a:spcAft>
-            </a:pPr>
-            <a:r>
-              <a:rPr sz="1300" b="1">
-                <a:solidFill>
-                  <a:srgbClr val="0F2A4A"/>
-                </a:solidFill>
-                <a:latin typeface="Microsoft JhengHei"/>
-              </a:rPr>
-              <a:t>可追溯／合規</a:t>
-            </a:r>
-          </a:p>
-          <a:p>
-            <a:pPr algn="l">
-              <a:spcBef>
-                <a:spcPts val="0"/>
-              </a:spcBef>
-              <a:spcAft>
-                <a:spcPts val="100"/>
-              </a:spcAft>
-            </a:pPr>
-            <a:r>
-              <a:rPr sz="1050" b="0">
-                <a:solidFill>
-                  <a:srgbClr val="444F5B"/>
-                </a:solidFill>
-                <a:latin typeface="Microsoft JhengHei"/>
-              </a:rPr>
-              <a:t>保留計算過程滿足申報佐證</a:t>
-            </a:r>
-          </a:p>
-        </p:txBody>
-      </p:sp>
-      <p:sp>
-        <p:nvSpPr>
-          <p:cNvPr id="22" name="Rectangle 21"/>
+          <p:cNvPr id="53" name="Rectangle 52"/>
           <p:cNvSpPr/>
           <p:nvPr/>
         </p:nvSpPr>
         <p:spPr>
           <a:xfrm>
-            <a:off x="411480" y="3108960"/>
-            <a:ext cx="11384280" cy="1234440"/>
+            <a:off x="457200" y="4114800"/>
+            <a:ext cx="63500" cy="978408"/>
           </a:xfrm>
           <a:prstGeom prst="rect">
             <a:avLst/>
           </a:prstGeom>
           <a:solidFill>
-            <a:srgbClr val="EEF3F8"/>
+            <a:srgbClr val="E7B43C"/>
           </a:solidFill>
           <a:ln>
             <a:noFill/>
@@ -4148,20 +8340,230 @@
       </p:sp>
       <p:sp>
         <p:nvSpPr>
-          <p:cNvPr id="23" name="Rectangle 22"/>
+          <p:cNvPr id="54" name="TextBox 53"/>
+          <p:cNvSpPr txBox="1"/>
+          <p:nvPr/>
+        </p:nvSpPr>
+        <p:spPr>
+          <a:xfrm>
+            <a:off x="457200" y="4114800"/>
+            <a:ext cx="868680" cy="978408"/>
+          </a:xfrm>
+          <a:prstGeom prst="rect">
+            <a:avLst/>
+          </a:prstGeom>
+          <a:noFill/>
+        </p:spPr>
+        <p:txBody>
+          <a:bodyPr wrap="square" anchor="ctr" tIns="0" bIns="0" lIns="25400" rIns="25400">
+            <a:spAutoFit/>
+          </a:bodyPr>
+          <a:lstStyle/>
+          <a:p>
+            <a:pPr algn="ctr">
+              <a:spcBef>
+                <a:spcPts val="0"/>
+              </a:spcBef>
+              <a:spcAft>
+                <a:spcPts val="200"/>
+              </a:spcAft>
+            </a:pPr>
+            <a:r>
+              <a:rPr sz="1300" b="1">
+                <a:solidFill>
+                  <a:srgbClr val="FFFFFF"/>
+                </a:solidFill>
+                <a:latin typeface="Microsoft JhengHei"/>
+              </a:rPr>
+              <a:t>計算邏輯與串接</a:t>
+            </a:r>
+          </a:p>
+          <a:p>
+            <a:pPr algn="ctr">
+              <a:spcBef>
+                <a:spcPts val="0"/>
+              </a:spcBef>
+              <a:spcAft>
+                <a:spcPts val="200"/>
+              </a:spcAft>
+            </a:pPr>
+            <a:r>
+              <a:rPr sz="1000" b="1">
+                <a:solidFill>
+                  <a:srgbClr val="E7B43C"/>
+                </a:solidFill>
+                <a:latin typeface="Microsoft JhengHei"/>
+              </a:rPr>
+              <a:t>8 月</a:t>
+            </a:r>
+          </a:p>
+        </p:txBody>
+      </p:sp>
+      <p:sp>
+        <p:nvSpPr>
+          <p:cNvPr id="55" name="Rectangle 54"/>
           <p:cNvSpPr/>
           <p:nvPr/>
         </p:nvSpPr>
         <p:spPr>
           <a:xfrm>
-            <a:off x="411480" y="3108960"/>
-            <a:ext cx="11384280" cy="384048"/>
+            <a:off x="1417320" y="4114800"/>
+            <a:ext cx="960120" cy="457200"/>
           </a:xfrm>
           <a:prstGeom prst="rect">
             <a:avLst/>
           </a:prstGeom>
           <a:solidFill>
-            <a:srgbClr val="0F2A4A"/>
+            <a:srgbClr val="1B1F27"/>
+          </a:solidFill>
+          <a:ln w="12700">
+            <a:solidFill>
+              <a:srgbClr val="2A2F39"/>
+            </a:solidFill>
+          </a:ln>
+          <a:effectLst/>
+        </p:spPr>
+        <p:style>
+          <a:lnRef idx="1">
+            <a:schemeClr val="accent1"/>
+          </a:lnRef>
+          <a:fillRef idx="3">
+            <a:schemeClr val="accent1"/>
+          </a:fillRef>
+          <a:effectRef idx="2">
+            <a:schemeClr val="accent1"/>
+          </a:effectRef>
+          <a:fontRef idx="minor">
+            <a:schemeClr val="lt1"/>
+          </a:fontRef>
+        </p:style>
+        <p:txBody>
+          <a:bodyPr rtlCol="0" anchor="ctr"/>
+          <a:lstStyle/>
+          <a:p>
+            <a:pPr algn="ctr"/>
+          </a:p>
+        </p:txBody>
+      </p:sp>
+      <p:sp>
+        <p:nvSpPr>
+          <p:cNvPr id="56" name="TextBox 55"/>
+          <p:cNvSpPr txBox="1"/>
+          <p:nvPr/>
+        </p:nvSpPr>
+        <p:spPr>
+          <a:xfrm>
+            <a:off x="1417320" y="4133088"/>
+            <a:ext cx="713232" cy="457200"/>
+          </a:xfrm>
+          <a:prstGeom prst="rect">
+            <a:avLst/>
+          </a:prstGeom>
+          <a:noFill/>
+        </p:spPr>
+        <p:txBody>
+          <a:bodyPr wrap="square" anchor="ctr" tIns="0" bIns="0" lIns="25400" rIns="25400">
+            <a:spAutoFit/>
+          </a:bodyPr>
+          <a:lstStyle/>
+          <a:p>
+            <a:pPr algn="ctr">
+              <a:spcBef>
+                <a:spcPts val="0"/>
+              </a:spcBef>
+              <a:spcAft>
+                <a:spcPts val="0"/>
+              </a:spcAft>
+            </a:pPr>
+            <a:r>
+              <a:rPr sz="800" b="1">
+                <a:solidFill>
+                  <a:srgbClr val="8A93A1"/>
+                </a:solidFill>
+                <a:latin typeface="Microsoft JhengHei"/>
+              </a:rPr>
+              <a:t>STEP</a:t>
+            </a:r>
+          </a:p>
+          <a:p>
+            <a:pPr algn="ctr">
+              <a:spcBef>
+                <a:spcPts val="0"/>
+              </a:spcBef>
+              <a:spcAft>
+                <a:spcPts val="0"/>
+              </a:spcAft>
+            </a:pPr>
+            <a:r>
+              <a:rPr sz="1600" b="1">
+                <a:solidFill>
+                  <a:srgbClr val="FFFFFF"/>
+                </a:solidFill>
+                <a:latin typeface="Microsoft JhengHei"/>
+              </a:rPr>
+              <a:t>06</a:t>
+            </a:r>
+          </a:p>
+        </p:txBody>
+      </p:sp>
+      <p:sp>
+        <p:nvSpPr>
+          <p:cNvPr id="57" name="TextBox 56"/>
+          <p:cNvSpPr txBox="1"/>
+          <p:nvPr/>
+        </p:nvSpPr>
+        <p:spPr>
+          <a:xfrm>
+            <a:off x="2093976" y="4114800"/>
+            <a:ext cx="274320" cy="457200"/>
+          </a:xfrm>
+          <a:prstGeom prst="rect">
+            <a:avLst/>
+          </a:prstGeom>
+          <a:noFill/>
+        </p:spPr>
+        <p:txBody>
+          <a:bodyPr wrap="square" anchor="ctr" tIns="0" bIns="0" lIns="25400" rIns="25400">
+            <a:spAutoFit/>
+          </a:bodyPr>
+          <a:lstStyle/>
+          <a:p>
+            <a:pPr algn="ctr">
+              <a:spcBef>
+                <a:spcPts val="0"/>
+              </a:spcBef>
+              <a:spcAft>
+                <a:spcPts val="300"/>
+              </a:spcAft>
+            </a:pPr>
+            <a:r>
+              <a:rPr sz="950" b="1">
+                <a:solidFill>
+                  <a:srgbClr val="E7B43C"/>
+                </a:solidFill>
+                <a:latin typeface="Microsoft JhengHei"/>
+              </a:rPr>
+              <a:t>60%</a:t>
+            </a:r>
+          </a:p>
+        </p:txBody>
+      </p:sp>
+      <p:sp>
+        <p:nvSpPr>
+          <p:cNvPr id="58" name="Rectangle 57"/>
+          <p:cNvSpPr/>
+          <p:nvPr/>
+        </p:nvSpPr>
+        <p:spPr>
+          <a:xfrm>
+            <a:off x="2514600" y="4114800"/>
+            <a:ext cx="2011680" cy="457200"/>
+          </a:xfrm>
+          <a:prstGeom prst="rect">
+            <a:avLst/>
+          </a:prstGeom>
+          <a:solidFill>
+            <a:srgbClr val="C9CFD8"/>
           </a:solidFill>
           <a:ln>
             <a:noFill/>
@@ -4192,14 +8594,14 @@
       </p:sp>
       <p:sp>
         <p:nvSpPr>
-          <p:cNvPr id="24" name="TextBox 23"/>
+          <p:cNvPr id="59" name="TextBox 58"/>
           <p:cNvSpPr txBox="1"/>
           <p:nvPr/>
         </p:nvSpPr>
         <p:spPr>
           <a:xfrm>
-            <a:off x="576072" y="3108960"/>
-            <a:ext cx="11109960" cy="384048"/>
+            <a:off x="2624328" y="4114800"/>
+            <a:ext cx="1828800" cy="457200"/>
           </a:xfrm>
           <a:prstGeom prst="rect">
             <a:avLst/>
@@ -4207,7 +8609,7 @@
           <a:noFill/>
         </p:spPr>
         <p:txBody>
-          <a:bodyPr wrap="square" anchor="ctr" tIns="0" bIns="0">
+          <a:bodyPr wrap="square" anchor="ctr" tIns="0" bIns="0" lIns="25400" rIns="25400">
             <a:spAutoFit/>
           </a:bodyPr>
           <a:lstStyle/>
@@ -4221,33 +8623,33 @@
               </a:spcAft>
             </a:pPr>
             <a:r>
-              <a:rPr sz="1400" b="1">
-                <a:solidFill>
-                  <a:srgbClr val="FFFFFF"/>
+              <a:rPr sz="1250" b="1">
+                <a:solidFill>
+                  <a:srgbClr val="181C22"/>
                 </a:solidFill>
                 <a:latin typeface="Microsoft JhengHei"/>
               </a:rPr>
-              <a:t>當前進度</a:t>
-            </a:r>
-          </a:p>
-        </p:txBody>
-      </p:sp>
-      <p:sp>
-        <p:nvSpPr>
-          <p:cNvPr id="25" name="Rectangle 24"/>
+              <a:t>計算邏輯 / Prompt 調校</a:t>
+            </a:r>
+          </a:p>
+        </p:txBody>
+      </p:sp>
+      <p:sp>
+        <p:nvSpPr>
+          <p:cNvPr id="60" name="Rectangle 59"/>
           <p:cNvSpPr/>
           <p:nvPr/>
         </p:nvSpPr>
         <p:spPr>
           <a:xfrm>
-            <a:off x="594360" y="3611880"/>
-            <a:ext cx="5486400" cy="201168"/>
+            <a:off x="4617720" y="4114800"/>
+            <a:ext cx="5989320" cy="457200"/>
           </a:xfrm>
           <a:prstGeom prst="rect">
             <a:avLst/>
           </a:prstGeom>
           <a:solidFill>
-            <a:srgbClr val="DDE5EE"/>
+            <a:srgbClr val="B2B9C4"/>
           </a:solidFill>
           <a:ln>
             <a:noFill/>
@@ -4278,20 +8680,211 @@
       </p:sp>
       <p:sp>
         <p:nvSpPr>
-          <p:cNvPr id="26" name="Rectangle 25"/>
+          <p:cNvPr id="61" name="TextBox 60"/>
+          <p:cNvSpPr txBox="1"/>
+          <p:nvPr/>
+        </p:nvSpPr>
+        <p:spPr>
+          <a:xfrm>
+            <a:off x="4754880" y="4114800"/>
+            <a:ext cx="5715000" cy="457200"/>
+          </a:xfrm>
+          <a:prstGeom prst="rect">
+            <a:avLst/>
+          </a:prstGeom>
+          <a:noFill/>
+        </p:spPr>
+        <p:txBody>
+          <a:bodyPr wrap="square" anchor="ctr" tIns="0" bIns="0" lIns="25400" rIns="25400">
+            <a:spAutoFit/>
+          </a:bodyPr>
+          <a:lstStyle/>
+          <a:p>
+            <a:pPr algn="l">
+              <a:spcBef>
+                <a:spcPts val="0"/>
+              </a:spcBef>
+              <a:spcAft>
+                <a:spcPts val="300"/>
+              </a:spcAft>
+            </a:pPr>
+            <a:r>
+              <a:rPr sz="1100" b="0">
+                <a:solidFill>
+                  <a:srgbClr val="181C22"/>
+                </a:solidFill>
+                <a:latin typeface="Microsoft JhengHei"/>
+              </a:rPr>
+              <a:t>定義平衡計算公式與蒸發量推算邏輯，反覆調校降低判讀錯誤</a:t>
+            </a:r>
+          </a:p>
+        </p:txBody>
+      </p:sp>
+      <p:sp>
+        <p:nvSpPr>
+          <p:cNvPr id="62" name="Rectangle 61"/>
           <p:cNvSpPr/>
           <p:nvPr/>
         </p:nvSpPr>
         <p:spPr>
           <a:xfrm>
-            <a:off x="594360" y="3611880"/>
-            <a:ext cx="1371600" cy="201168"/>
+            <a:off x="1417320" y="4636008"/>
+            <a:ext cx="960120" cy="457200"/>
           </a:xfrm>
           <a:prstGeom prst="rect">
             <a:avLst/>
           </a:prstGeom>
           <a:solidFill>
-            <a:srgbClr val="129A9A"/>
+            <a:srgbClr val="1B1F27"/>
+          </a:solidFill>
+          <a:ln w="12700">
+            <a:solidFill>
+              <a:srgbClr val="2A2F39"/>
+            </a:solidFill>
+          </a:ln>
+          <a:effectLst/>
+        </p:spPr>
+        <p:style>
+          <a:lnRef idx="1">
+            <a:schemeClr val="accent1"/>
+          </a:lnRef>
+          <a:fillRef idx="3">
+            <a:schemeClr val="accent1"/>
+          </a:fillRef>
+          <a:effectRef idx="2">
+            <a:schemeClr val="accent1"/>
+          </a:effectRef>
+          <a:fontRef idx="minor">
+            <a:schemeClr val="lt1"/>
+          </a:fontRef>
+        </p:style>
+        <p:txBody>
+          <a:bodyPr rtlCol="0" anchor="ctr"/>
+          <a:lstStyle/>
+          <a:p>
+            <a:pPr algn="ctr"/>
+          </a:p>
+        </p:txBody>
+      </p:sp>
+      <p:sp>
+        <p:nvSpPr>
+          <p:cNvPr id="63" name="TextBox 62"/>
+          <p:cNvSpPr txBox="1"/>
+          <p:nvPr/>
+        </p:nvSpPr>
+        <p:spPr>
+          <a:xfrm>
+            <a:off x="1417320" y="4654296"/>
+            <a:ext cx="713232" cy="457200"/>
+          </a:xfrm>
+          <a:prstGeom prst="rect">
+            <a:avLst/>
+          </a:prstGeom>
+          <a:noFill/>
+        </p:spPr>
+        <p:txBody>
+          <a:bodyPr wrap="square" anchor="ctr" tIns="0" bIns="0" lIns="25400" rIns="25400">
+            <a:spAutoFit/>
+          </a:bodyPr>
+          <a:lstStyle/>
+          <a:p>
+            <a:pPr algn="ctr">
+              <a:spcBef>
+                <a:spcPts val="0"/>
+              </a:spcBef>
+              <a:spcAft>
+                <a:spcPts val="0"/>
+              </a:spcAft>
+            </a:pPr>
+            <a:r>
+              <a:rPr sz="800" b="1">
+                <a:solidFill>
+                  <a:srgbClr val="8A93A1"/>
+                </a:solidFill>
+                <a:latin typeface="Microsoft JhengHei"/>
+              </a:rPr>
+              <a:t>STEP</a:t>
+            </a:r>
+          </a:p>
+          <a:p>
+            <a:pPr algn="ctr">
+              <a:spcBef>
+                <a:spcPts val="0"/>
+              </a:spcBef>
+              <a:spcAft>
+                <a:spcPts val="0"/>
+              </a:spcAft>
+            </a:pPr>
+            <a:r>
+              <a:rPr sz="1600" b="1">
+                <a:solidFill>
+                  <a:srgbClr val="FFFFFF"/>
+                </a:solidFill>
+                <a:latin typeface="Microsoft JhengHei"/>
+              </a:rPr>
+              <a:t>07</a:t>
+            </a:r>
+          </a:p>
+        </p:txBody>
+      </p:sp>
+      <p:sp>
+        <p:nvSpPr>
+          <p:cNvPr id="64" name="TextBox 63"/>
+          <p:cNvSpPr txBox="1"/>
+          <p:nvPr/>
+        </p:nvSpPr>
+        <p:spPr>
+          <a:xfrm>
+            <a:off x="2093976" y="4636008"/>
+            <a:ext cx="274320" cy="457200"/>
+          </a:xfrm>
+          <a:prstGeom prst="rect">
+            <a:avLst/>
+          </a:prstGeom>
+          <a:noFill/>
+        </p:spPr>
+        <p:txBody>
+          <a:bodyPr wrap="square" anchor="ctr" tIns="0" bIns="0" lIns="25400" rIns="25400">
+            <a:spAutoFit/>
+          </a:bodyPr>
+          <a:lstStyle/>
+          <a:p>
+            <a:pPr algn="ctr">
+              <a:spcBef>
+                <a:spcPts val="0"/>
+              </a:spcBef>
+              <a:spcAft>
+                <a:spcPts val="300"/>
+              </a:spcAft>
+            </a:pPr>
+            <a:r>
+              <a:rPr sz="950" b="1">
+                <a:solidFill>
+                  <a:srgbClr val="E7B43C"/>
+                </a:solidFill>
+                <a:latin typeface="Microsoft JhengHei"/>
+              </a:rPr>
+              <a:t>70%</a:t>
+            </a:r>
+          </a:p>
+        </p:txBody>
+      </p:sp>
+      <p:sp>
+        <p:nvSpPr>
+          <p:cNvPr id="65" name="Rectangle 64"/>
+          <p:cNvSpPr/>
+          <p:nvPr/>
+        </p:nvSpPr>
+        <p:spPr>
+          <a:xfrm>
+            <a:off x="2514600" y="4636008"/>
+            <a:ext cx="2011680" cy="457200"/>
+          </a:xfrm>
+          <a:prstGeom prst="rect">
+            <a:avLst/>
+          </a:prstGeom>
+          <a:solidFill>
+            <a:srgbClr val="C9CFD8"/>
           </a:solidFill>
           <a:ln>
             <a:noFill/>
@@ -4322,14 +8915,14 @@
       </p:sp>
       <p:sp>
         <p:nvSpPr>
-          <p:cNvPr id="27" name="TextBox 26"/>
+          <p:cNvPr id="66" name="TextBox 65"/>
           <p:cNvSpPr txBox="1"/>
           <p:nvPr/>
         </p:nvSpPr>
         <p:spPr>
           <a:xfrm>
-            <a:off x="6217920" y="3566160"/>
-            <a:ext cx="1097280" cy="292608"/>
+            <a:off x="2624328" y="4636008"/>
+            <a:ext cx="1828800" cy="457200"/>
           </a:xfrm>
           <a:prstGeom prst="rect">
             <a:avLst/>
@@ -4337,7 +8930,7 @@
           <a:noFill/>
         </p:spPr>
         <p:txBody>
-          <a:bodyPr wrap="square" anchor="ctr" tIns="0" bIns="0">
+          <a:bodyPr wrap="square" anchor="ctr" tIns="0" bIns="0" lIns="25400" rIns="25400">
             <a:spAutoFit/>
           </a:bodyPr>
           <a:lstStyle/>
@@ -4351,94 +8944,33 @@
               </a:spcAft>
             </a:pPr>
             <a:r>
-              <a:rPr sz="1200" b="1">
-                <a:solidFill>
-                  <a:srgbClr val="129A9A"/>
+              <a:rPr sz="1250" b="1">
+                <a:solidFill>
+                  <a:srgbClr val="181C22"/>
                 </a:solidFill>
                 <a:latin typeface="Microsoft JhengHei"/>
               </a:rPr>
-              <a:t>約 25%</a:t>
-            </a:r>
-          </a:p>
-        </p:txBody>
-      </p:sp>
-      <p:sp>
-        <p:nvSpPr>
-          <p:cNvPr id="28" name="TextBox 27"/>
-          <p:cNvSpPr txBox="1"/>
-          <p:nvPr/>
-        </p:nvSpPr>
-        <p:spPr>
-          <a:xfrm>
-            <a:off x="594360" y="3913632"/>
-            <a:ext cx="10972800" cy="457200"/>
-          </a:xfrm>
-          <a:prstGeom prst="rect">
-            <a:avLst/>
-          </a:prstGeom>
-          <a:noFill/>
-        </p:spPr>
-        <p:txBody>
-          <a:bodyPr wrap="square" anchor="t" tIns="0" bIns="0">
-            <a:spAutoFit/>
-          </a:bodyPr>
-          <a:lstStyle/>
-          <a:p>
-            <a:pPr algn="l">
-              <a:spcBef>
-                <a:spcPts val="0"/>
-              </a:spcBef>
-              <a:spcAft>
-                <a:spcPts val="400"/>
-              </a:spcAft>
-            </a:pPr>
-            <a:r>
-              <a:rPr sz="1250" b="0">
-                <a:solidFill>
-                  <a:srgbClr val="444F5B"/>
-                </a:solidFill>
-                <a:latin typeface="Microsoft JhengHei"/>
-              </a:rPr>
-              <a:t>‧ AS-IS / TO-BE 流程圖整理（進行中）　　‧ 過往相關資料盤點與蒐集（進行中）</a:t>
-            </a:r>
-          </a:p>
-          <a:p>
-            <a:pPr algn="l">
-              <a:spcBef>
-                <a:spcPts val="0"/>
-              </a:spcBef>
-              <a:spcAft>
-                <a:spcPts val="400"/>
-              </a:spcAft>
-            </a:pPr>
-            <a:r>
-              <a:rPr sz="1250" b="0">
-                <a:solidFill>
-                  <a:srgbClr val="444F5B"/>
-                </a:solidFill>
-                <a:latin typeface="Microsoft JhengHei"/>
-              </a:rPr>
-              <a:t>‧ 近期重點：凍結第一版需求範圍、確認申報欄位與 Agent 計算邏輯規格</a:t>
-            </a:r>
-          </a:p>
-        </p:txBody>
-      </p:sp>
-      <p:sp>
-        <p:nvSpPr>
-          <p:cNvPr id="29" name="Rectangle 28"/>
+              <a:t>跨系統串接測試</a:t>
+            </a:r>
+          </a:p>
+        </p:txBody>
+      </p:sp>
+      <p:sp>
+        <p:nvSpPr>
+          <p:cNvPr id="67" name="Rectangle 66"/>
           <p:cNvSpPr/>
           <p:nvPr/>
         </p:nvSpPr>
         <p:spPr>
           <a:xfrm>
-            <a:off x="411480" y="4526280"/>
-            <a:ext cx="11384280" cy="2148840"/>
+            <a:off x="4617720" y="4636008"/>
+            <a:ext cx="5989320" cy="457200"/>
           </a:xfrm>
           <a:prstGeom prst="rect">
             <a:avLst/>
           </a:prstGeom>
           <a:solidFill>
-            <a:srgbClr val="EEF3F8"/>
+            <a:srgbClr val="B2B9C4"/>
           </a:solidFill>
           <a:ln>
             <a:noFill/>
@@ -4469,20 +9001,62 @@
       </p:sp>
       <p:sp>
         <p:nvSpPr>
-          <p:cNvPr id="30" name="Rectangle 29"/>
+          <p:cNvPr id="68" name="TextBox 67"/>
+          <p:cNvSpPr txBox="1"/>
+          <p:nvPr/>
+        </p:nvSpPr>
+        <p:spPr>
+          <a:xfrm>
+            <a:off x="4754880" y="4636008"/>
+            <a:ext cx="5715000" cy="457200"/>
+          </a:xfrm>
+          <a:prstGeom prst="rect">
+            <a:avLst/>
+          </a:prstGeom>
+          <a:noFill/>
+        </p:spPr>
+        <p:txBody>
+          <a:bodyPr wrap="square" anchor="ctr" tIns="0" bIns="0" lIns="25400" rIns="25400">
+            <a:spAutoFit/>
+          </a:bodyPr>
+          <a:lstStyle/>
+          <a:p>
+            <a:pPr algn="l">
+              <a:spcBef>
+                <a:spcPts val="0"/>
+              </a:spcBef>
+              <a:spcAft>
+                <a:spcPts val="300"/>
+              </a:spcAft>
+            </a:pPr>
+            <a:r>
+              <a:rPr sz="1100" b="0">
+                <a:solidFill>
+                  <a:srgbClr val="181C22"/>
+                </a:solidFill>
+                <a:latin typeface="Microsoft JhengHei"/>
+              </a:rPr>
+              <a:t>串接資料來源與申報系統，賦予 Agent 取數與輸出的「手腳」</a:t>
+            </a:r>
+          </a:p>
+        </p:txBody>
+      </p:sp>
+      <p:sp>
+        <p:nvSpPr>
+          <p:cNvPr id="69" name="Rectangle 68"/>
           <p:cNvSpPr/>
           <p:nvPr/>
         </p:nvSpPr>
         <p:spPr>
           <a:xfrm>
-            <a:off x="411480" y="4526280"/>
-            <a:ext cx="11384280" cy="384048"/>
+            <a:off x="10744200" y="4114800"/>
+            <a:ext cx="38100" cy="978408"/>
           </a:xfrm>
           <a:prstGeom prst="rect">
             <a:avLst/>
           </a:prstGeom>
           <a:solidFill>
-            <a:srgbClr val="E09F2A"/>
+            <a:srgbClr val="E7B43C"/>
           </a:solidFill>
           <a:ln>
             <a:noFill/>
@@ -4513,14 +9087,102 @@
       </p:sp>
       <p:sp>
         <p:nvSpPr>
-          <p:cNvPr id="31" name="TextBox 30"/>
+          <p:cNvPr id="70" name="Rectangle 69"/>
+          <p:cNvSpPr/>
+          <p:nvPr/>
+        </p:nvSpPr>
+        <p:spPr>
+          <a:xfrm>
+            <a:off x="457200" y="5202936"/>
+            <a:ext cx="868680" cy="1499616"/>
+          </a:xfrm>
+          <a:prstGeom prst="rect">
+            <a:avLst/>
+          </a:prstGeom>
+          <a:solidFill>
+            <a:srgbClr val="2A2F39"/>
+          </a:solidFill>
+          <a:ln>
+            <a:noFill/>
+          </a:ln>
+          <a:effectLst/>
+        </p:spPr>
+        <p:style>
+          <a:lnRef idx="1">
+            <a:schemeClr val="accent1"/>
+          </a:lnRef>
+          <a:fillRef idx="3">
+            <a:schemeClr val="accent1"/>
+          </a:fillRef>
+          <a:effectRef idx="2">
+            <a:schemeClr val="accent1"/>
+          </a:effectRef>
+          <a:fontRef idx="minor">
+            <a:schemeClr val="lt1"/>
+          </a:fontRef>
+        </p:style>
+        <p:txBody>
+          <a:bodyPr rtlCol="0" anchor="ctr"/>
+          <a:lstStyle/>
+          <a:p>
+            <a:pPr algn="ctr"/>
+          </a:p>
+        </p:txBody>
+      </p:sp>
+      <p:sp>
+        <p:nvSpPr>
+          <p:cNvPr id="71" name="Rectangle 70"/>
+          <p:cNvSpPr/>
+          <p:nvPr/>
+        </p:nvSpPr>
+        <p:spPr>
+          <a:xfrm>
+            <a:off x="457200" y="5202936"/>
+            <a:ext cx="63500" cy="1499616"/>
+          </a:xfrm>
+          <a:prstGeom prst="rect">
+            <a:avLst/>
+          </a:prstGeom>
+          <a:solidFill>
+            <a:srgbClr val="4FC17A"/>
+          </a:solidFill>
+          <a:ln>
+            <a:noFill/>
+          </a:ln>
+          <a:effectLst/>
+        </p:spPr>
+        <p:style>
+          <a:lnRef idx="1">
+            <a:schemeClr val="accent1"/>
+          </a:lnRef>
+          <a:fillRef idx="3">
+            <a:schemeClr val="accent1"/>
+          </a:fillRef>
+          <a:effectRef idx="2">
+            <a:schemeClr val="accent1"/>
+          </a:effectRef>
+          <a:fontRef idx="minor">
+            <a:schemeClr val="lt1"/>
+          </a:fontRef>
+        </p:style>
+        <p:txBody>
+          <a:bodyPr rtlCol="0" anchor="ctr"/>
+          <a:lstStyle/>
+          <a:p>
+            <a:pPr algn="ctr"/>
+          </a:p>
+        </p:txBody>
+      </p:sp>
+      <p:sp>
+        <p:nvSpPr>
+          <p:cNvPr id="72" name="TextBox 71"/>
           <p:cNvSpPr txBox="1"/>
           <p:nvPr/>
         </p:nvSpPr>
         <p:spPr>
           <a:xfrm>
-            <a:off x="576072" y="4526280"/>
-            <a:ext cx="11109960" cy="384048"/>
+            <a:off x="457200" y="5202936"/>
+            <a:ext cx="868680" cy="1499616"/>
           </a:xfrm>
           <a:prstGeom prst="rect">
             <a:avLst/>
@@ -4528,12 +9190,180 @@
           <a:noFill/>
         </p:spPr>
         <p:txBody>
-          <a:bodyPr wrap="square" anchor="ctr" tIns="0" bIns="0">
+          <a:bodyPr wrap="square" anchor="ctr" tIns="0" bIns="0" lIns="25400" rIns="25400">
             <a:spAutoFit/>
           </a:bodyPr>
           <a:lstStyle/>
           <a:p>
-            <a:pPr algn="l">
+            <a:pPr algn="ctr">
+              <a:spcBef>
+                <a:spcPts val="0"/>
+              </a:spcBef>
+              <a:spcAft>
+                <a:spcPts val="200"/>
+              </a:spcAft>
+            </a:pPr>
+            <a:r>
+              <a:rPr sz="1300" b="1">
+                <a:solidFill>
+                  <a:srgbClr val="FFFFFF"/>
+                </a:solidFill>
+                <a:latin typeface="Microsoft JhengHei"/>
+              </a:rPr>
+              <a:t>驗證與上線</a:t>
+            </a:r>
+          </a:p>
+          <a:p>
+            <a:pPr algn="ctr">
+              <a:spcBef>
+                <a:spcPts val="0"/>
+              </a:spcBef>
+              <a:spcAft>
+                <a:spcPts val="200"/>
+              </a:spcAft>
+            </a:pPr>
+            <a:r>
+              <a:rPr sz="1000" b="1">
+                <a:solidFill>
+                  <a:srgbClr val="4FC17A"/>
+                </a:solidFill>
+                <a:latin typeface="Microsoft JhengHei"/>
+              </a:rPr>
+              <a:t>9–10 月</a:t>
+            </a:r>
+          </a:p>
+        </p:txBody>
+      </p:sp>
+      <p:sp>
+        <p:nvSpPr>
+          <p:cNvPr id="73" name="Rectangle 72"/>
+          <p:cNvSpPr/>
+          <p:nvPr/>
+        </p:nvSpPr>
+        <p:spPr>
+          <a:xfrm>
+            <a:off x="1417320" y="5202936"/>
+            <a:ext cx="960120" cy="457200"/>
+          </a:xfrm>
+          <a:prstGeom prst="rect">
+            <a:avLst/>
+          </a:prstGeom>
+          <a:solidFill>
+            <a:srgbClr val="1B1F27"/>
+          </a:solidFill>
+          <a:ln w="12700">
+            <a:solidFill>
+              <a:srgbClr val="2A2F39"/>
+            </a:solidFill>
+          </a:ln>
+          <a:effectLst/>
+        </p:spPr>
+        <p:style>
+          <a:lnRef idx="1">
+            <a:schemeClr val="accent1"/>
+          </a:lnRef>
+          <a:fillRef idx="3">
+            <a:schemeClr val="accent1"/>
+          </a:fillRef>
+          <a:effectRef idx="2">
+            <a:schemeClr val="accent1"/>
+          </a:effectRef>
+          <a:fontRef idx="minor">
+            <a:schemeClr val="lt1"/>
+          </a:fontRef>
+        </p:style>
+        <p:txBody>
+          <a:bodyPr rtlCol="0" anchor="ctr"/>
+          <a:lstStyle/>
+          <a:p>
+            <a:pPr algn="ctr"/>
+          </a:p>
+        </p:txBody>
+      </p:sp>
+      <p:sp>
+        <p:nvSpPr>
+          <p:cNvPr id="74" name="TextBox 73"/>
+          <p:cNvSpPr txBox="1"/>
+          <p:nvPr/>
+        </p:nvSpPr>
+        <p:spPr>
+          <a:xfrm>
+            <a:off x="1417320" y="5221224"/>
+            <a:ext cx="713232" cy="457200"/>
+          </a:xfrm>
+          <a:prstGeom prst="rect">
+            <a:avLst/>
+          </a:prstGeom>
+          <a:noFill/>
+        </p:spPr>
+        <p:txBody>
+          <a:bodyPr wrap="square" anchor="ctr" tIns="0" bIns="0" lIns="25400" rIns="25400">
+            <a:spAutoFit/>
+          </a:bodyPr>
+          <a:lstStyle/>
+          <a:p>
+            <a:pPr algn="ctr">
+              <a:spcBef>
+                <a:spcPts val="0"/>
+              </a:spcBef>
+              <a:spcAft>
+                <a:spcPts val="0"/>
+              </a:spcAft>
+            </a:pPr>
+            <a:r>
+              <a:rPr sz="800" b="1">
+                <a:solidFill>
+                  <a:srgbClr val="8A93A1"/>
+                </a:solidFill>
+                <a:latin typeface="Microsoft JhengHei"/>
+              </a:rPr>
+              <a:t>STEP</a:t>
+            </a:r>
+          </a:p>
+          <a:p>
+            <a:pPr algn="ctr">
+              <a:spcBef>
+                <a:spcPts val="0"/>
+              </a:spcBef>
+              <a:spcAft>
+                <a:spcPts val="0"/>
+              </a:spcAft>
+            </a:pPr>
+            <a:r>
+              <a:rPr sz="1600" b="1">
+                <a:solidFill>
+                  <a:srgbClr val="FFFFFF"/>
+                </a:solidFill>
+                <a:latin typeface="Microsoft JhengHei"/>
+              </a:rPr>
+              <a:t>08</a:t>
+            </a:r>
+          </a:p>
+        </p:txBody>
+      </p:sp>
+      <p:sp>
+        <p:nvSpPr>
+          <p:cNvPr id="75" name="TextBox 74"/>
+          <p:cNvSpPr txBox="1"/>
+          <p:nvPr/>
+        </p:nvSpPr>
+        <p:spPr>
+          <a:xfrm>
+            <a:off x="2093976" y="5202936"/>
+            <a:ext cx="274320" cy="457200"/>
+          </a:xfrm>
+          <a:prstGeom prst="rect">
+            <a:avLst/>
+          </a:prstGeom>
+          <a:noFill/>
+        </p:spPr>
+        <p:txBody>
+          <a:bodyPr wrap="square" anchor="ctr" tIns="0" bIns="0" lIns="25400" rIns="25400">
+            <a:spAutoFit/>
+          </a:bodyPr>
+          <a:lstStyle/>
+          <a:p>
+            <a:pPr algn="ctr">
               <a:spcBef>
                 <a:spcPts val="0"/>
               </a:spcBef>
@@ -4542,33 +9372,33 @@
               </a:spcAft>
             </a:pPr>
             <a:r>
-              <a:rPr sz="1400" b="1">
-                <a:solidFill>
-                  <a:srgbClr val="FFFFFF"/>
+              <a:rPr sz="950" b="1">
+                <a:solidFill>
+                  <a:srgbClr val="4FC17A"/>
                 </a:solidFill>
                 <a:latin typeface="Microsoft JhengHei"/>
               </a:rPr>
-              <a:t>專案時間軸 Timeline（6 月 → 10 月上線）</a:t>
-            </a:r>
-          </a:p>
-        </p:txBody>
-      </p:sp>
-      <p:sp>
-        <p:nvSpPr>
-          <p:cNvPr id="32" name="Rectangle 31"/>
+              <a:t>80%</a:t>
+            </a:r>
+          </a:p>
+        </p:txBody>
+      </p:sp>
+      <p:sp>
+        <p:nvSpPr>
+          <p:cNvPr id="76" name="Rectangle 75"/>
           <p:cNvSpPr/>
           <p:nvPr/>
         </p:nvSpPr>
         <p:spPr>
           <a:xfrm>
-            <a:off x="640080" y="5257800"/>
-            <a:ext cx="10927080" cy="38100"/>
+            <a:off x="2514600" y="5202936"/>
+            <a:ext cx="2011680" cy="457200"/>
           </a:xfrm>
           <a:prstGeom prst="rect">
             <a:avLst/>
           </a:prstGeom>
           <a:solidFill>
-            <a:srgbClr val="1F6FB2"/>
+            <a:srgbClr val="C9CFD8"/>
           </a:solidFill>
           <a:ln>
             <a:noFill/>
@@ -4599,25 +9429,65 @@
       </p:sp>
       <p:sp>
         <p:nvSpPr>
-          <p:cNvPr id="33" name="Oval 32"/>
+          <p:cNvPr id="77" name="TextBox 76"/>
+          <p:cNvSpPr txBox="1"/>
+          <p:nvPr/>
+        </p:nvSpPr>
+        <p:spPr>
+          <a:xfrm>
+            <a:off x="2624328" y="5202936"/>
+            <a:ext cx="1828800" cy="457200"/>
+          </a:xfrm>
+          <a:prstGeom prst="rect">
+            <a:avLst/>
+          </a:prstGeom>
+          <a:noFill/>
+        </p:spPr>
+        <p:txBody>
+          <a:bodyPr wrap="square" anchor="ctr" tIns="0" bIns="0" lIns="25400" rIns="25400">
+            <a:spAutoFit/>
+          </a:bodyPr>
+          <a:lstStyle/>
+          <a:p>
+            <a:pPr algn="l">
+              <a:spcBef>
+                <a:spcPts val="0"/>
+              </a:spcBef>
+              <a:spcAft>
+                <a:spcPts val="300"/>
+              </a:spcAft>
+            </a:pPr>
+            <a:r>
+              <a:rPr sz="1250" b="1">
+                <a:solidFill>
+                  <a:srgbClr val="181C22"/>
+                </a:solidFill>
+                <a:latin typeface="Microsoft JhengHei"/>
+              </a:rPr>
+              <a:t>準確性驗證</a:t>
+            </a:r>
+          </a:p>
+        </p:txBody>
+      </p:sp>
+      <p:sp>
+        <p:nvSpPr>
+          <p:cNvPr id="78" name="Rectangle 77"/>
           <p:cNvSpPr/>
           <p:nvPr/>
         </p:nvSpPr>
         <p:spPr>
           <a:xfrm>
-            <a:off x="1623060" y="5175504"/>
-            <a:ext cx="237744" cy="237744"/>
-          </a:xfrm>
-          <a:prstGeom prst="ellipse">
+            <a:off x="4617720" y="5202936"/>
+            <a:ext cx="5989320" cy="457200"/>
+          </a:xfrm>
+          <a:prstGeom prst="rect">
             <a:avLst/>
           </a:prstGeom>
           <a:solidFill>
-            <a:srgbClr val="129A9A"/>
+            <a:srgbClr val="B2B9C4"/>
           </a:solidFill>
-          <a:ln w="19050">
-            <a:solidFill>
-              <a:srgbClr val="FFFFFF"/>
-            </a:solidFill>
+          <a:ln>
+            <a:noFill/>
           </a:ln>
           <a:effectLst/>
         </p:spPr>
@@ -4645,14 +9515,14 @@
       </p:sp>
       <p:sp>
         <p:nvSpPr>
-          <p:cNvPr id="34" name="TextBox 33"/>
+          <p:cNvPr id="79" name="TextBox 78"/>
           <p:cNvSpPr txBox="1"/>
           <p:nvPr/>
         </p:nvSpPr>
         <p:spPr>
           <a:xfrm>
-            <a:off x="640080" y="4956048"/>
-            <a:ext cx="2185416" cy="274320"/>
+            <a:off x="4754880" y="5202936"/>
+            <a:ext cx="5715000" cy="457200"/>
           </a:xfrm>
           <a:prstGeom prst="rect">
             <a:avLst/>
@@ -4660,12 +9530,12 @@
           <a:noFill/>
         </p:spPr>
         <p:txBody>
-          <a:bodyPr wrap="square" anchor="t" tIns="0" bIns="0">
+          <a:bodyPr wrap="square" anchor="ctr" tIns="0" bIns="0" lIns="25400" rIns="25400">
             <a:spAutoFit/>
           </a:bodyPr>
           <a:lstStyle/>
           <a:p>
-            <a:pPr algn="ctr">
+            <a:pPr algn="l">
               <a:spcBef>
                 <a:spcPts val="0"/>
               </a:spcBef>
@@ -4674,37 +9544,37 @@
               </a:spcAft>
             </a:pPr>
             <a:r>
-              <a:rPr sz="1300" b="1">
-                <a:solidFill>
-                  <a:srgbClr val="129A9A"/>
+              <a:rPr sz="1100" b="0">
+                <a:solidFill>
+                  <a:srgbClr val="181C22"/>
                 </a:solidFill>
                 <a:latin typeface="Microsoft JhengHei"/>
               </a:rPr>
-              <a:t>6 月</a:t>
-            </a:r>
-          </a:p>
-        </p:txBody>
-      </p:sp>
-      <p:sp>
-        <p:nvSpPr>
-          <p:cNvPr id="35" name="Rectangle 34"/>
+              <a:t>以歷史實際資料對帳，驗證平衡計算與蒸發量結果無誤</a:t>
+            </a:r>
+          </a:p>
+        </p:txBody>
+      </p:sp>
+      <p:sp>
+        <p:nvSpPr>
+          <p:cNvPr id="80" name="Rectangle 79"/>
           <p:cNvSpPr/>
           <p:nvPr/>
         </p:nvSpPr>
         <p:spPr>
           <a:xfrm>
-            <a:off x="713232" y="5596128"/>
-            <a:ext cx="2039112" cy="960120"/>
+            <a:off x="1417320" y="5724144"/>
+            <a:ext cx="960120" cy="457200"/>
           </a:xfrm>
           <a:prstGeom prst="rect">
             <a:avLst/>
           </a:prstGeom>
           <a:solidFill>
-            <a:srgbClr val="FFFFFF"/>
+            <a:srgbClr val="1B1F27"/>
           </a:solidFill>
           <a:ln w="12700">
             <a:solidFill>
-              <a:srgbClr val="D5DEE8"/>
+              <a:srgbClr val="2A2F39"/>
             </a:solidFill>
           </a:ln>
           <a:effectLst/>
@@ -4733,20 +9603,123 @@
       </p:sp>
       <p:sp>
         <p:nvSpPr>
-          <p:cNvPr id="36" name="Rectangle 35"/>
+          <p:cNvPr id="81" name="TextBox 80"/>
+          <p:cNvSpPr txBox="1"/>
+          <p:nvPr/>
+        </p:nvSpPr>
+        <p:spPr>
+          <a:xfrm>
+            <a:off x="1417320" y="5742432"/>
+            <a:ext cx="713232" cy="457200"/>
+          </a:xfrm>
+          <a:prstGeom prst="rect">
+            <a:avLst/>
+          </a:prstGeom>
+          <a:noFill/>
+        </p:spPr>
+        <p:txBody>
+          <a:bodyPr wrap="square" anchor="ctr" tIns="0" bIns="0" lIns="25400" rIns="25400">
+            <a:spAutoFit/>
+          </a:bodyPr>
+          <a:lstStyle/>
+          <a:p>
+            <a:pPr algn="ctr">
+              <a:spcBef>
+                <a:spcPts val="0"/>
+              </a:spcBef>
+              <a:spcAft>
+                <a:spcPts val="0"/>
+              </a:spcAft>
+            </a:pPr>
+            <a:r>
+              <a:rPr sz="800" b="1">
+                <a:solidFill>
+                  <a:srgbClr val="8A93A1"/>
+                </a:solidFill>
+                <a:latin typeface="Microsoft JhengHei"/>
+              </a:rPr>
+              <a:t>STEP</a:t>
+            </a:r>
+          </a:p>
+          <a:p>
+            <a:pPr algn="ctr">
+              <a:spcBef>
+                <a:spcPts val="0"/>
+              </a:spcBef>
+              <a:spcAft>
+                <a:spcPts val="0"/>
+              </a:spcAft>
+            </a:pPr>
+            <a:r>
+              <a:rPr sz="1600" b="1">
+                <a:solidFill>
+                  <a:srgbClr val="FFFFFF"/>
+                </a:solidFill>
+                <a:latin typeface="Microsoft JhengHei"/>
+              </a:rPr>
+              <a:t>09</a:t>
+            </a:r>
+          </a:p>
+        </p:txBody>
+      </p:sp>
+      <p:sp>
+        <p:nvSpPr>
+          <p:cNvPr id="82" name="TextBox 81"/>
+          <p:cNvSpPr txBox="1"/>
+          <p:nvPr/>
+        </p:nvSpPr>
+        <p:spPr>
+          <a:xfrm>
+            <a:off x="2093976" y="5724144"/>
+            <a:ext cx="274320" cy="457200"/>
+          </a:xfrm>
+          <a:prstGeom prst="rect">
+            <a:avLst/>
+          </a:prstGeom>
+          <a:noFill/>
+        </p:spPr>
+        <p:txBody>
+          <a:bodyPr wrap="square" anchor="ctr" tIns="0" bIns="0" lIns="25400" rIns="25400">
+            <a:spAutoFit/>
+          </a:bodyPr>
+          <a:lstStyle/>
+          <a:p>
+            <a:pPr algn="ctr">
+              <a:spcBef>
+                <a:spcPts val="0"/>
+              </a:spcBef>
+              <a:spcAft>
+                <a:spcPts val="300"/>
+              </a:spcAft>
+            </a:pPr>
+            <a:r>
+              <a:rPr sz="950" b="1">
+                <a:solidFill>
+                  <a:srgbClr val="4FC17A"/>
+                </a:solidFill>
+                <a:latin typeface="Microsoft JhengHei"/>
+              </a:rPr>
+              <a:t>90%</a:t>
+            </a:r>
+          </a:p>
+        </p:txBody>
+      </p:sp>
+      <p:sp>
+        <p:nvSpPr>
+          <p:cNvPr id="83" name="Rectangle 82"/>
           <p:cNvSpPr/>
           <p:nvPr/>
         </p:nvSpPr>
         <p:spPr>
           <a:xfrm>
-            <a:off x="713232" y="5596128"/>
-            <a:ext cx="2039112" cy="50800"/>
+            <a:off x="2514600" y="5724144"/>
+            <a:ext cx="2011680" cy="457200"/>
           </a:xfrm>
           <a:prstGeom prst="rect">
             <a:avLst/>
           </a:prstGeom>
           <a:solidFill>
-            <a:srgbClr val="129A9A"/>
+            <a:srgbClr val="C9CFD8"/>
           </a:solidFill>
           <a:ln>
             <a:noFill/>
@@ -4777,14 +9750,14 @@
       </p:sp>
       <p:sp>
         <p:nvSpPr>
-          <p:cNvPr id="37" name="TextBox 36"/>
+          <p:cNvPr id="84" name="TextBox 83"/>
           <p:cNvSpPr txBox="1"/>
           <p:nvPr/>
         </p:nvSpPr>
         <p:spPr>
           <a:xfrm>
-            <a:off x="713232" y="5669280"/>
-            <a:ext cx="2039112" cy="548640"/>
+            <a:off x="2624328" y="5724144"/>
+            <a:ext cx="1828800" cy="457200"/>
           </a:xfrm>
           <a:prstGeom prst="rect">
             <a:avLst/>
@@ -4792,73 +9765,12 @@
           <a:noFill/>
         </p:spPr>
         <p:txBody>
-          <a:bodyPr wrap="square" anchor="t" tIns="0" bIns="0">
+          <a:bodyPr wrap="square" anchor="ctr" tIns="0" bIns="0" lIns="25400" rIns="25400">
             <a:spAutoFit/>
           </a:bodyPr>
           <a:lstStyle/>
           <a:p>
-            <a:pPr algn="ctr">
-              <a:spcBef>
-                <a:spcPts val="0"/>
-              </a:spcBef>
-              <a:spcAft>
-                <a:spcPts val="200"/>
-              </a:spcAft>
-            </a:pPr>
-            <a:r>
-              <a:rPr sz="1150" b="1">
-                <a:solidFill>
-                  <a:srgbClr val="0F2A4A"/>
-                </a:solidFill>
-                <a:latin typeface="Microsoft JhengHei"/>
-              </a:rPr>
-              <a:t>現況盤點</a:t>
-            </a:r>
-          </a:p>
-          <a:p>
-            <a:pPr algn="ctr">
-              <a:spcBef>
-                <a:spcPts val="0"/>
-              </a:spcBef>
-              <a:spcAft>
-                <a:spcPts val="200"/>
-              </a:spcAft>
-            </a:pPr>
-            <a:r>
-              <a:rPr sz="900" b="0">
-                <a:solidFill>
-                  <a:srgbClr val="444F5B"/>
-                </a:solidFill>
-                <a:latin typeface="Microsoft JhengHei"/>
-              </a:rPr>
-              <a:t>流程圖整理／資料蒐集</a:t>
-            </a:r>
-          </a:p>
-        </p:txBody>
-      </p:sp>
-      <p:sp>
-        <p:nvSpPr>
-          <p:cNvPr id="38" name="TextBox 37"/>
-          <p:cNvSpPr txBox="1"/>
-          <p:nvPr/>
-        </p:nvSpPr>
-        <p:spPr>
-          <a:xfrm>
-            <a:off x="713232" y="6272784"/>
-            <a:ext cx="2039112" cy="256032"/>
-          </a:xfrm>
-          <a:prstGeom prst="rect">
-            <a:avLst/>
-          </a:prstGeom>
-          <a:noFill/>
-        </p:spPr>
-        <p:txBody>
-          <a:bodyPr wrap="square" anchor="t" tIns="0" bIns="0">
-            <a:spAutoFit/>
-          </a:bodyPr>
-          <a:lstStyle/>
-          <a:p>
-            <a:pPr algn="ctr">
+            <a:pPr algn="l">
               <a:spcBef>
                 <a:spcPts val="0"/>
               </a:spcBef>
@@ -4867,38 +9779,36 @@
               </a:spcAft>
             </a:pPr>
             <a:r>
-              <a:rPr sz="900" b="1">
-                <a:solidFill>
-                  <a:srgbClr val="129A9A"/>
+              <a:rPr sz="1250" b="1">
+                <a:solidFill>
+                  <a:srgbClr val="181C22"/>
                 </a:solidFill>
                 <a:latin typeface="Microsoft JhengHei"/>
               </a:rPr>
-              <a:t>◆ 需求凍結</a:t>
-            </a:r>
-          </a:p>
-        </p:txBody>
-      </p:sp>
-      <p:sp>
-        <p:nvSpPr>
-          <p:cNvPr id="39" name="Oval 38"/>
+              <a:t>上線測試（UAT）</a:t>
+            </a:r>
+          </a:p>
+        </p:txBody>
+      </p:sp>
+      <p:sp>
+        <p:nvSpPr>
+          <p:cNvPr id="85" name="Rectangle 84"/>
           <p:cNvSpPr/>
           <p:nvPr/>
         </p:nvSpPr>
         <p:spPr>
           <a:xfrm>
-            <a:off x="3808476" y="5175504"/>
-            <a:ext cx="237744" cy="237744"/>
-          </a:xfrm>
-          <a:prstGeom prst="ellipse">
+            <a:off x="4617720" y="5724144"/>
+            <a:ext cx="5989320" cy="457200"/>
+          </a:xfrm>
+          <a:prstGeom prst="rect">
             <a:avLst/>
           </a:prstGeom>
           <a:solidFill>
-            <a:srgbClr val="1F6FB2"/>
+            <a:srgbClr val="B2B9C4"/>
           </a:solidFill>
-          <a:ln w="19050">
-            <a:solidFill>
-              <a:srgbClr val="FFFFFF"/>
-            </a:solidFill>
+          <a:ln>
+            <a:noFill/>
           </a:ln>
           <a:effectLst/>
         </p:spPr>
@@ -4926,14 +9836,14 @@
       </p:sp>
       <p:sp>
         <p:nvSpPr>
-          <p:cNvPr id="40" name="TextBox 39"/>
+          <p:cNvPr id="86" name="TextBox 85"/>
           <p:cNvSpPr txBox="1"/>
           <p:nvPr/>
         </p:nvSpPr>
         <p:spPr>
           <a:xfrm>
-            <a:off x="2825496" y="4956048"/>
-            <a:ext cx="2185416" cy="274320"/>
+            <a:off x="4754880" y="5724144"/>
+            <a:ext cx="5715000" cy="457200"/>
           </a:xfrm>
           <a:prstGeom prst="rect">
             <a:avLst/>
@@ -4941,12 +9851,12 @@
           <a:noFill/>
         </p:spPr>
         <p:txBody>
-          <a:bodyPr wrap="square" anchor="t" tIns="0" bIns="0">
+          <a:bodyPr wrap="square" anchor="ctr" tIns="0" bIns="0" lIns="25400" rIns="25400">
             <a:spAutoFit/>
           </a:bodyPr>
           <a:lstStyle/>
           <a:p>
-            <a:pPr algn="ctr">
+            <a:pPr algn="l">
               <a:spcBef>
                 <a:spcPts val="0"/>
               </a:spcBef>
@@ -4955,37 +9865,37 @@
               </a:spcAft>
             </a:pPr>
             <a:r>
-              <a:rPr sz="1300" b="1">
-                <a:solidFill>
-                  <a:srgbClr val="1F6FB2"/>
+              <a:rPr sz="1100" b="0">
+                <a:solidFill>
+                  <a:srgbClr val="181C22"/>
                 </a:solidFill>
                 <a:latin typeface="Microsoft JhengHei"/>
               </a:rPr>
-              <a:t>7 月</a:t>
-            </a:r>
-          </a:p>
-        </p:txBody>
-      </p:sp>
-      <p:sp>
-        <p:nvSpPr>
-          <p:cNvPr id="41" name="Rectangle 40"/>
+              <a:t>平行測試，確認結果符合 Agent 定義且 UX 符合預期</a:t>
+            </a:r>
+          </a:p>
+        </p:txBody>
+      </p:sp>
+      <p:sp>
+        <p:nvSpPr>
+          <p:cNvPr id="87" name="Rectangle 86"/>
           <p:cNvSpPr/>
           <p:nvPr/>
         </p:nvSpPr>
         <p:spPr>
           <a:xfrm>
-            <a:off x="2898648" y="5596128"/>
-            <a:ext cx="2039112" cy="960120"/>
+            <a:off x="1417320" y="6245352"/>
+            <a:ext cx="960120" cy="457200"/>
           </a:xfrm>
           <a:prstGeom prst="rect">
             <a:avLst/>
           </a:prstGeom>
           <a:solidFill>
-            <a:srgbClr val="FFFFFF"/>
+            <a:srgbClr val="1B1F27"/>
           </a:solidFill>
           <a:ln w="12700">
             <a:solidFill>
-              <a:srgbClr val="D5DEE8"/>
+              <a:srgbClr val="2A2F39"/>
             </a:solidFill>
           </a:ln>
           <a:effectLst/>
@@ -5014,20 +9924,123 @@
       </p:sp>
       <p:sp>
         <p:nvSpPr>
-          <p:cNvPr id="42" name="Rectangle 41"/>
+          <p:cNvPr id="88" name="TextBox 87"/>
+          <p:cNvSpPr txBox="1"/>
+          <p:nvPr/>
+        </p:nvSpPr>
+        <p:spPr>
+          <a:xfrm>
+            <a:off x="1417320" y="6263640"/>
+            <a:ext cx="713232" cy="457200"/>
+          </a:xfrm>
+          <a:prstGeom prst="rect">
+            <a:avLst/>
+          </a:prstGeom>
+          <a:noFill/>
+        </p:spPr>
+        <p:txBody>
+          <a:bodyPr wrap="square" anchor="ctr" tIns="0" bIns="0" lIns="25400" rIns="25400">
+            <a:spAutoFit/>
+          </a:bodyPr>
+          <a:lstStyle/>
+          <a:p>
+            <a:pPr algn="ctr">
+              <a:spcBef>
+                <a:spcPts val="0"/>
+              </a:spcBef>
+              <a:spcAft>
+                <a:spcPts val="0"/>
+              </a:spcAft>
+            </a:pPr>
+            <a:r>
+              <a:rPr sz="800" b="1">
+                <a:solidFill>
+                  <a:srgbClr val="8A93A1"/>
+                </a:solidFill>
+                <a:latin typeface="Microsoft JhengHei"/>
+              </a:rPr>
+              <a:t>STEP</a:t>
+            </a:r>
+          </a:p>
+          <a:p>
+            <a:pPr algn="ctr">
+              <a:spcBef>
+                <a:spcPts val="0"/>
+              </a:spcBef>
+              <a:spcAft>
+                <a:spcPts val="0"/>
+              </a:spcAft>
+            </a:pPr>
+            <a:r>
+              <a:rPr sz="1600" b="1">
+                <a:solidFill>
+                  <a:srgbClr val="FFFFFF"/>
+                </a:solidFill>
+                <a:latin typeface="Microsoft JhengHei"/>
+              </a:rPr>
+              <a:t>10</a:t>
+            </a:r>
+          </a:p>
+        </p:txBody>
+      </p:sp>
+      <p:sp>
+        <p:nvSpPr>
+          <p:cNvPr id="89" name="TextBox 88"/>
+          <p:cNvSpPr txBox="1"/>
+          <p:nvPr/>
+        </p:nvSpPr>
+        <p:spPr>
+          <a:xfrm>
+            <a:off x="2093976" y="6245352"/>
+            <a:ext cx="274320" cy="457200"/>
+          </a:xfrm>
+          <a:prstGeom prst="rect">
+            <a:avLst/>
+          </a:prstGeom>
+          <a:noFill/>
+        </p:spPr>
+        <p:txBody>
+          <a:bodyPr wrap="square" anchor="ctr" tIns="0" bIns="0" lIns="25400" rIns="25400">
+            <a:spAutoFit/>
+          </a:bodyPr>
+          <a:lstStyle/>
+          <a:p>
+            <a:pPr algn="ctr">
+              <a:spcBef>
+                <a:spcPts val="0"/>
+              </a:spcBef>
+              <a:spcAft>
+                <a:spcPts val="300"/>
+              </a:spcAft>
+            </a:pPr>
+            <a:r>
+              <a:rPr sz="950" b="1">
+                <a:solidFill>
+                  <a:srgbClr val="4FC17A"/>
+                </a:solidFill>
+                <a:latin typeface="Microsoft JhengHei"/>
+              </a:rPr>
+              <a:t>100%</a:t>
+            </a:r>
+          </a:p>
+        </p:txBody>
+      </p:sp>
+      <p:sp>
+        <p:nvSpPr>
+          <p:cNvPr id="90" name="Rectangle 89"/>
           <p:cNvSpPr/>
           <p:nvPr/>
         </p:nvSpPr>
         <p:spPr>
           <a:xfrm>
-            <a:off x="2898648" y="5596128"/>
-            <a:ext cx="2039112" cy="50800"/>
+            <a:off x="2514600" y="6245352"/>
+            <a:ext cx="2011680" cy="457200"/>
           </a:xfrm>
           <a:prstGeom prst="rect">
             <a:avLst/>
           </a:prstGeom>
           <a:solidFill>
-            <a:srgbClr val="1F6FB2"/>
+            <a:srgbClr val="C9CFD8"/>
           </a:solidFill>
           <a:ln>
             <a:noFill/>
@@ -5058,14 +10071,14 @@
       </p:sp>
       <p:sp>
         <p:nvSpPr>
-          <p:cNvPr id="43" name="TextBox 42"/>
+          <p:cNvPr id="91" name="TextBox 90"/>
           <p:cNvSpPr txBox="1"/>
           <p:nvPr/>
         </p:nvSpPr>
         <p:spPr>
           <a:xfrm>
-            <a:off x="2898648" y="5669280"/>
-            <a:ext cx="2039112" cy="548640"/>
+            <a:off x="2624328" y="6245352"/>
+            <a:ext cx="1828800" cy="457200"/>
           </a:xfrm>
           <a:prstGeom prst="rect">
             <a:avLst/>
@@ -5073,73 +10086,12 @@
           <a:noFill/>
         </p:spPr>
         <p:txBody>
-          <a:bodyPr wrap="square" anchor="t" tIns="0" bIns="0">
+          <a:bodyPr wrap="square" anchor="ctr" tIns="0" bIns="0" lIns="25400" rIns="25400">
             <a:spAutoFit/>
           </a:bodyPr>
           <a:lstStyle/>
           <a:p>
-            <a:pPr algn="ctr">
-              <a:spcBef>
-                <a:spcPts val="0"/>
-              </a:spcBef>
-              <a:spcAft>
-                <a:spcPts val="200"/>
-              </a:spcAft>
-            </a:pPr>
-            <a:r>
-              <a:rPr sz="1150" b="1">
-                <a:solidFill>
-                  <a:srgbClr val="0F2A4A"/>
-                </a:solidFill>
-                <a:latin typeface="Microsoft JhengHei"/>
-              </a:rPr>
-              <a:t>需求與設計</a:t>
-            </a:r>
-          </a:p>
-          <a:p>
-            <a:pPr algn="ctr">
-              <a:spcBef>
-                <a:spcPts val="0"/>
-              </a:spcBef>
-              <a:spcAft>
-                <a:spcPts val="200"/>
-              </a:spcAft>
-            </a:pPr>
-            <a:r>
-              <a:rPr sz="900" b="0">
-                <a:solidFill>
-                  <a:srgbClr val="444F5B"/>
-                </a:solidFill>
-                <a:latin typeface="Microsoft JhengHei"/>
-              </a:rPr>
-              <a:t>計算邏輯／Agent 設計</a:t>
-            </a:r>
-          </a:p>
-        </p:txBody>
-      </p:sp>
-      <p:sp>
-        <p:nvSpPr>
-          <p:cNvPr id="44" name="TextBox 43"/>
-          <p:cNvSpPr txBox="1"/>
-          <p:nvPr/>
-        </p:nvSpPr>
-        <p:spPr>
-          <a:xfrm>
-            <a:off x="2898648" y="6272784"/>
-            <a:ext cx="2039112" cy="256032"/>
-          </a:xfrm>
-          <a:prstGeom prst="rect">
-            <a:avLst/>
-          </a:prstGeom>
-          <a:noFill/>
-        </p:spPr>
-        <p:txBody>
-          <a:bodyPr wrap="square" anchor="t" tIns="0" bIns="0">
-            <a:spAutoFit/>
-          </a:bodyPr>
-          <a:lstStyle/>
-          <a:p>
-            <a:pPr algn="ctr">
+            <a:pPr algn="l">
               <a:spcBef>
                 <a:spcPts val="0"/>
               </a:spcBef>
@@ -5148,38 +10100,36 @@
               </a:spcAft>
             </a:pPr>
             <a:r>
-              <a:rPr sz="900" b="1">
-                <a:solidFill>
-                  <a:srgbClr val="1F6FB2"/>
+              <a:rPr sz="1250" b="1">
+                <a:solidFill>
+                  <a:srgbClr val="181C22"/>
                 </a:solidFill>
                 <a:latin typeface="Microsoft JhengHei"/>
               </a:rPr>
-              <a:t>◆ 設計定案</a:t>
-            </a:r>
-          </a:p>
-        </p:txBody>
-      </p:sp>
-      <p:sp>
-        <p:nvSpPr>
-          <p:cNvPr id="45" name="Oval 44"/>
+              <a:t>正式上線回饋追蹤</a:t>
+            </a:r>
+          </a:p>
+        </p:txBody>
+      </p:sp>
+      <p:sp>
+        <p:nvSpPr>
+          <p:cNvPr id="92" name="Rectangle 91"/>
           <p:cNvSpPr/>
           <p:nvPr/>
         </p:nvSpPr>
         <p:spPr>
           <a:xfrm>
-            <a:off x="5993892" y="5175504"/>
-            <a:ext cx="237744" cy="237744"/>
-          </a:xfrm>
-          <a:prstGeom prst="ellipse">
+            <a:off x="4617720" y="6245352"/>
+            <a:ext cx="5989320" cy="457200"/>
+          </a:xfrm>
+          <a:prstGeom prst="rect">
             <a:avLst/>
           </a:prstGeom>
           <a:solidFill>
-            <a:srgbClr val="0F2A4A"/>
+            <a:srgbClr val="B2B9C4"/>
           </a:solidFill>
-          <a:ln w="19050">
-            <a:solidFill>
-              <a:srgbClr val="FFFFFF"/>
-            </a:solidFill>
+          <a:ln>
+            <a:noFill/>
           </a:ln>
           <a:effectLst/>
         </p:spPr>
@@ -5207,14 +10157,14 @@
       </p:sp>
       <p:sp>
         <p:nvSpPr>
-          <p:cNvPr id="46" name="TextBox 45"/>
+          <p:cNvPr id="93" name="TextBox 92"/>
           <p:cNvSpPr txBox="1"/>
           <p:nvPr/>
         </p:nvSpPr>
         <p:spPr>
           <a:xfrm>
-            <a:off x="5010912" y="4956048"/>
-            <a:ext cx="2185416" cy="274320"/>
+            <a:off x="4754880" y="6245352"/>
+            <a:ext cx="5715000" cy="457200"/>
           </a:xfrm>
           <a:prstGeom prst="rect">
             <a:avLst/>
@@ -5222,12 +10172,12 @@
           <a:noFill/>
         </p:spPr>
         <p:txBody>
-          <a:bodyPr wrap="square" anchor="t" tIns="0" bIns="0">
+          <a:bodyPr wrap="square" anchor="ctr" tIns="0" bIns="0" lIns="25400" rIns="25400">
             <a:spAutoFit/>
           </a:bodyPr>
           <a:lstStyle/>
           <a:p>
-            <a:pPr algn="ctr">
+            <a:pPr algn="l">
               <a:spcBef>
                 <a:spcPts val="0"/>
               </a:spcBef>
@@ -5236,38 +10186,36 @@
               </a:spcAft>
             </a:pPr>
             <a:r>
-              <a:rPr sz="1300" b="1">
-                <a:solidFill>
-                  <a:srgbClr val="0F2A4A"/>
+              <a:rPr sz="1100" b="0">
+                <a:solidFill>
+                  <a:srgbClr val="181C22"/>
                 </a:solidFill>
                 <a:latin typeface="Microsoft JhengHei"/>
               </a:rPr>
-              <a:t>8 月</a:t>
-            </a:r>
-          </a:p>
-        </p:txBody>
-      </p:sp>
-      <p:sp>
-        <p:nvSpPr>
-          <p:cNvPr id="47" name="Rectangle 46"/>
+              <a:t>正式串接、公告上線，產出申報資料並持續追蹤優化</a:t>
+            </a:r>
+          </a:p>
+        </p:txBody>
+      </p:sp>
+      <p:sp>
+        <p:nvSpPr>
+          <p:cNvPr id="94" name="Rectangle 93"/>
           <p:cNvSpPr/>
           <p:nvPr/>
         </p:nvSpPr>
         <p:spPr>
           <a:xfrm>
-            <a:off x="5084064" y="5596128"/>
-            <a:ext cx="2039112" cy="960120"/>
+            <a:off x="10744200" y="5202936"/>
+            <a:ext cx="38100" cy="1499616"/>
           </a:xfrm>
           <a:prstGeom prst="rect">
             <a:avLst/>
           </a:prstGeom>
           <a:solidFill>
-            <a:srgbClr val="FFFFFF"/>
+            <a:srgbClr val="4FC17A"/>
           </a:solidFill>
-          <a:ln w="12700">
-            <a:solidFill>
-              <a:srgbClr val="D5DEE8"/>
-            </a:solidFill>
+          <a:ln>
+            <a:noFill/>
           </a:ln>
           <a:effectLst/>
         </p:spPr>
@@ -5295,20 +10243,206 @@
       </p:sp>
       <p:sp>
         <p:nvSpPr>
-          <p:cNvPr id="48" name="Rectangle 47"/>
+          <p:cNvPr id="95" name="TextBox 94"/>
+          <p:cNvSpPr txBox="1"/>
+          <p:nvPr/>
+        </p:nvSpPr>
+        <p:spPr>
+          <a:xfrm>
+            <a:off x="10927080" y="1417320"/>
+            <a:ext cx="1234440" cy="978408"/>
+          </a:xfrm>
+          <a:prstGeom prst="rect">
+            <a:avLst/>
+          </a:prstGeom>
+          <a:noFill/>
+        </p:spPr>
+        <p:txBody>
+          <a:bodyPr wrap="square" anchor="ctr" tIns="0" bIns="0" lIns="25400" rIns="25400">
+            <a:spAutoFit/>
+          </a:bodyPr>
+          <a:lstStyle/>
+          <a:p>
+            <a:pPr algn="l">
+              <a:spcBef>
+                <a:spcPts val="0"/>
+              </a:spcBef>
+              <a:spcAft>
+                <a:spcPts val="300"/>
+              </a:spcAft>
+            </a:pPr>
+            <a:r>
+              <a:rPr sz="1000" b="1">
+                <a:solidFill>
+                  <a:srgbClr val="35D0E6"/>
+                </a:solidFill>
+                <a:latin typeface="Microsoft JhengHei"/>
+              </a:rPr>
+              <a:t>需求規格 / AS-IS·TO-BE 流程圖</a:t>
+            </a:r>
+          </a:p>
+        </p:txBody>
+      </p:sp>
+      <p:sp>
+        <p:nvSpPr>
+          <p:cNvPr id="96" name="TextBox 95"/>
+          <p:cNvSpPr txBox="1"/>
+          <p:nvPr/>
+        </p:nvSpPr>
+        <p:spPr>
+          <a:xfrm>
+            <a:off x="10927080" y="2505456"/>
+            <a:ext cx="1234440" cy="1499616"/>
+          </a:xfrm>
+          <a:prstGeom prst="rect">
+            <a:avLst/>
+          </a:prstGeom>
+          <a:noFill/>
+        </p:spPr>
+        <p:txBody>
+          <a:bodyPr wrap="square" anchor="ctr" tIns="0" bIns="0" lIns="25400" rIns="25400">
+            <a:spAutoFit/>
+          </a:bodyPr>
+          <a:lstStyle/>
+          <a:p>
+            <a:pPr algn="l">
+              <a:spcBef>
+                <a:spcPts val="0"/>
+              </a:spcBef>
+              <a:spcAft>
+                <a:spcPts val="300"/>
+              </a:spcAft>
+            </a:pPr>
+            <a:r>
+              <a:rPr sz="1000" b="1">
+                <a:solidFill>
+                  <a:srgbClr val="3E8FD6"/>
+                </a:solidFill>
+                <a:latin typeface="Microsoft JhengHei"/>
+              </a:rPr>
+              <a:t>知識庫 / 結構化資料集</a:t>
+            </a:r>
+          </a:p>
+        </p:txBody>
+      </p:sp>
+      <p:sp>
+        <p:nvSpPr>
+          <p:cNvPr id="97" name="TextBox 96"/>
+          <p:cNvSpPr txBox="1"/>
+          <p:nvPr/>
+        </p:nvSpPr>
+        <p:spPr>
+          <a:xfrm>
+            <a:off x="10927080" y="4114800"/>
+            <a:ext cx="1234440" cy="978408"/>
+          </a:xfrm>
+          <a:prstGeom prst="rect">
+            <a:avLst/>
+          </a:prstGeom>
+          <a:noFill/>
+        </p:spPr>
+        <p:txBody>
+          <a:bodyPr wrap="square" anchor="ctr" tIns="0" bIns="0" lIns="25400" rIns="25400">
+            <a:spAutoFit/>
+          </a:bodyPr>
+          <a:lstStyle/>
+          <a:p>
+            <a:pPr algn="l">
+              <a:spcBef>
+                <a:spcPts val="0"/>
+              </a:spcBef>
+              <a:spcAft>
+                <a:spcPts val="300"/>
+              </a:spcAft>
+            </a:pPr>
+            <a:r>
+              <a:rPr sz="1000" b="1">
+                <a:solidFill>
+                  <a:srgbClr val="E7B43C"/>
+                </a:solidFill>
+                <a:latin typeface="Microsoft JhengHei"/>
+              </a:rPr>
+              <a:t>平衡計算引擎 + Agent 串接</a:t>
+            </a:r>
+          </a:p>
+        </p:txBody>
+      </p:sp>
+      <p:sp>
+        <p:nvSpPr>
+          <p:cNvPr id="98" name="TextBox 97"/>
+          <p:cNvSpPr txBox="1"/>
+          <p:nvPr/>
+        </p:nvSpPr>
+        <p:spPr>
+          <a:xfrm>
+            <a:off x="10927080" y="5202936"/>
+            <a:ext cx="1234440" cy="1499616"/>
+          </a:xfrm>
+          <a:prstGeom prst="rect">
+            <a:avLst/>
+          </a:prstGeom>
+          <a:noFill/>
+        </p:spPr>
+        <p:txBody>
+          <a:bodyPr wrap="square" anchor="ctr" tIns="0" bIns="0" lIns="25400" rIns="25400">
+            <a:spAutoFit/>
+          </a:bodyPr>
+          <a:lstStyle/>
+          <a:p>
+            <a:pPr algn="l">
+              <a:spcBef>
+                <a:spcPts val="0"/>
+              </a:spcBef>
+              <a:spcAft>
+                <a:spcPts val="300"/>
+              </a:spcAft>
+            </a:pPr>
+            <a:r>
+              <a:rPr sz="1000" b="1">
+                <a:solidFill>
+                  <a:srgbClr val="4FC17A"/>
+                </a:solidFill>
+                <a:latin typeface="Microsoft JhengHei"/>
+              </a:rPr>
+              <a:t>驗證報告 / 上線版申報資料</a:t>
+            </a:r>
+          </a:p>
+        </p:txBody>
+      </p:sp>
+    </p:spTree>
+  </p:cSld>
+  <p:clrMapOvr>
+    <a:masterClrMapping/>
+  </p:clrMapOvr>
+</p:sld>
+</file>
+
+<file path=ppt/slides/slide3.xml><?xml version="1.0" encoding="utf-8"?>
+<p:sld xmlns:a="http://schemas.openxmlformats.org/drawingml/2006/main" xmlns:p="http://schemas.openxmlformats.org/presentationml/2006/main" xmlns:r="http://schemas.openxmlformats.org/officeDocument/2006/relationships">
+  <p:cSld>
+    <p:spTree>
+      <p:nvGrpSpPr>
+        <p:cNvPr id="1" name=""/>
+        <p:cNvGrpSpPr/>
+        <p:nvPr/>
+      </p:nvGrpSpPr>
+      <p:grpSpPr/>
+      <p:sp>
+        <p:nvSpPr>
+          <p:cNvPr id="2" name="Rectangle 1"/>
           <p:cNvSpPr/>
           <p:nvPr/>
         </p:nvSpPr>
         <p:spPr>
           <a:xfrm>
-            <a:off x="5084064" y="5596128"/>
-            <a:ext cx="2039112" cy="50800"/>
+            <a:off x="0" y="0"/>
+            <a:ext cx="12191695" cy="6858000"/>
           </a:xfrm>
           <a:prstGeom prst="rect">
             <a:avLst/>
           </a:prstGeom>
           <a:solidFill>
-            <a:srgbClr val="0F2A4A"/>
+            <a:srgbClr val="101216"/>
           </a:solidFill>
           <a:ln>
             <a:noFill/>
@@ -5339,14 +10473,58 @@
       </p:sp>
       <p:sp>
         <p:nvSpPr>
-          <p:cNvPr id="49" name="TextBox 48"/>
+          <p:cNvPr id="3" name="Rectangle 2"/>
+          <p:cNvSpPr/>
+          <p:nvPr/>
+        </p:nvSpPr>
+        <p:spPr>
+          <a:xfrm>
+            <a:off x="0" y="0"/>
+            <a:ext cx="164592" cy="960120"/>
+          </a:xfrm>
+          <a:prstGeom prst="rect">
+            <a:avLst/>
+          </a:prstGeom>
+          <a:solidFill>
+            <a:srgbClr val="35D0E6"/>
+          </a:solidFill>
+          <a:ln>
+            <a:noFill/>
+          </a:ln>
+          <a:effectLst/>
+        </p:spPr>
+        <p:style>
+          <a:lnRef idx="1">
+            <a:schemeClr val="accent1"/>
+          </a:lnRef>
+          <a:fillRef idx="3">
+            <a:schemeClr val="accent1"/>
+          </a:fillRef>
+          <a:effectRef idx="2">
+            <a:schemeClr val="accent1"/>
+          </a:effectRef>
+          <a:fontRef idx="minor">
+            <a:schemeClr val="lt1"/>
+          </a:fontRef>
+        </p:style>
+        <p:txBody>
+          <a:bodyPr rtlCol="0" anchor="ctr"/>
+          <a:lstStyle/>
+          <a:p>
+            <a:pPr algn="ctr"/>
+          </a:p>
+        </p:txBody>
+      </p:sp>
+      <p:sp>
+        <p:nvSpPr>
+          <p:cNvPr id="4" name="TextBox 3"/>
           <p:cNvSpPr txBox="1"/>
           <p:nvPr/>
         </p:nvSpPr>
         <p:spPr>
           <a:xfrm>
-            <a:off x="5084064" y="5669280"/>
-            <a:ext cx="2039112" cy="548640"/>
+            <a:off x="457200" y="128016"/>
+            <a:ext cx="9144000" cy="292608"/>
           </a:xfrm>
           <a:prstGeom prst="rect">
             <a:avLst/>
@@ -5354,73 +10532,12 @@
           <a:noFill/>
         </p:spPr>
         <p:txBody>
-          <a:bodyPr wrap="square" anchor="t" tIns="0" bIns="0">
+          <a:bodyPr wrap="square" anchor="t" tIns="0" bIns="0" lIns="25400" rIns="25400">
             <a:spAutoFit/>
           </a:bodyPr>
           <a:lstStyle/>
           <a:p>
-            <a:pPr algn="ctr">
-              <a:spcBef>
-                <a:spcPts val="0"/>
-              </a:spcBef>
-              <a:spcAft>
-                <a:spcPts val="200"/>
-              </a:spcAft>
-            </a:pPr>
-            <a:r>
-              <a:rPr sz="1150" b="1">
-                <a:solidFill>
-                  <a:srgbClr val="0F2A4A"/>
-                </a:solidFill>
-                <a:latin typeface="Microsoft JhengHei"/>
-              </a:rPr>
-              <a:t>系統開發</a:t>
-            </a:r>
-          </a:p>
-          <a:p>
-            <a:pPr algn="ctr">
-              <a:spcBef>
-                <a:spcPts val="0"/>
-              </a:spcBef>
-              <a:spcAft>
-                <a:spcPts val="200"/>
-              </a:spcAft>
-            </a:pPr>
-            <a:r>
-              <a:rPr sz="900" b="0">
-                <a:solidFill>
-                  <a:srgbClr val="444F5B"/>
-                </a:solidFill>
-                <a:latin typeface="Microsoft JhengHei"/>
-              </a:rPr>
-              <a:t>計算引擎／Agent 開發</a:t>
-            </a:r>
-          </a:p>
-        </p:txBody>
-      </p:sp>
-      <p:sp>
-        <p:nvSpPr>
-          <p:cNvPr id="50" name="TextBox 49"/>
-          <p:cNvSpPr txBox="1"/>
-          <p:nvPr/>
-        </p:nvSpPr>
-        <p:spPr>
-          <a:xfrm>
-            <a:off x="5084064" y="6272784"/>
-            <a:ext cx="2039112" cy="256032"/>
-          </a:xfrm>
-          <a:prstGeom prst="rect">
-            <a:avLst/>
-          </a:prstGeom>
-          <a:noFill/>
-        </p:spPr>
-        <p:txBody>
-          <a:bodyPr wrap="square" anchor="t" tIns="0" bIns="0">
-            <a:spAutoFit/>
-          </a:bodyPr>
-          <a:lstStyle/>
-          <a:p>
-            <a:pPr algn="ctr">
+            <a:pPr algn="l">
               <a:spcBef>
                 <a:spcPts val="0"/>
               </a:spcBef>
@@ -5429,38 +10546,120 @@
               </a:spcAft>
             </a:pPr>
             <a:r>
-              <a:rPr sz="900" b="1">
-                <a:solidFill>
-                  <a:srgbClr val="0F2A4A"/>
+              <a:rPr sz="1200" b="1">
+                <a:solidFill>
+                  <a:srgbClr val="35D0E6"/>
                 </a:solidFill>
                 <a:latin typeface="Microsoft JhengHei"/>
               </a:rPr>
-              <a:t>◆ 開發完成</a:t>
-            </a:r>
-          </a:p>
-        </p:txBody>
-      </p:sp>
-      <p:sp>
-        <p:nvSpPr>
-          <p:cNvPr id="51" name="Oval 50"/>
+              <a:t>SYSTEM ARCHITECTURE FLOW</a:t>
+            </a:r>
+          </a:p>
+        </p:txBody>
+      </p:sp>
+      <p:sp>
+        <p:nvSpPr>
+          <p:cNvPr id="5" name="TextBox 4"/>
+          <p:cNvSpPr txBox="1"/>
+          <p:nvPr/>
+        </p:nvSpPr>
+        <p:spPr>
+          <a:xfrm>
+            <a:off x="457200" y="384048"/>
+            <a:ext cx="10058400" cy="548640"/>
+          </a:xfrm>
+          <a:prstGeom prst="rect">
+            <a:avLst/>
+          </a:prstGeom>
+          <a:noFill/>
+        </p:spPr>
+        <p:txBody>
+          <a:bodyPr wrap="square" anchor="t" tIns="0" bIns="0" lIns="25400" rIns="25400">
+            <a:spAutoFit/>
+          </a:bodyPr>
+          <a:lstStyle/>
+          <a:p>
+            <a:pPr algn="l">
+              <a:spcBef>
+                <a:spcPts val="0"/>
+              </a:spcBef>
+              <a:spcAft>
+                <a:spcPts val="300"/>
+              </a:spcAft>
+            </a:pPr>
+            <a:r>
+              <a:rPr sz="2600" b="1">
+                <a:solidFill>
+                  <a:srgbClr val="FFFFFF"/>
+                </a:solidFill>
+                <a:latin typeface="Microsoft JhengHei"/>
+              </a:rPr>
+              <a:t>系統架構流程圖</a:t>
+            </a:r>
+          </a:p>
+        </p:txBody>
+      </p:sp>
+      <p:sp>
+        <p:nvSpPr>
+          <p:cNvPr id="6" name="TextBox 5"/>
+          <p:cNvSpPr txBox="1"/>
+          <p:nvPr/>
+        </p:nvSpPr>
+        <p:spPr>
+          <a:xfrm>
+            <a:off x="10789920" y="274320"/>
+            <a:ext cx="1097280" cy="457200"/>
+          </a:xfrm>
+          <a:prstGeom prst="rect">
+            <a:avLst/>
+          </a:prstGeom>
+          <a:noFill/>
+        </p:spPr>
+        <p:txBody>
+          <a:bodyPr wrap="square" anchor="t" tIns="0" bIns="0" lIns="25400" rIns="25400">
+            <a:spAutoFit/>
+          </a:bodyPr>
+          <a:lstStyle/>
+          <a:p>
+            <a:pPr algn="r">
+              <a:spcBef>
+                <a:spcPts val="0"/>
+              </a:spcBef>
+              <a:spcAft>
+                <a:spcPts val="300"/>
+              </a:spcAft>
+            </a:pPr>
+            <a:r>
+              <a:rPr sz="1200" b="1">
+                <a:solidFill>
+                  <a:srgbClr val="8A93A1"/>
+                </a:solidFill>
+                <a:latin typeface="Microsoft JhengHei"/>
+              </a:rPr>
+              <a:t>PAGE 03</a:t>
+            </a:r>
+          </a:p>
+        </p:txBody>
+      </p:sp>
+      <p:sp>
+        <p:nvSpPr>
+          <p:cNvPr id="7" name="Rectangle 6"/>
           <p:cNvSpPr/>
           <p:nvPr/>
         </p:nvSpPr>
         <p:spPr>
           <a:xfrm>
-            <a:off x="8179308" y="5175504"/>
-            <a:ext cx="237744" cy="237744"/>
-          </a:xfrm>
-          <a:prstGeom prst="ellipse">
+            <a:off x="457200" y="987552"/>
+            <a:ext cx="11274552" cy="25400"/>
+          </a:xfrm>
+          <a:prstGeom prst="rect">
             <a:avLst/>
           </a:prstGeom>
           <a:solidFill>
-            <a:srgbClr val="E09F2A"/>
+            <a:srgbClr val="2A2F39"/>
           </a:solidFill>
-          <a:ln w="19050">
-            <a:solidFill>
-              <a:srgbClr val="FFFFFF"/>
-            </a:solidFill>
+          <a:ln>
+            <a:noFill/>
           </a:ln>
           <a:effectLst/>
         </p:spPr>
@@ -5488,14 +10687,104 @@
       </p:sp>
       <p:sp>
         <p:nvSpPr>
-          <p:cNvPr id="52" name="TextBox 51"/>
+          <p:cNvPr id="8" name="Rectangle 7"/>
+          <p:cNvSpPr/>
+          <p:nvPr/>
+        </p:nvSpPr>
+        <p:spPr>
+          <a:xfrm>
+            <a:off x="502920" y="2651760"/>
+            <a:ext cx="2011680" cy="1143000"/>
+          </a:xfrm>
+          <a:prstGeom prst="rect">
+            <a:avLst/>
+          </a:prstGeom>
+          <a:solidFill>
+            <a:srgbClr val="1B1F27"/>
+          </a:solidFill>
+          <a:ln w="19050">
+            <a:solidFill>
+              <a:srgbClr val="3E8FD6"/>
+            </a:solidFill>
+          </a:ln>
+          <a:effectLst/>
+        </p:spPr>
+        <p:style>
+          <a:lnRef idx="1">
+            <a:schemeClr val="accent1"/>
+          </a:lnRef>
+          <a:fillRef idx="3">
+            <a:schemeClr val="accent1"/>
+          </a:fillRef>
+          <a:effectRef idx="2">
+            <a:schemeClr val="accent1"/>
+          </a:effectRef>
+          <a:fontRef idx="minor">
+            <a:schemeClr val="lt1"/>
+          </a:fontRef>
+        </p:style>
+        <p:txBody>
+          <a:bodyPr rtlCol="0" anchor="ctr"/>
+          <a:lstStyle/>
+          <a:p>
+            <a:pPr algn="ctr"/>
+          </a:p>
+        </p:txBody>
+      </p:sp>
+      <p:sp>
+        <p:nvSpPr>
+          <p:cNvPr id="9" name="Rectangle 8"/>
+          <p:cNvSpPr/>
+          <p:nvPr/>
+        </p:nvSpPr>
+        <p:spPr>
+          <a:xfrm>
+            <a:off x="502920" y="2651760"/>
+            <a:ext cx="2011680" cy="63500"/>
+          </a:xfrm>
+          <a:prstGeom prst="rect">
+            <a:avLst/>
+          </a:prstGeom>
+          <a:solidFill>
+            <a:srgbClr val="3E8FD6"/>
+          </a:solidFill>
+          <a:ln>
+            <a:noFill/>
+          </a:ln>
+          <a:effectLst/>
+        </p:spPr>
+        <p:style>
+          <a:lnRef idx="1">
+            <a:schemeClr val="accent1"/>
+          </a:lnRef>
+          <a:fillRef idx="3">
+            <a:schemeClr val="accent1"/>
+          </a:fillRef>
+          <a:effectRef idx="2">
+            <a:schemeClr val="accent1"/>
+          </a:effectRef>
+          <a:fontRef idx="minor">
+            <a:schemeClr val="lt1"/>
+          </a:fontRef>
+        </p:style>
+        <p:txBody>
+          <a:bodyPr rtlCol="0" anchor="ctr"/>
+          <a:lstStyle/>
+          <a:p>
+            <a:pPr algn="ctr"/>
+          </a:p>
+        </p:txBody>
+      </p:sp>
+      <p:sp>
+        <p:nvSpPr>
+          <p:cNvPr id="10" name="TextBox 9"/>
           <p:cNvSpPr txBox="1"/>
           <p:nvPr/>
         </p:nvSpPr>
         <p:spPr>
           <a:xfrm>
-            <a:off x="7196328" y="4956048"/>
-            <a:ext cx="2185416" cy="274320"/>
+            <a:off x="612648" y="2743200"/>
+            <a:ext cx="1792224" cy="960120"/>
           </a:xfrm>
           <a:prstGeom prst="rect">
             <a:avLst/>
@@ -5503,7 +10792,7 @@
           <a:noFill/>
         </p:spPr>
         <p:txBody>
-          <a:bodyPr wrap="square" anchor="t" tIns="0" bIns="0">
+          <a:bodyPr wrap="square" anchor="ctr" tIns="0" bIns="0" lIns="25400" rIns="25400">
             <a:spAutoFit/>
           </a:bodyPr>
           <a:lstStyle/>
@@ -5517,37 +10806,56 @@
               </a:spcAft>
             </a:pPr>
             <a:r>
-              <a:rPr sz="1300" b="1">
-                <a:solidFill>
-                  <a:srgbClr val="E09F2A"/>
+              <a:rPr sz="1250" b="1">
+                <a:solidFill>
+                  <a:srgbClr val="FFFFFF"/>
                 </a:solidFill>
                 <a:latin typeface="Microsoft JhengHei"/>
               </a:rPr>
-              <a:t>9 月</a:t>
-            </a:r>
-          </a:p>
-        </p:txBody>
-      </p:sp>
-      <p:sp>
-        <p:nvSpPr>
-          <p:cNvPr id="53" name="Rectangle 52"/>
+              <a:t>① 資料來源</a:t>
+            </a:r>
+          </a:p>
+          <a:p>
+            <a:pPr algn="ctr">
+              <a:spcBef>
+                <a:spcPts val="0"/>
+              </a:spcBef>
+              <a:spcAft>
+                <a:spcPts val="300"/>
+              </a:spcAft>
+            </a:pPr>
+            <a:r>
+              <a:rPr sz="950" b="0">
+                <a:solidFill>
+                  <a:srgbClr val="8A93A1"/>
+                </a:solidFill>
+                <a:latin typeface="Microsoft JhengHei"/>
+              </a:rPr>
+              <a:t>SCADA / 水錶 /　進出水量 / 歷史報表</a:t>
+            </a:r>
+          </a:p>
+        </p:txBody>
+      </p:sp>
+      <p:sp>
+        <p:nvSpPr>
+          <p:cNvPr id="11" name="Rectangle 10"/>
           <p:cNvSpPr/>
           <p:nvPr/>
         </p:nvSpPr>
         <p:spPr>
           <a:xfrm>
-            <a:off x="7269480" y="5596128"/>
-            <a:ext cx="2039112" cy="960120"/>
+            <a:off x="2880360" y="2651760"/>
+            <a:ext cx="2011680" cy="1143000"/>
           </a:xfrm>
           <a:prstGeom prst="rect">
             <a:avLst/>
           </a:prstGeom>
           <a:solidFill>
-            <a:srgbClr val="FFFFFF"/>
+            <a:srgbClr val="1B1F27"/>
           </a:solidFill>
-          <a:ln w="12700">
+          <a:ln w="19050">
             <a:solidFill>
-              <a:srgbClr val="D5DEE8"/>
+              <a:srgbClr val="4FC17A"/>
             </a:solidFill>
           </a:ln>
           <a:effectLst/>
@@ -5576,20 +10884,20 @@
       </p:sp>
       <p:sp>
         <p:nvSpPr>
-          <p:cNvPr id="54" name="Rectangle 53"/>
+          <p:cNvPr id="12" name="Rectangle 11"/>
           <p:cNvSpPr/>
           <p:nvPr/>
         </p:nvSpPr>
         <p:spPr>
           <a:xfrm>
-            <a:off x="7269480" y="5596128"/>
-            <a:ext cx="2039112" cy="50800"/>
+            <a:off x="2880360" y="2651760"/>
+            <a:ext cx="2011680" cy="63500"/>
           </a:xfrm>
           <a:prstGeom prst="rect">
             <a:avLst/>
           </a:prstGeom>
           <a:solidFill>
-            <a:srgbClr val="E09F2A"/>
+            <a:srgbClr val="4FC17A"/>
           </a:solidFill>
           <a:ln>
             <a:noFill/>
@@ -5620,14 +10928,14 @@
       </p:sp>
       <p:sp>
         <p:nvSpPr>
-          <p:cNvPr id="55" name="TextBox 54"/>
+          <p:cNvPr id="13" name="TextBox 12"/>
           <p:cNvSpPr txBox="1"/>
           <p:nvPr/>
         </p:nvSpPr>
         <p:spPr>
           <a:xfrm>
-            <a:off x="7269480" y="5669280"/>
-            <a:ext cx="2039112" cy="548640"/>
+            <a:off x="2990088" y="2743200"/>
+            <a:ext cx="1792224" cy="960120"/>
           </a:xfrm>
           <a:prstGeom prst="rect">
             <a:avLst/>
@@ -5635,68 +10943,7 @@
           <a:noFill/>
         </p:spPr>
         <p:txBody>
-          <a:bodyPr wrap="square" anchor="t" tIns="0" bIns="0">
-            <a:spAutoFit/>
-          </a:bodyPr>
-          <a:lstStyle/>
-          <a:p>
-            <a:pPr algn="ctr">
-              <a:spcBef>
-                <a:spcPts val="0"/>
-              </a:spcBef>
-              <a:spcAft>
-                <a:spcPts val="200"/>
-              </a:spcAft>
-            </a:pPr>
-            <a:r>
-              <a:rPr sz="1150" b="1">
-                <a:solidFill>
-                  <a:srgbClr val="0F2A4A"/>
-                </a:solidFill>
-                <a:latin typeface="Microsoft JhengHei"/>
-              </a:rPr>
-              <a:t>測試驗證</a:t>
-            </a:r>
-          </a:p>
-          <a:p>
-            <a:pPr algn="ctr">
-              <a:spcBef>
-                <a:spcPts val="0"/>
-              </a:spcBef>
-              <a:spcAft>
-                <a:spcPts val="200"/>
-              </a:spcAft>
-            </a:pPr>
-            <a:r>
-              <a:rPr sz="900" b="0">
-                <a:solidFill>
-                  <a:srgbClr val="444F5B"/>
-                </a:solidFill>
-                <a:latin typeface="Microsoft JhengHei"/>
-              </a:rPr>
-              <a:t>整合測試／資料對帳／UAT</a:t>
-            </a:r>
-          </a:p>
-        </p:txBody>
-      </p:sp>
-      <p:sp>
-        <p:nvSpPr>
-          <p:cNvPr id="56" name="TextBox 55"/>
-          <p:cNvSpPr txBox="1"/>
-          <p:nvPr/>
-        </p:nvSpPr>
-        <p:spPr>
-          <a:xfrm>
-            <a:off x="7269480" y="6272784"/>
-            <a:ext cx="2039112" cy="256032"/>
-          </a:xfrm>
-          <a:prstGeom prst="rect">
-            <a:avLst/>
-          </a:prstGeom>
-          <a:noFill/>
-        </p:spPr>
-        <p:txBody>
-          <a:bodyPr wrap="square" anchor="t" tIns="0" bIns="0">
+          <a:bodyPr wrap="square" anchor="ctr" tIns="0" bIns="0" lIns="25400" rIns="25400">
             <a:spAutoFit/>
           </a:bodyPr>
           <a:lstStyle/>
@@ -5710,37 +10957,56 @@
               </a:spcAft>
             </a:pPr>
             <a:r>
-              <a:rPr sz="900" b="1">
-                <a:solidFill>
-                  <a:srgbClr val="E09F2A"/>
+              <a:rPr sz="1250" b="1">
+                <a:solidFill>
+                  <a:srgbClr val="FFFFFF"/>
                 </a:solidFill>
                 <a:latin typeface="Microsoft JhengHei"/>
               </a:rPr>
-              <a:t>◆ UAT 通過</a:t>
-            </a:r>
-          </a:p>
-        </p:txBody>
-      </p:sp>
-      <p:sp>
-        <p:nvSpPr>
-          <p:cNvPr id="57" name="Oval 56"/>
+              <a:t>② 資料整理 + 知識庫</a:t>
+            </a:r>
+          </a:p>
+          <a:p>
+            <a:pPr algn="ctr">
+              <a:spcBef>
+                <a:spcPts val="0"/>
+              </a:spcBef>
+              <a:spcAft>
+                <a:spcPts val="300"/>
+              </a:spcAft>
+            </a:pPr>
+            <a:r>
+              <a:rPr sz="950" b="0">
+                <a:solidFill>
+                  <a:srgbClr val="8A93A1"/>
+                </a:solidFill>
+                <a:latin typeface="Microsoft JhengHei"/>
+              </a:rPr>
+              <a:t>清洗統一格式　RAG 結構化分類</a:t>
+            </a:r>
+          </a:p>
+        </p:txBody>
+      </p:sp>
+      <p:sp>
+        <p:nvSpPr>
+          <p:cNvPr id="14" name="Rectangle 13"/>
           <p:cNvSpPr/>
           <p:nvPr/>
         </p:nvSpPr>
         <p:spPr>
           <a:xfrm>
-            <a:off x="10364724" y="5175504"/>
-            <a:ext cx="237744" cy="237744"/>
-          </a:xfrm>
-          <a:prstGeom prst="ellipse">
+            <a:off x="5257800" y="2651760"/>
+            <a:ext cx="2011680" cy="1143000"/>
+          </a:xfrm>
+          <a:prstGeom prst="rect">
             <a:avLst/>
           </a:prstGeom>
           <a:solidFill>
-            <a:srgbClr val="C0532B"/>
+            <a:srgbClr val="1B1F27"/>
           </a:solidFill>
           <a:ln w="19050">
             <a:solidFill>
-              <a:srgbClr val="FFFFFF"/>
+              <a:srgbClr val="35D0E6"/>
             </a:solidFill>
           </a:ln>
           <a:effectLst/>
@@ -5769,14 +11035,58 @@
       </p:sp>
       <p:sp>
         <p:nvSpPr>
-          <p:cNvPr id="58" name="TextBox 57"/>
+          <p:cNvPr id="15" name="Rectangle 14"/>
+          <p:cNvSpPr/>
+          <p:nvPr/>
+        </p:nvSpPr>
+        <p:spPr>
+          <a:xfrm>
+            <a:off x="5257800" y="2651760"/>
+            <a:ext cx="2011680" cy="63500"/>
+          </a:xfrm>
+          <a:prstGeom prst="rect">
+            <a:avLst/>
+          </a:prstGeom>
+          <a:solidFill>
+            <a:srgbClr val="35D0E6"/>
+          </a:solidFill>
+          <a:ln>
+            <a:noFill/>
+          </a:ln>
+          <a:effectLst/>
+        </p:spPr>
+        <p:style>
+          <a:lnRef idx="1">
+            <a:schemeClr val="accent1"/>
+          </a:lnRef>
+          <a:fillRef idx="3">
+            <a:schemeClr val="accent1"/>
+          </a:fillRef>
+          <a:effectRef idx="2">
+            <a:schemeClr val="accent1"/>
+          </a:effectRef>
+          <a:fontRef idx="minor">
+            <a:schemeClr val="lt1"/>
+          </a:fontRef>
+        </p:style>
+        <p:txBody>
+          <a:bodyPr rtlCol="0" anchor="ctr"/>
+          <a:lstStyle/>
+          <a:p>
+            <a:pPr algn="ctr"/>
+          </a:p>
+        </p:txBody>
+      </p:sp>
+      <p:sp>
+        <p:nvSpPr>
+          <p:cNvPr id="16" name="TextBox 15"/>
           <p:cNvSpPr txBox="1"/>
           <p:nvPr/>
         </p:nvSpPr>
         <p:spPr>
           <a:xfrm>
-            <a:off x="9381744" y="4956048"/>
-            <a:ext cx="2185416" cy="274320"/>
+            <a:off x="5367528" y="2743200"/>
+            <a:ext cx="1792224" cy="960120"/>
           </a:xfrm>
           <a:prstGeom prst="rect">
             <a:avLst/>
@@ -5784,7 +11094,7 @@
           <a:noFill/>
         </p:spPr>
         <p:txBody>
-          <a:bodyPr wrap="square" anchor="t" tIns="0" bIns="0">
+          <a:bodyPr wrap="square" anchor="ctr" tIns="0" bIns="0" lIns="25400" rIns="25400">
             <a:spAutoFit/>
           </a:bodyPr>
           <a:lstStyle/>
@@ -5798,37 +11108,56 @@
               </a:spcAft>
             </a:pPr>
             <a:r>
-              <a:rPr sz="1300" b="1">
-                <a:solidFill>
-                  <a:srgbClr val="C0532B"/>
+              <a:rPr sz="1250" b="1">
+                <a:solidFill>
+                  <a:srgbClr val="FFFFFF"/>
                 </a:solidFill>
                 <a:latin typeface="Microsoft JhengHei"/>
               </a:rPr>
-              <a:t>10 月</a:t>
-            </a:r>
-          </a:p>
-        </p:txBody>
-      </p:sp>
-      <p:sp>
-        <p:nvSpPr>
-          <p:cNvPr id="59" name="Rectangle 58"/>
+              <a:t>③ Agent 計算引擎</a:t>
+            </a:r>
+          </a:p>
+          <a:p>
+            <a:pPr algn="ctr">
+              <a:spcBef>
+                <a:spcPts val="0"/>
+              </a:spcBef>
+              <a:spcAft>
+                <a:spcPts val="300"/>
+              </a:spcAft>
+            </a:pPr>
+            <a:r>
+              <a:rPr sz="950" b="0">
+                <a:solidFill>
+                  <a:srgbClr val="8A93A1"/>
+                </a:solidFill>
+                <a:latin typeface="Microsoft JhengHei"/>
+              </a:rPr>
+              <a:t>進出水平衡計算　蒸發量推算</a:t>
+            </a:r>
+          </a:p>
+        </p:txBody>
+      </p:sp>
+      <p:sp>
+        <p:nvSpPr>
+          <p:cNvPr id="17" name="Rectangle 16"/>
           <p:cNvSpPr/>
           <p:nvPr/>
         </p:nvSpPr>
         <p:spPr>
           <a:xfrm>
-            <a:off x="9454896" y="5596128"/>
-            <a:ext cx="2039112" cy="960120"/>
+            <a:off x="7635240" y="2651760"/>
+            <a:ext cx="2011680" cy="1143000"/>
           </a:xfrm>
           <a:prstGeom prst="rect">
             <a:avLst/>
           </a:prstGeom>
           <a:solidFill>
-            <a:srgbClr val="FFFFFF"/>
+            <a:srgbClr val="1B1F27"/>
           </a:solidFill>
-          <a:ln w="12700">
+          <a:ln w="19050">
             <a:solidFill>
-              <a:srgbClr val="D5DEE8"/>
+              <a:srgbClr val="E7B43C"/>
             </a:solidFill>
           </a:ln>
           <a:effectLst/>
@@ -5857,20 +11186,20 @@
       </p:sp>
       <p:sp>
         <p:nvSpPr>
-          <p:cNvPr id="60" name="Rectangle 59"/>
+          <p:cNvPr id="18" name="Rectangle 17"/>
           <p:cNvSpPr/>
           <p:nvPr/>
         </p:nvSpPr>
         <p:spPr>
           <a:xfrm>
-            <a:off x="9454896" y="5596128"/>
-            <a:ext cx="2039112" cy="50800"/>
+            <a:off x="7635240" y="2651760"/>
+            <a:ext cx="2011680" cy="63500"/>
           </a:xfrm>
           <a:prstGeom prst="rect">
             <a:avLst/>
           </a:prstGeom>
           <a:solidFill>
-            <a:srgbClr val="C0532B"/>
+            <a:srgbClr val="E7B43C"/>
           </a:solidFill>
           <a:ln>
             <a:noFill/>
@@ -5901,14 +11230,14 @@
       </p:sp>
       <p:sp>
         <p:nvSpPr>
-          <p:cNvPr id="61" name="TextBox 60"/>
+          <p:cNvPr id="19" name="TextBox 18"/>
           <p:cNvSpPr txBox="1"/>
           <p:nvPr/>
         </p:nvSpPr>
         <p:spPr>
           <a:xfrm>
-            <a:off x="9454896" y="5669280"/>
-            <a:ext cx="2039112" cy="548640"/>
+            <a:off x="7744968" y="2743200"/>
+            <a:ext cx="1792224" cy="960120"/>
           </a:xfrm>
           <a:prstGeom prst="rect">
             <a:avLst/>
@@ -5916,68 +11245,7 @@
           <a:noFill/>
         </p:spPr>
         <p:txBody>
-          <a:bodyPr wrap="square" anchor="t" tIns="0" bIns="0">
-            <a:spAutoFit/>
-          </a:bodyPr>
-          <a:lstStyle/>
-          <a:p>
-            <a:pPr algn="ctr">
-              <a:spcBef>
-                <a:spcPts val="0"/>
-              </a:spcBef>
-              <a:spcAft>
-                <a:spcPts val="200"/>
-              </a:spcAft>
-            </a:pPr>
-            <a:r>
-              <a:rPr sz="1150" b="1">
-                <a:solidFill>
-                  <a:srgbClr val="0F2A4A"/>
-                </a:solidFill>
-                <a:latin typeface="Microsoft JhengHei"/>
-              </a:rPr>
-              <a:t>正式上線</a:t>
-            </a:r>
-          </a:p>
-          <a:p>
-            <a:pPr algn="ctr">
-              <a:spcBef>
-                <a:spcPts val="0"/>
-              </a:spcBef>
-              <a:spcAft>
-                <a:spcPts val="200"/>
-              </a:spcAft>
-            </a:pPr>
-            <a:r>
-              <a:rPr sz="900" b="0">
-                <a:solidFill>
-                  <a:srgbClr val="444F5B"/>
-                </a:solidFill>
-                <a:latin typeface="Microsoft JhengHei"/>
-              </a:rPr>
-              <a:t>部署／申報產出／訓練</a:t>
-            </a:r>
-          </a:p>
-        </p:txBody>
-      </p:sp>
-      <p:sp>
-        <p:nvSpPr>
-          <p:cNvPr id="62" name="TextBox 61"/>
-          <p:cNvSpPr txBox="1"/>
-          <p:nvPr/>
-        </p:nvSpPr>
-        <p:spPr>
-          <a:xfrm>
-            <a:off x="9454896" y="6272784"/>
-            <a:ext cx="2039112" cy="256032"/>
-          </a:xfrm>
-          <a:prstGeom prst="rect">
-            <a:avLst/>
-          </a:prstGeom>
-          <a:noFill/>
-        </p:spPr>
-        <p:txBody>
-          <a:bodyPr wrap="square" anchor="t" tIns="0" bIns="0">
+          <a:bodyPr wrap="square" anchor="ctr" tIns="0" bIns="0" lIns="25400" rIns="25400">
             <a:spAutoFit/>
           </a:bodyPr>
           <a:lstStyle/>
@@ -5991,38 +11259,15 @@
               </a:spcAft>
             </a:pPr>
             <a:r>
-              <a:rPr sz="900" b="1">
-                <a:solidFill>
-                  <a:srgbClr val="C0532B"/>
+              <a:rPr sz="1250" b="1">
+                <a:solidFill>
+                  <a:srgbClr val="FFFFFF"/>
                 </a:solidFill>
                 <a:latin typeface="Microsoft JhengHei"/>
               </a:rPr>
-              <a:t>◆ 正式上線</a:t>
-            </a:r>
-          </a:p>
-        </p:txBody>
-      </p:sp>
-      <p:sp>
-        <p:nvSpPr>
-          <p:cNvPr id="63" name="TextBox 62"/>
-          <p:cNvSpPr txBox="1"/>
-          <p:nvPr/>
-        </p:nvSpPr>
-        <p:spPr>
-          <a:xfrm>
-            <a:off x="411480" y="6583680"/>
-            <a:ext cx="11384280" cy="256032"/>
-          </a:xfrm>
-          <a:prstGeom prst="rect">
-            <a:avLst/>
-          </a:prstGeom>
-          <a:noFill/>
-        </p:spPr>
-        <p:txBody>
-          <a:bodyPr wrap="square" anchor="t" tIns="0" bIns="0">
-            <a:spAutoFit/>
-          </a:bodyPr>
-          <a:lstStyle/>
+              <a:t>④ 準確性驗證</a:t>
+            </a:r>
+          </a:p>
           <a:p>
             <a:pPr algn="ctr">
               <a:spcBef>
@@ -6033,13 +11278,1008 @@
               </a:spcAft>
             </a:pPr>
             <a:r>
-              <a:rPr sz="1050" b="1">
-                <a:solidFill>
-                  <a:srgbClr val="0F2A4A"/>
+              <a:rPr sz="950" b="0">
+                <a:solidFill>
+                  <a:srgbClr val="8A93A1"/>
                 </a:solidFill>
                 <a:latin typeface="Microsoft JhengHei"/>
               </a:rPr>
-              <a:t>下一步：確認 TO-BE 流程並凍結需求 ▶ 定義計算公式與 Agent 規格 ▶ 完成歷史資料盤點（需相關單位協助提供資料來源與申報欄位）</a:t>
+              <a:t>歷史資料對帳　異常檢核</a:t>
+            </a:r>
+          </a:p>
+        </p:txBody>
+      </p:sp>
+      <p:sp>
+        <p:nvSpPr>
+          <p:cNvPr id="20" name="Rectangle 19"/>
+          <p:cNvSpPr/>
+          <p:nvPr/>
+        </p:nvSpPr>
+        <p:spPr>
+          <a:xfrm>
+            <a:off x="10012680" y="2651760"/>
+            <a:ext cx="2011680" cy="1143000"/>
+          </a:xfrm>
+          <a:prstGeom prst="rect">
+            <a:avLst/>
+          </a:prstGeom>
+          <a:solidFill>
+            <a:srgbClr val="1B1F27"/>
+          </a:solidFill>
+          <a:ln w="19050">
+            <a:solidFill>
+              <a:srgbClr val="C77DE0"/>
+            </a:solidFill>
+          </a:ln>
+          <a:effectLst/>
+        </p:spPr>
+        <p:style>
+          <a:lnRef idx="1">
+            <a:schemeClr val="accent1"/>
+          </a:lnRef>
+          <a:fillRef idx="3">
+            <a:schemeClr val="accent1"/>
+          </a:fillRef>
+          <a:effectRef idx="2">
+            <a:schemeClr val="accent1"/>
+          </a:effectRef>
+          <a:fontRef idx="minor">
+            <a:schemeClr val="lt1"/>
+          </a:fontRef>
+        </p:style>
+        <p:txBody>
+          <a:bodyPr rtlCol="0" anchor="ctr"/>
+          <a:lstStyle/>
+          <a:p>
+            <a:pPr algn="ctr"/>
+          </a:p>
+        </p:txBody>
+      </p:sp>
+      <p:sp>
+        <p:nvSpPr>
+          <p:cNvPr id="21" name="Rectangle 20"/>
+          <p:cNvSpPr/>
+          <p:nvPr/>
+        </p:nvSpPr>
+        <p:spPr>
+          <a:xfrm>
+            <a:off x="10012680" y="2651760"/>
+            <a:ext cx="2011680" cy="63500"/>
+          </a:xfrm>
+          <a:prstGeom prst="rect">
+            <a:avLst/>
+          </a:prstGeom>
+          <a:solidFill>
+            <a:srgbClr val="C77DE0"/>
+          </a:solidFill>
+          <a:ln>
+            <a:noFill/>
+          </a:ln>
+          <a:effectLst/>
+        </p:spPr>
+        <p:style>
+          <a:lnRef idx="1">
+            <a:schemeClr val="accent1"/>
+          </a:lnRef>
+          <a:fillRef idx="3">
+            <a:schemeClr val="accent1"/>
+          </a:fillRef>
+          <a:effectRef idx="2">
+            <a:schemeClr val="accent1"/>
+          </a:effectRef>
+          <a:fontRef idx="minor">
+            <a:schemeClr val="lt1"/>
+          </a:fontRef>
+        </p:style>
+        <p:txBody>
+          <a:bodyPr rtlCol="0" anchor="ctr"/>
+          <a:lstStyle/>
+          <a:p>
+            <a:pPr algn="ctr"/>
+          </a:p>
+        </p:txBody>
+      </p:sp>
+      <p:sp>
+        <p:nvSpPr>
+          <p:cNvPr id="22" name="TextBox 21"/>
+          <p:cNvSpPr txBox="1"/>
+          <p:nvPr/>
+        </p:nvSpPr>
+        <p:spPr>
+          <a:xfrm>
+            <a:off x="10122408" y="2743200"/>
+            <a:ext cx="1792224" cy="960120"/>
+          </a:xfrm>
+          <a:prstGeom prst="rect">
+            <a:avLst/>
+          </a:prstGeom>
+          <a:noFill/>
+        </p:spPr>
+        <p:txBody>
+          <a:bodyPr wrap="square" anchor="ctr" tIns="0" bIns="0" lIns="25400" rIns="25400">
+            <a:spAutoFit/>
+          </a:bodyPr>
+          <a:lstStyle/>
+          <a:p>
+            <a:pPr algn="ctr">
+              <a:spcBef>
+                <a:spcPts val="0"/>
+              </a:spcBef>
+              <a:spcAft>
+                <a:spcPts val="300"/>
+              </a:spcAft>
+            </a:pPr>
+            <a:r>
+              <a:rPr sz="1250" b="1">
+                <a:solidFill>
+                  <a:srgbClr val="FFFFFF"/>
+                </a:solidFill>
+                <a:latin typeface="Microsoft JhengHei"/>
+              </a:rPr>
+              <a:t>⑤ 申報資料整理</a:t>
+            </a:r>
+          </a:p>
+          <a:p>
+            <a:pPr algn="ctr">
+              <a:spcBef>
+                <a:spcPts val="0"/>
+              </a:spcBef>
+              <a:spcAft>
+                <a:spcPts val="300"/>
+              </a:spcAft>
+            </a:pPr>
+            <a:r>
+              <a:rPr sz="950" b="0">
+                <a:solidFill>
+                  <a:srgbClr val="8A93A1"/>
+                </a:solidFill>
+                <a:latin typeface="Microsoft JhengHei"/>
+              </a:rPr>
+              <a:t>自動彙整　產出申報報表</a:t>
+            </a:r>
+          </a:p>
+        </p:txBody>
+      </p:sp>
+      <p:sp>
+        <p:nvSpPr>
+          <p:cNvPr id="23" name="Right Arrow 22"/>
+          <p:cNvSpPr/>
+          <p:nvPr/>
+        </p:nvSpPr>
+        <p:spPr>
+          <a:xfrm>
+            <a:off x="2551176" y="3076956"/>
+            <a:ext cx="475488" cy="292608"/>
+          </a:xfrm>
+          <a:prstGeom prst="rightArrow">
+            <a:avLst/>
+          </a:prstGeom>
+          <a:solidFill>
+            <a:srgbClr val="35D0E6"/>
+          </a:solidFill>
+          <a:ln>
+            <a:noFill/>
+          </a:ln>
+          <a:effectLst/>
+        </p:spPr>
+        <p:style>
+          <a:lnRef idx="1">
+            <a:schemeClr val="accent1"/>
+          </a:lnRef>
+          <a:fillRef idx="3">
+            <a:schemeClr val="accent1"/>
+          </a:fillRef>
+          <a:effectRef idx="2">
+            <a:schemeClr val="accent1"/>
+          </a:effectRef>
+          <a:fontRef idx="minor">
+            <a:schemeClr val="lt1"/>
+          </a:fontRef>
+        </p:style>
+        <p:txBody>
+          <a:bodyPr rtlCol="0" anchor="ctr"/>
+          <a:lstStyle/>
+          <a:p>
+            <a:pPr algn="ctr"/>
+          </a:p>
+        </p:txBody>
+      </p:sp>
+      <p:sp>
+        <p:nvSpPr>
+          <p:cNvPr id="24" name="Right Arrow 23"/>
+          <p:cNvSpPr/>
+          <p:nvPr/>
+        </p:nvSpPr>
+        <p:spPr>
+          <a:xfrm>
+            <a:off x="4928616" y="3076956"/>
+            <a:ext cx="475488" cy="292608"/>
+          </a:xfrm>
+          <a:prstGeom prst="rightArrow">
+            <a:avLst/>
+          </a:prstGeom>
+          <a:solidFill>
+            <a:srgbClr val="35D0E6"/>
+          </a:solidFill>
+          <a:ln>
+            <a:noFill/>
+          </a:ln>
+          <a:effectLst/>
+        </p:spPr>
+        <p:style>
+          <a:lnRef idx="1">
+            <a:schemeClr val="accent1"/>
+          </a:lnRef>
+          <a:fillRef idx="3">
+            <a:schemeClr val="accent1"/>
+          </a:fillRef>
+          <a:effectRef idx="2">
+            <a:schemeClr val="accent1"/>
+          </a:effectRef>
+          <a:fontRef idx="minor">
+            <a:schemeClr val="lt1"/>
+          </a:fontRef>
+        </p:style>
+        <p:txBody>
+          <a:bodyPr rtlCol="0" anchor="ctr"/>
+          <a:lstStyle/>
+          <a:p>
+            <a:pPr algn="ctr"/>
+          </a:p>
+        </p:txBody>
+      </p:sp>
+      <p:sp>
+        <p:nvSpPr>
+          <p:cNvPr id="25" name="Right Arrow 24"/>
+          <p:cNvSpPr/>
+          <p:nvPr/>
+        </p:nvSpPr>
+        <p:spPr>
+          <a:xfrm>
+            <a:off x="7306056" y="3076956"/>
+            <a:ext cx="475488" cy="292608"/>
+          </a:xfrm>
+          <a:prstGeom prst="rightArrow">
+            <a:avLst/>
+          </a:prstGeom>
+          <a:solidFill>
+            <a:srgbClr val="35D0E6"/>
+          </a:solidFill>
+          <a:ln>
+            <a:noFill/>
+          </a:ln>
+          <a:effectLst/>
+        </p:spPr>
+        <p:style>
+          <a:lnRef idx="1">
+            <a:schemeClr val="accent1"/>
+          </a:lnRef>
+          <a:fillRef idx="3">
+            <a:schemeClr val="accent1"/>
+          </a:fillRef>
+          <a:effectRef idx="2">
+            <a:schemeClr val="accent1"/>
+          </a:effectRef>
+          <a:fontRef idx="minor">
+            <a:schemeClr val="lt1"/>
+          </a:fontRef>
+        </p:style>
+        <p:txBody>
+          <a:bodyPr rtlCol="0" anchor="ctr"/>
+          <a:lstStyle/>
+          <a:p>
+            <a:pPr algn="ctr"/>
+          </a:p>
+        </p:txBody>
+      </p:sp>
+      <p:sp>
+        <p:nvSpPr>
+          <p:cNvPr id="26" name="Right Arrow 25"/>
+          <p:cNvSpPr/>
+          <p:nvPr/>
+        </p:nvSpPr>
+        <p:spPr>
+          <a:xfrm>
+            <a:off x="9683496" y="3076956"/>
+            <a:ext cx="475488" cy="292608"/>
+          </a:xfrm>
+          <a:prstGeom prst="rightArrow">
+            <a:avLst/>
+          </a:prstGeom>
+          <a:solidFill>
+            <a:srgbClr val="35D0E6"/>
+          </a:solidFill>
+          <a:ln>
+            <a:noFill/>
+          </a:ln>
+          <a:effectLst/>
+        </p:spPr>
+        <p:style>
+          <a:lnRef idx="1">
+            <a:schemeClr val="accent1"/>
+          </a:lnRef>
+          <a:fillRef idx="3">
+            <a:schemeClr val="accent1"/>
+          </a:fillRef>
+          <a:effectRef idx="2">
+            <a:schemeClr val="accent1"/>
+          </a:effectRef>
+          <a:fontRef idx="minor">
+            <a:schemeClr val="lt1"/>
+          </a:fontRef>
+        </p:style>
+        <p:txBody>
+          <a:bodyPr rtlCol="0" anchor="ctr"/>
+          <a:lstStyle/>
+          <a:p>
+            <a:pPr algn="ctr"/>
+          </a:p>
+        </p:txBody>
+      </p:sp>
+      <p:sp>
+        <p:nvSpPr>
+          <p:cNvPr id="27" name="Rectangle 26"/>
+          <p:cNvSpPr/>
+          <p:nvPr/>
+        </p:nvSpPr>
+        <p:spPr>
+          <a:xfrm>
+            <a:off x="5120640" y="1691640"/>
+            <a:ext cx="2286000" cy="502920"/>
+          </a:xfrm>
+          <a:prstGeom prst="rect">
+            <a:avLst/>
+          </a:prstGeom>
+          <a:solidFill>
+            <a:srgbClr val="2A2F39"/>
+          </a:solidFill>
+          <a:ln w="12700">
+            <a:solidFill>
+              <a:srgbClr val="35D0E6"/>
+            </a:solidFill>
+          </a:ln>
+          <a:effectLst/>
+        </p:spPr>
+        <p:style>
+          <a:lnRef idx="1">
+            <a:schemeClr val="accent1"/>
+          </a:lnRef>
+          <a:fillRef idx="3">
+            <a:schemeClr val="accent1"/>
+          </a:fillRef>
+          <a:effectRef idx="2">
+            <a:schemeClr val="accent1"/>
+          </a:effectRef>
+          <a:fontRef idx="minor">
+            <a:schemeClr val="lt1"/>
+          </a:fontRef>
+        </p:style>
+        <p:txBody>
+          <a:bodyPr rtlCol="0" anchor="ctr"/>
+          <a:lstStyle/>
+          <a:p>
+            <a:pPr algn="ctr"/>
+          </a:p>
+        </p:txBody>
+      </p:sp>
+      <p:sp>
+        <p:nvSpPr>
+          <p:cNvPr id="28" name="TextBox 27"/>
+          <p:cNvSpPr txBox="1"/>
+          <p:nvPr/>
+        </p:nvSpPr>
+        <p:spPr>
+          <a:xfrm>
+            <a:off x="5120640" y="1691640"/>
+            <a:ext cx="2286000" cy="502920"/>
+          </a:xfrm>
+          <a:prstGeom prst="rect">
+            <a:avLst/>
+          </a:prstGeom>
+          <a:noFill/>
+        </p:spPr>
+        <p:txBody>
+          <a:bodyPr wrap="square" anchor="ctr" tIns="0" bIns="0" lIns="25400" rIns="25400">
+            <a:spAutoFit/>
+          </a:bodyPr>
+          <a:lstStyle/>
+          <a:p>
+            <a:pPr algn="ctr">
+              <a:spcBef>
+                <a:spcPts val="0"/>
+              </a:spcBef>
+              <a:spcAft>
+                <a:spcPts val="300"/>
+              </a:spcAft>
+            </a:pPr>
+            <a:r>
+              <a:rPr sz="1100" b="1">
+                <a:solidFill>
+                  <a:srgbClr val="35D0E6"/>
+                </a:solidFill>
+                <a:latin typeface="Microsoft JhengHei"/>
+              </a:rPr>
+              <a:t>Agent 代理層（自動編排）</a:t>
+            </a:r>
+          </a:p>
+        </p:txBody>
+      </p:sp>
+      <p:cxnSp>
+        <p:nvCxnSpPr>
+          <p:cNvPr id="29" name="Connector 28"/>
+          <p:cNvCxnSpPr/>
+          <p:nvPr/>
+        </p:nvCxnSpPr>
+        <p:spPr>
+          <a:xfrm>
+            <a:off x="6263640" y="2194560"/>
+            <a:ext cx="0" cy="457200"/>
+          </a:xfrm>
+          <a:prstGeom prst="line">
+            <a:avLst/>
+          </a:prstGeom>
+          <a:ln w="15875">
+            <a:solidFill>
+              <a:srgbClr val="35D0E6"/>
+            </a:solidFill>
+            <a:prstDash val="sysDash"/>
+          </a:ln>
+        </p:spPr>
+        <p:style>
+          <a:lnRef idx="2">
+            <a:schemeClr val="accent1"/>
+          </a:lnRef>
+          <a:fillRef idx="0">
+            <a:schemeClr val="accent1"/>
+          </a:fillRef>
+          <a:effectRef idx="1">
+            <a:schemeClr val="accent1"/>
+          </a:effectRef>
+          <a:fontRef idx="minor">
+            <a:schemeClr val="tx1"/>
+          </a:fontRef>
+        </p:style>
+      </p:cxnSp>
+      <p:sp>
+        <p:nvSpPr>
+          <p:cNvPr id="30" name="Rectangle 29"/>
+          <p:cNvSpPr/>
+          <p:nvPr/>
+        </p:nvSpPr>
+        <p:spPr>
+          <a:xfrm>
+            <a:off x="10012680" y="4434840"/>
+            <a:ext cx="2011680" cy="1143000"/>
+          </a:xfrm>
+          <a:prstGeom prst="rect">
+            <a:avLst/>
+          </a:prstGeom>
+          <a:solidFill>
+            <a:srgbClr val="1B1F27"/>
+          </a:solidFill>
+          <a:ln w="19050">
+            <a:solidFill>
+              <a:srgbClr val="4FC17A"/>
+            </a:solidFill>
+          </a:ln>
+          <a:effectLst/>
+        </p:spPr>
+        <p:style>
+          <a:lnRef idx="1">
+            <a:schemeClr val="accent1"/>
+          </a:lnRef>
+          <a:fillRef idx="3">
+            <a:schemeClr val="accent1"/>
+          </a:fillRef>
+          <a:effectRef idx="2">
+            <a:schemeClr val="accent1"/>
+          </a:effectRef>
+          <a:fontRef idx="minor">
+            <a:schemeClr val="lt1"/>
+          </a:fontRef>
+        </p:style>
+        <p:txBody>
+          <a:bodyPr rtlCol="0" anchor="ctr"/>
+          <a:lstStyle/>
+          <a:p>
+            <a:pPr algn="ctr"/>
+          </a:p>
+        </p:txBody>
+      </p:sp>
+      <p:sp>
+        <p:nvSpPr>
+          <p:cNvPr id="31" name="Rectangle 30"/>
+          <p:cNvSpPr/>
+          <p:nvPr/>
+        </p:nvSpPr>
+        <p:spPr>
+          <a:xfrm>
+            <a:off x="10012680" y="4434840"/>
+            <a:ext cx="2011680" cy="63500"/>
+          </a:xfrm>
+          <a:prstGeom prst="rect">
+            <a:avLst/>
+          </a:prstGeom>
+          <a:solidFill>
+            <a:srgbClr val="4FC17A"/>
+          </a:solidFill>
+          <a:ln>
+            <a:noFill/>
+          </a:ln>
+          <a:effectLst/>
+        </p:spPr>
+        <p:style>
+          <a:lnRef idx="1">
+            <a:schemeClr val="accent1"/>
+          </a:lnRef>
+          <a:fillRef idx="3">
+            <a:schemeClr val="accent1"/>
+          </a:fillRef>
+          <a:effectRef idx="2">
+            <a:schemeClr val="accent1"/>
+          </a:effectRef>
+          <a:fontRef idx="minor">
+            <a:schemeClr val="lt1"/>
+          </a:fontRef>
+        </p:style>
+        <p:txBody>
+          <a:bodyPr rtlCol="0" anchor="ctr"/>
+          <a:lstStyle/>
+          <a:p>
+            <a:pPr algn="ctr"/>
+          </a:p>
+        </p:txBody>
+      </p:sp>
+      <p:sp>
+        <p:nvSpPr>
+          <p:cNvPr id="32" name="TextBox 31"/>
+          <p:cNvSpPr txBox="1"/>
+          <p:nvPr/>
+        </p:nvSpPr>
+        <p:spPr>
+          <a:xfrm>
+            <a:off x="10122408" y="4526280"/>
+            <a:ext cx="1792224" cy="960120"/>
+          </a:xfrm>
+          <a:prstGeom prst="rect">
+            <a:avLst/>
+          </a:prstGeom>
+          <a:noFill/>
+        </p:spPr>
+        <p:txBody>
+          <a:bodyPr wrap="square" anchor="ctr" tIns="0" bIns="0" lIns="25400" rIns="25400">
+            <a:spAutoFit/>
+          </a:bodyPr>
+          <a:lstStyle/>
+          <a:p>
+            <a:pPr algn="ctr">
+              <a:spcBef>
+                <a:spcPts val="0"/>
+              </a:spcBef>
+              <a:spcAft>
+                <a:spcPts val="300"/>
+              </a:spcAft>
+            </a:pPr>
+            <a:r>
+              <a:rPr sz="1250" b="1">
+                <a:solidFill>
+                  <a:srgbClr val="FFFFFF"/>
+                </a:solidFill>
+                <a:latin typeface="Microsoft JhengHei"/>
+              </a:rPr>
+              <a:t>⑥ 輸出 / 交付</a:t>
+            </a:r>
+          </a:p>
+          <a:p>
+            <a:pPr algn="ctr">
+              <a:spcBef>
+                <a:spcPts val="0"/>
+              </a:spcBef>
+              <a:spcAft>
+                <a:spcPts val="300"/>
+              </a:spcAft>
+            </a:pPr>
+            <a:r>
+              <a:rPr sz="950" b="0">
+                <a:solidFill>
+                  <a:srgbClr val="8A93A1"/>
+                </a:solidFill>
+                <a:latin typeface="Microsoft JhengHei"/>
+              </a:rPr>
+              <a:t>申報報表　管理儀表板</a:t>
+            </a:r>
+          </a:p>
+        </p:txBody>
+      </p:sp>
+      <p:cxnSp>
+        <p:nvCxnSpPr>
+          <p:cNvPr id="33" name="Connector 32"/>
+          <p:cNvCxnSpPr/>
+          <p:nvPr/>
+        </p:nvCxnSpPr>
+        <p:spPr>
+          <a:xfrm>
+            <a:off x="11018520" y="3794760"/>
+            <a:ext cx="0" cy="640080"/>
+          </a:xfrm>
+          <a:prstGeom prst="line">
+            <a:avLst/>
+          </a:prstGeom>
+          <a:ln w="25400">
+            <a:solidFill>
+              <a:srgbClr val="4FC17A"/>
+            </a:solidFill>
+          </a:ln>
+        </p:spPr>
+        <p:style>
+          <a:lnRef idx="2">
+            <a:schemeClr val="accent1"/>
+          </a:lnRef>
+          <a:fillRef idx="0">
+            <a:schemeClr val="accent1"/>
+          </a:fillRef>
+          <a:effectRef idx="1">
+            <a:schemeClr val="accent1"/>
+          </a:effectRef>
+          <a:fontRef idx="minor">
+            <a:schemeClr val="tx1"/>
+          </a:fontRef>
+        </p:style>
+      </p:cxnSp>
+      <p:cxnSp>
+        <p:nvCxnSpPr>
+          <p:cNvPr id="34" name="Connector 33"/>
+          <p:cNvCxnSpPr/>
+          <p:nvPr/>
+        </p:nvCxnSpPr>
+        <p:spPr>
+          <a:xfrm flipH="1">
+            <a:off x="6263640" y="4023360"/>
+            <a:ext cx="2377440" cy="0"/>
+          </a:xfrm>
+          <a:prstGeom prst="line">
+            <a:avLst/>
+          </a:prstGeom>
+          <a:ln w="19050">
+            <a:solidFill>
+              <a:srgbClr val="E7B43C"/>
+            </a:solidFill>
+            <a:prstDash val="sysDash"/>
+          </a:ln>
+        </p:spPr>
+        <p:style>
+          <a:lnRef idx="2">
+            <a:schemeClr val="accent1"/>
+          </a:lnRef>
+          <a:fillRef idx="0">
+            <a:schemeClr val="accent1"/>
+          </a:fillRef>
+          <a:effectRef idx="1">
+            <a:schemeClr val="accent1"/>
+          </a:effectRef>
+          <a:fontRef idx="minor">
+            <a:schemeClr val="tx1"/>
+          </a:fontRef>
+        </p:style>
+      </p:cxnSp>
+      <p:cxnSp>
+        <p:nvCxnSpPr>
+          <p:cNvPr id="35" name="Connector 34"/>
+          <p:cNvCxnSpPr/>
+          <p:nvPr/>
+        </p:nvCxnSpPr>
+        <p:spPr>
+          <a:xfrm>
+            <a:off x="8641080" y="3794760"/>
+            <a:ext cx="0" cy="228600"/>
+          </a:xfrm>
+          <a:prstGeom prst="line">
+            <a:avLst/>
+          </a:prstGeom>
+          <a:ln w="19050">
+            <a:solidFill>
+              <a:srgbClr val="E7B43C"/>
+            </a:solidFill>
+            <a:prstDash val="sysDash"/>
+          </a:ln>
+        </p:spPr>
+        <p:style>
+          <a:lnRef idx="2">
+            <a:schemeClr val="accent1"/>
+          </a:lnRef>
+          <a:fillRef idx="0">
+            <a:schemeClr val="accent1"/>
+          </a:fillRef>
+          <a:effectRef idx="1">
+            <a:schemeClr val="accent1"/>
+          </a:effectRef>
+          <a:fontRef idx="minor">
+            <a:schemeClr val="tx1"/>
+          </a:fontRef>
+        </p:style>
+      </p:cxnSp>
+      <p:cxnSp>
+        <p:nvCxnSpPr>
+          <p:cNvPr id="36" name="Connector 35"/>
+          <p:cNvCxnSpPr/>
+          <p:nvPr/>
+        </p:nvCxnSpPr>
+        <p:spPr>
+          <a:xfrm flipV="1">
+            <a:off x="6263640" y="3794760"/>
+            <a:ext cx="0" cy="228600"/>
+          </a:xfrm>
+          <a:prstGeom prst="line">
+            <a:avLst/>
+          </a:prstGeom>
+          <a:ln w="19050">
+            <a:solidFill>
+              <a:srgbClr val="E7B43C"/>
+            </a:solidFill>
+            <a:prstDash val="sysDash"/>
+          </a:ln>
+        </p:spPr>
+        <p:style>
+          <a:lnRef idx="2">
+            <a:schemeClr val="accent1"/>
+          </a:lnRef>
+          <a:fillRef idx="0">
+            <a:schemeClr val="accent1"/>
+          </a:fillRef>
+          <a:effectRef idx="1">
+            <a:schemeClr val="accent1"/>
+          </a:effectRef>
+          <a:fontRef idx="minor">
+            <a:schemeClr val="tx1"/>
+          </a:fontRef>
+        </p:style>
+      </p:cxnSp>
+      <p:sp>
+        <p:nvSpPr>
+          <p:cNvPr id="37" name="TextBox 36"/>
+          <p:cNvSpPr txBox="1"/>
+          <p:nvPr/>
+        </p:nvSpPr>
+        <p:spPr>
+          <a:xfrm>
+            <a:off x="6400800" y="4069080"/>
+            <a:ext cx="2194560" cy="274320"/>
+          </a:xfrm>
+          <a:prstGeom prst="rect">
+            <a:avLst/>
+          </a:prstGeom>
+          <a:noFill/>
+        </p:spPr>
+        <p:txBody>
+          <a:bodyPr wrap="square" anchor="t" tIns="0" bIns="0" lIns="25400" rIns="25400">
+            <a:spAutoFit/>
+          </a:bodyPr>
+          <a:lstStyle/>
+          <a:p>
+            <a:pPr algn="ctr">
+              <a:spcBef>
+                <a:spcPts val="0"/>
+              </a:spcBef>
+              <a:spcAft>
+                <a:spcPts val="300"/>
+              </a:spcAft>
+            </a:pPr>
+            <a:r>
+              <a:rPr sz="950" b="1">
+                <a:solidFill>
+                  <a:srgbClr val="E7B43C"/>
+                </a:solidFill>
+                <a:latin typeface="Microsoft JhengHei"/>
+              </a:rPr>
+              <a:t>驗證異常 → 回饋修正</a:t>
+            </a:r>
+          </a:p>
+        </p:txBody>
+      </p:sp>
+      <p:sp>
+        <p:nvSpPr>
+          <p:cNvPr id="38" name="Rectangle 37"/>
+          <p:cNvSpPr/>
+          <p:nvPr/>
+        </p:nvSpPr>
+        <p:spPr>
+          <a:xfrm>
+            <a:off x="502920" y="5120640"/>
+            <a:ext cx="9052560" cy="1280160"/>
+          </a:xfrm>
+          <a:prstGeom prst="rect">
+            <a:avLst/>
+          </a:prstGeom>
+          <a:solidFill>
+            <a:srgbClr val="1B1F27"/>
+          </a:solidFill>
+          <a:ln>
+            <a:noFill/>
+          </a:ln>
+          <a:effectLst/>
+        </p:spPr>
+        <p:style>
+          <a:lnRef idx="1">
+            <a:schemeClr val="accent1"/>
+          </a:lnRef>
+          <a:fillRef idx="3">
+            <a:schemeClr val="accent1"/>
+          </a:fillRef>
+          <a:effectRef idx="2">
+            <a:schemeClr val="accent1"/>
+          </a:effectRef>
+          <a:fontRef idx="minor">
+            <a:schemeClr val="lt1"/>
+          </a:fontRef>
+        </p:style>
+        <p:txBody>
+          <a:bodyPr rtlCol="0" anchor="ctr"/>
+          <a:lstStyle/>
+          <a:p>
+            <a:pPr algn="ctr"/>
+          </a:p>
+        </p:txBody>
+      </p:sp>
+      <p:sp>
+        <p:nvSpPr>
+          <p:cNvPr id="39" name="TextBox 38"/>
+          <p:cNvSpPr txBox="1"/>
+          <p:nvPr/>
+        </p:nvSpPr>
+        <p:spPr>
+          <a:xfrm>
+            <a:off x="685800" y="5212080"/>
+            <a:ext cx="8686800" cy="274320"/>
+          </a:xfrm>
+          <a:prstGeom prst="rect">
+            <a:avLst/>
+          </a:prstGeom>
+          <a:noFill/>
+        </p:spPr>
+        <p:txBody>
+          <a:bodyPr wrap="square" anchor="t" tIns="0" bIns="0" lIns="25400" rIns="25400">
+            <a:spAutoFit/>
+          </a:bodyPr>
+          <a:lstStyle/>
+          <a:p>
+            <a:pPr algn="l">
+              <a:spcBef>
+                <a:spcPts val="0"/>
+              </a:spcBef>
+              <a:spcAft>
+                <a:spcPts val="300"/>
+              </a:spcAft>
+            </a:pPr>
+            <a:r>
+              <a:rPr sz="1300" b="1">
+                <a:solidFill>
+                  <a:srgbClr val="35D0E6"/>
+                </a:solidFill>
+                <a:latin typeface="Microsoft JhengHei"/>
+              </a:rPr>
+              <a:t>流程說明</a:t>
+            </a:r>
+          </a:p>
+        </p:txBody>
+      </p:sp>
+      <p:sp>
+        <p:nvSpPr>
+          <p:cNvPr id="40" name="TextBox 39"/>
+          <p:cNvSpPr txBox="1"/>
+          <p:nvPr/>
+        </p:nvSpPr>
+        <p:spPr>
+          <a:xfrm>
+            <a:off x="685800" y="5559552"/>
+            <a:ext cx="8686800" cy="777240"/>
+          </a:xfrm>
+          <a:prstGeom prst="rect">
+            <a:avLst/>
+          </a:prstGeom>
+          <a:noFill/>
+        </p:spPr>
+        <p:txBody>
+          <a:bodyPr wrap="square" anchor="t" tIns="0" bIns="0" lIns="25400" rIns="25400">
+            <a:spAutoFit/>
+          </a:bodyPr>
+          <a:lstStyle/>
+          <a:p>
+            <a:pPr algn="l">
+              <a:spcBef>
+                <a:spcPts val="0"/>
+              </a:spcBef>
+              <a:spcAft>
+                <a:spcPts val="500"/>
+              </a:spcAft>
+            </a:pPr>
+            <a:r>
+              <a:rPr sz="1100" b="0">
+                <a:solidFill>
+                  <a:srgbClr val="C9CFD8"/>
+                </a:solidFill>
+                <a:latin typeface="Microsoft JhengHei"/>
+              </a:rPr>
+              <a:t>‧ 資料自來源彙整後經清洗與結構化進入知識庫，作為計算依據。</a:t>
+            </a:r>
+          </a:p>
+          <a:p>
+            <a:pPr algn="l">
+              <a:spcBef>
+                <a:spcPts val="0"/>
+              </a:spcBef>
+              <a:spcAft>
+                <a:spcPts val="500"/>
+              </a:spcAft>
+            </a:pPr>
+            <a:r>
+              <a:rPr sz="1100" b="0">
+                <a:solidFill>
+                  <a:srgbClr val="C9CFD8"/>
+                </a:solidFill>
+                <a:latin typeface="Microsoft JhengHei"/>
+              </a:rPr>
+              <a:t>‧ Agent 代理層自動編排平衡計算與蒸發量推算，結果經準確性驗證；異常則回饋修正後重算。</a:t>
+            </a:r>
+          </a:p>
+          <a:p>
+            <a:pPr algn="l">
+              <a:spcBef>
+                <a:spcPts val="0"/>
+              </a:spcBef>
+              <a:spcAft>
+                <a:spcPts val="500"/>
+              </a:spcAft>
+            </a:pPr>
+            <a:r>
+              <a:rPr sz="1100" b="0">
+                <a:solidFill>
+                  <a:srgbClr val="C9CFD8"/>
+                </a:solidFill>
+                <a:latin typeface="Microsoft JhengHei"/>
+              </a:rPr>
+              <a:t>‧ 驗證通過之數據自動整理為申報資料，輸出報表與管理儀表板。</a:t>
+            </a:r>
+          </a:p>
+        </p:txBody>
+      </p:sp>
+      <p:sp>
+        <p:nvSpPr>
+          <p:cNvPr id="41" name="TextBox 40"/>
+          <p:cNvSpPr txBox="1"/>
+          <p:nvPr/>
+        </p:nvSpPr>
+        <p:spPr>
+          <a:xfrm>
+            <a:off x="502920" y="6537960"/>
+            <a:ext cx="11247120" cy="228600"/>
+          </a:xfrm>
+          <a:prstGeom prst="rect">
+            <a:avLst/>
+          </a:prstGeom>
+          <a:noFill/>
+        </p:spPr>
+        <p:txBody>
+          <a:bodyPr wrap="square" anchor="t" tIns="0" bIns="0" lIns="25400" rIns="25400">
+            <a:spAutoFit/>
+          </a:bodyPr>
+          <a:lstStyle/>
+          <a:p>
+            <a:pPr algn="ctr">
+              <a:spcBef>
+                <a:spcPts val="0"/>
+              </a:spcBef>
+              <a:spcAft>
+                <a:spcPts val="300"/>
+              </a:spcAft>
+            </a:pPr>
+            <a:r>
+              <a:rPr sz="950" b="0">
+                <a:solidFill>
+                  <a:srgbClr val="8A93A1"/>
+                </a:solidFill>
+                <a:latin typeface="Microsoft JhengHei"/>
+              </a:rPr>
+              <a:t>實線＝主資料流　|　虛線＝回饋／代理控制流</a:t>
             </a:r>
           </a:p>
         </p:txBody>
